--- a/Embedding算法分析汇报_增强版.pptx
+++ b/Embedding算法分析汇报_增强版.pptx
@@ -5,17 +5,18 @@
     <p:sldMasterId id="2147483648" r:id="rId1"/>
   </p:sldMasterIdLst>
   <p:sldIdLst>
-    <p:sldId id="256" r:id="rId2"/>
-    <p:sldId id="257" r:id="rId3"/>
-    <p:sldId id="258" r:id="rId4"/>
-    <p:sldId id="259" r:id="rId5"/>
-    <p:sldId id="260" r:id="rId6"/>
-    <p:sldId id="261" r:id="rId7"/>
-    <p:sldId id="262" r:id="rId8"/>
-    <p:sldId id="263" r:id="rId9"/>
-    <p:sldId id="264" r:id="rId10"/>
+    <p:sldId id="256" r:id="rId3"/>
+    <p:sldId id="257" r:id="rId4"/>
+    <p:sldId id="258" r:id="rId5"/>
+    <p:sldId id="259" r:id="rId6"/>
+    <p:sldId id="260" r:id="rId7"/>
+    <p:sldId id="261" r:id="rId8"/>
+    <p:sldId id="262" r:id="rId9"/>
+    <p:sldId id="263" r:id="rId10"/>
+    <p:sldId id="264" r:id="rId11"/>
+    <p:sldId id="265" r:id="rId12"/>
   </p:sldIdLst>
-  <p:sldSz cx="12191999" cy="6858000" type="wide"/>
+  <p:sldSz cx="12191365" cy="6858000" type="screen4x3"/>
   <p:notesSz cx="6858000" cy="9144000"/>
   <p:defaultTextStyle>
     <a:defPPr>
@@ -53,6 +54,11 @@
 <file path=ppt/slideMasters/slideMaster1.xml><?xml version="1.0" encoding="utf-8"?>
 <p:sldMaster xmlns:a="http://schemas.openxmlformats.org/drawingml/2006/main" xmlns:r="http://schemas.openxmlformats.org/officeDocument/2006/relationships" xmlns:p="http://schemas.openxmlformats.org/presentationml/2006/main">
   <p:cSld>
+    <p:bg>
+      <p:bgRef idx="1001">
+        <a:schemeClr val="bg1"/>
+      </p:bgRef>
+    </p:bg>
     <p:spTree>
       <p:nvGrpSpPr>
         <p:cNvPr id="1" name=""/>
@@ -100,7 +106,7 @@
       </p:grpSpPr>
       <p:sp>
         <p:nvSpPr>
-          <p:cNvPr id="1" name="Background"/>
+          <p:cNvPr id="2" name="Background"/>
           <p:cNvSpPr/>
           <p:nvPr/>
         </p:nvSpPr>
@@ -122,7 +128,7 @@
       </p:sp>
       <p:sp>
         <p:nvSpPr>
-          <p:cNvPr id="2" name="Left accent"/>
+          <p:cNvPr id="3" name="Left accent"/>
           <p:cNvSpPr/>
           <p:nvPr/>
         </p:nvSpPr>
@@ -144,7 +150,7 @@
       </p:sp>
       <p:sp>
         <p:nvSpPr>
-          <p:cNvPr id="3" name="Title"/>
+          <p:cNvPr id="4" name="Title"/>
           <p:cNvSpPr txBox="1"/>
           <p:nvPr/>
         </p:nvSpPr>
@@ -173,17 +179,24 @@
                 <a:solidFill>
                   <a:srgbClr val="111827"/>
                 </a:solidFill>
-                <a:latin typeface="Microsoft YaHei"/>
-                <a:ea typeface="Microsoft YaHei"/>
+                <a:latin typeface="微软雅黑" panose="020B0503020204020204" charset="-122"/>
+                <a:ea typeface="微软雅黑" panose="020B0503020204020204" charset="-122"/>
               </a:rPr>
               <a:t>ROI Embedding 视觉检测方案</a:t>
             </a:r>
-          </a:p>
-        </p:txBody>
-      </p:sp>
-      <p:sp>
-        <p:nvSpPr>
-          <p:cNvPr id="4" name="Bottom teal dot"/>
+            <a:endParaRPr lang="zh-CN" sz="2400" b="1">
+              <a:solidFill>
+                <a:srgbClr val="111827"/>
+              </a:solidFill>
+              <a:latin typeface="微软雅黑" panose="020B0503020204020204" charset="-122"/>
+              <a:ea typeface="微软雅黑" panose="020B0503020204020204" charset="-122"/>
+            </a:endParaRPr>
+          </a:p>
+        </p:txBody>
+      </p:sp>
+      <p:sp>
+        <p:nvSpPr>
+          <p:cNvPr id="5" name="Bottom teal dot"/>
           <p:cNvSpPr/>
           <p:nvPr/>
         </p:nvSpPr>
@@ -205,7 +218,7 @@
       </p:sp>
       <p:sp>
         <p:nvSpPr>
-          <p:cNvPr id="5" name="Bottom teal dot 2"/>
+          <p:cNvPr id="6" name="Bottom teal dot 2"/>
           <p:cNvSpPr/>
           <p:nvPr/>
         </p:nvSpPr>
@@ -227,7 +240,7 @@
       </p:sp>
       <p:sp>
         <p:nvSpPr>
-          <p:cNvPr id="6" name="Bottom pill"/>
+          <p:cNvPr id="7" name="Bottom pill"/>
           <p:cNvSpPr/>
           <p:nvPr/>
         </p:nvSpPr>
@@ -249,7 +262,7 @@
       </p:sp>
       <p:sp>
         <p:nvSpPr>
-          <p:cNvPr id="7" name="Bottom teal dot 3"/>
+          <p:cNvPr id="8" name="Bottom teal dot 3"/>
           <p:cNvSpPr/>
           <p:nvPr/>
         </p:nvSpPr>
@@ -271,7 +284,7 @@
       </p:sp>
       <p:sp>
         <p:nvSpPr>
-          <p:cNvPr id="8" name="Bottom teal dot 4"/>
+          <p:cNvPr id="9" name="Bottom teal dot 4"/>
           <p:cNvSpPr/>
           <p:nvPr/>
         </p:nvSpPr>
@@ -322,11 +335,18 @@
                 <a:solidFill>
                   <a:srgbClr val="111827"/>
                 </a:solidFill>
-                <a:latin typeface="Microsoft YaHei"/>
-                <a:ea typeface="Microsoft YaHei"/>
+                <a:latin typeface="微软雅黑" panose="020B0503020204020204" charset="-122"/>
+                <a:ea typeface="微软雅黑" panose="020B0503020204020204" charset="-122"/>
               </a:rPr>
               <a:t>小样本学习检测：比传统阈值更稳的原因</a:t>
             </a:r>
+            <a:endParaRPr lang="zh-CN" sz="3000" b="1">
+              <a:solidFill>
+                <a:srgbClr val="111827"/>
+              </a:solidFill>
+              <a:latin typeface="微软雅黑" panose="020B0503020204020204" charset="-122"/>
+              <a:ea typeface="微软雅黑" panose="020B0503020204020204" charset="-122"/>
+            </a:endParaRPr>
           </a:p>
         </p:txBody>
       </p:sp>
@@ -361,11 +381,18 @@
                 <a:solidFill>
                   <a:srgbClr val="475569"/>
                 </a:solidFill>
-                <a:latin typeface="Microsoft YaHei"/>
-                <a:ea typeface="Microsoft YaHei"/>
+                <a:latin typeface="微软雅黑" panose="020B0503020204020204" charset="-122"/>
+                <a:ea typeface="微软雅黑" panose="020B0503020204020204" charset="-122"/>
               </a:rPr>
               <a:t>围绕：传统方法缺点、模型检测优势、算法原理、为什么丢弃分类头</a:t>
             </a:r>
+            <a:endParaRPr lang="zh-CN" sz="1600">
+              <a:solidFill>
+                <a:srgbClr val="475569"/>
+              </a:solidFill>
+              <a:latin typeface="微软雅黑" panose="020B0503020204020204" charset="-122"/>
+              <a:ea typeface="微软雅黑" panose="020B0503020204020204" charset="-122"/>
+            </a:endParaRPr>
           </a:p>
         </p:txBody>
       </p:sp>
@@ -418,23 +445,129 @@
           </a:bodyPr>
           <a:lstStyle/>
           <a:p>
-            <a:pPr algn="c"/>
+            <a:pPr algn="l"/>
             <a:r>
               <a:rPr lang="zh-CN" sz="1400" b="1">
                 <a:solidFill>
                   <a:srgbClr val="009CA6"/>
                 </a:solidFill>
-                <a:latin typeface="Microsoft YaHei"/>
-                <a:ea typeface="Microsoft YaHei"/>
+                <a:latin typeface="微软雅黑" panose="020B0503020204020204" charset="-122"/>
+                <a:ea typeface="微软雅黑" panose="020B0503020204020204" charset="-122"/>
               </a:rPr>
               <a:t>ROI 样本</a:t>
             </a:r>
+            <a:endParaRPr lang="zh-CN" sz="1400" b="1">
+              <a:solidFill>
+                <a:srgbClr val="009CA6"/>
+              </a:solidFill>
+              <a:latin typeface="微软雅黑" panose="020B0503020204020204" charset="-122"/>
+              <a:ea typeface="微软雅黑" panose="020B0503020204020204" charset="-122"/>
+            </a:endParaRPr>
           </a:p>
         </p:txBody>
       </p:sp>
       <p:pic>
         <p:nvPicPr>
           <p:cNvPr id="14" name="ROI 样本"/>
+          <p:cNvPicPr>
+            <a:picLocks noChangeAspect="1"/>
+          </p:cNvPicPr>
+          <p:nvPr/>
+        </p:nvPicPr>
+        <p:blipFill>
+          <a:blip r:embed="rId1"/>
+          <a:stretch>
+            <a:fillRect/>
+          </a:stretch>
+        </p:blipFill>
+        <p:spPr>
+          <a:xfrm>
+            <a:off x="968746" y="2039112"/>
+            <a:ext cx="1811547" cy="914400"/>
+          </a:xfrm>
+          <a:prstGeom prst="rect">
+            <a:avLst/>
+          </a:prstGeom>
+          <a:ln w="6350">
+            <a:solidFill>
+              <a:srgbClr val="D1D5DB"/>
+            </a:solidFill>
+          </a:ln>
+        </p:spPr>
+      </p:pic>
+      <p:sp>
+        <p:nvSpPr>
+          <p:cNvPr id="15" name="Image card"/>
+          <p:cNvSpPr/>
+          <p:nvPr/>
+        </p:nvSpPr>
+        <p:spPr>
+          <a:xfrm>
+            <a:off x="3520440" y="1874520"/>
+            <a:ext cx="2743200" cy="1508760"/>
+          </a:xfrm>
+          <a:prstGeom prst="roundRect">
+            <a:avLst/>
+          </a:prstGeom>
+          <a:solidFill>
+            <a:srgbClr val="FFFFFF"/>
+          </a:solidFill>
+          <a:ln w="12700">
+            <a:solidFill>
+              <a:srgbClr val="A7A7A7"/>
+            </a:solidFill>
+          </a:ln>
+        </p:spPr>
+      </p:sp>
+      <p:sp>
+        <p:nvSpPr>
+          <p:cNvPr id="16" name="Image title"/>
+          <p:cNvSpPr txBox="1"/>
+          <p:nvPr/>
+        </p:nvSpPr>
+        <p:spPr>
+          <a:xfrm>
+            <a:off x="3566160" y="3035808"/>
+            <a:ext cx="2651760" cy="274320"/>
+          </a:xfrm>
+          <a:prstGeom prst="rect">
+            <a:avLst/>
+          </a:prstGeom>
+          <a:noFill/>
+          <a:ln>
+            <a:noFill/>
+          </a:ln>
+        </p:spPr>
+        <p:txBody>
+          <a:bodyPr wrap="square" lIns="9144" tIns="9144" rIns="9144" bIns="9144">
+            <a:spAutoFit/>
+          </a:bodyPr>
+          <a:lstStyle/>
+          <a:p>
+            <a:pPr algn="l"/>
+            <a:r>
+              <a:rPr lang="zh-CN" sz="1400" b="1">
+                <a:solidFill>
+                  <a:srgbClr val="009CA6"/>
+                </a:solidFill>
+                <a:latin typeface="微软雅黑" panose="020B0503020204020204" charset="-122"/>
+                <a:ea typeface="微软雅黑" panose="020B0503020204020204" charset="-122"/>
+              </a:rPr>
+              <a:t>选择区域</a:t>
+            </a:r>
+            <a:endParaRPr lang="zh-CN" sz="1400" b="1">
+              <a:solidFill>
+                <a:srgbClr val="009CA6"/>
+              </a:solidFill>
+              <a:latin typeface="微软雅黑" panose="020B0503020204020204" charset="-122"/>
+              <a:ea typeface="微软雅黑" panose="020B0503020204020204" charset="-122"/>
+            </a:endParaRPr>
+          </a:p>
+        </p:txBody>
+      </p:sp>
+      <p:pic>
+        <p:nvPicPr>
+          <p:cNvPr id="17" name="选择区域"/>
           <p:cNvPicPr>
             <a:picLocks noChangeAspect="1"/>
           </p:cNvPicPr>
@@ -448,8 +581,8 @@
         </p:blipFill>
         <p:spPr>
           <a:xfrm>
-            <a:off x="968746" y="2039112"/>
-            <a:ext cx="1811547" cy="914400"/>
+            <a:off x="4294782" y="2039112"/>
+            <a:ext cx="1194515" cy="914400"/>
           </a:xfrm>
           <a:prstGeom prst="rect">
             <a:avLst/>
@@ -463,14 +596,14 @@
       </p:pic>
       <p:sp>
         <p:nvSpPr>
-          <p:cNvPr id="15" name="Image card"/>
-          <p:cNvSpPr/>
-          <p:nvPr/>
-        </p:nvSpPr>
-        <p:spPr>
-          <a:xfrm>
-            <a:off x="3520440" y="1874520"/>
-            <a:ext cx="2743200" cy="1508760"/>
+          <p:cNvPr id="18" name="Image card"/>
+          <p:cNvSpPr/>
+          <p:nvPr/>
+        </p:nvSpPr>
+        <p:spPr>
+          <a:xfrm>
+            <a:off x="6537960" y="1874520"/>
+            <a:ext cx="2057400" cy="1508760"/>
           </a:xfrm>
           <a:prstGeom prst="roundRect">
             <a:avLst/>
@@ -487,14 +620,14 @@
       </p:sp>
       <p:sp>
         <p:nvSpPr>
-          <p:cNvPr id="16" name="Image title"/>
-          <p:cNvSpPr txBox="1"/>
-          <p:nvPr/>
-        </p:nvSpPr>
-        <p:spPr>
-          <a:xfrm>
-            <a:off x="3566160" y="3035808"/>
-            <a:ext cx="2651760" cy="274320"/>
+          <p:cNvPr id="19" name="Image title"/>
+          <p:cNvSpPr txBox="1"/>
+          <p:nvPr/>
+        </p:nvSpPr>
+        <p:spPr>
+          <a:xfrm>
+            <a:off x="6583680" y="3035808"/>
+            <a:ext cx="1965960" cy="274320"/>
           </a:xfrm>
           <a:prstGeom prst="rect">
             <a:avLst/>
@@ -510,23 +643,30 @@
           </a:bodyPr>
           <a:lstStyle/>
           <a:p>
-            <a:pPr algn="c"/>
+            <a:pPr algn="l"/>
             <a:r>
               <a:rPr lang="zh-CN" sz="1400" b="1">
                 <a:solidFill>
                   <a:srgbClr val="009CA6"/>
                 </a:solidFill>
-                <a:latin typeface="Microsoft YaHei"/>
-                <a:ea typeface="Microsoft YaHei"/>
-              </a:rPr>
-              <a:t>选择区域</a:t>
-            </a:r>
+                <a:latin typeface="微软雅黑" panose="020B0503020204020204" charset="-122"/>
+                <a:ea typeface="微软雅黑" panose="020B0503020204020204" charset="-122"/>
+              </a:rPr>
+              <a:t>特征分布</a:t>
+            </a:r>
+            <a:endParaRPr lang="zh-CN" sz="1400" b="1">
+              <a:solidFill>
+                <a:srgbClr val="009CA6"/>
+              </a:solidFill>
+              <a:latin typeface="微软雅黑" panose="020B0503020204020204" charset="-122"/>
+              <a:ea typeface="微软雅黑" panose="020B0503020204020204" charset="-122"/>
+            </a:endParaRPr>
           </a:p>
         </p:txBody>
       </p:sp>
       <p:pic>
         <p:nvPicPr>
-          <p:cNvPr id="17" name="选择区域"/>
+          <p:cNvPr id="20" name="特征分布"/>
           <p:cNvPicPr>
             <a:picLocks noChangeAspect="1"/>
           </p:cNvPicPr>
@@ -540,8 +680,8 @@
         </p:blipFill>
         <p:spPr>
           <a:xfrm>
-            <a:off x="4294782" y="2039112"/>
-            <a:ext cx="1194515" cy="914400"/>
+            <a:off x="7015720" y="2039112"/>
+            <a:ext cx="1101880" cy="914400"/>
           </a:xfrm>
           <a:prstGeom prst="rect">
             <a:avLst/>
@@ -555,14 +695,14 @@
       </p:pic>
       <p:sp>
         <p:nvSpPr>
-          <p:cNvPr id="18" name="Image card"/>
-          <p:cNvSpPr/>
-          <p:nvPr/>
-        </p:nvSpPr>
-        <p:spPr>
-          <a:xfrm>
-            <a:off x="6537960" y="1874520"/>
-            <a:ext cx="2057400" cy="1508760"/>
+          <p:cNvPr id="21" name="Image card"/>
+          <p:cNvSpPr/>
+          <p:nvPr/>
+        </p:nvSpPr>
+        <p:spPr>
+          <a:xfrm>
+            <a:off x="8869680" y="1874520"/>
+            <a:ext cx="2423160" cy="1508760"/>
           </a:xfrm>
           <a:prstGeom prst="roundRect">
             <a:avLst/>
@@ -579,14 +719,14 @@
       </p:sp>
       <p:sp>
         <p:nvSpPr>
-          <p:cNvPr id="19" name="Image title"/>
-          <p:cNvSpPr txBox="1"/>
-          <p:nvPr/>
-        </p:nvSpPr>
-        <p:spPr>
-          <a:xfrm>
-            <a:off x="6583680" y="3035808"/>
-            <a:ext cx="1965960" cy="274320"/>
+          <p:cNvPr id="22" name="Image title"/>
+          <p:cNvSpPr txBox="1"/>
+          <p:nvPr/>
+        </p:nvSpPr>
+        <p:spPr>
+          <a:xfrm>
+            <a:off x="8915400" y="3035808"/>
+            <a:ext cx="2331720" cy="274320"/>
           </a:xfrm>
           <a:prstGeom prst="rect">
             <a:avLst/>
@@ -602,23 +742,30 @@
           </a:bodyPr>
           <a:lstStyle/>
           <a:p>
-            <a:pPr algn="c"/>
+            <a:pPr algn="l"/>
             <a:r>
               <a:rPr lang="zh-CN" sz="1400" b="1">
                 <a:solidFill>
                   <a:srgbClr val="009CA6"/>
                 </a:solidFill>
-                <a:latin typeface="Microsoft YaHei"/>
-                <a:ea typeface="Microsoft YaHei"/>
-              </a:rPr>
-              <a:t>特征分布</a:t>
-            </a:r>
+                <a:latin typeface="微软雅黑" panose="020B0503020204020204" charset="-122"/>
+                <a:ea typeface="微软雅黑" panose="020B0503020204020204" charset="-122"/>
+              </a:rPr>
+              <a:t>开始学习</a:t>
+            </a:r>
+            <a:endParaRPr lang="zh-CN" sz="1400" b="1">
+              <a:solidFill>
+                <a:srgbClr val="009CA6"/>
+              </a:solidFill>
+              <a:latin typeface="微软雅黑" panose="020B0503020204020204" charset="-122"/>
+              <a:ea typeface="微软雅黑" panose="020B0503020204020204" charset="-122"/>
+            </a:endParaRPr>
           </a:p>
         </p:txBody>
       </p:sp>
       <p:pic>
         <p:nvPicPr>
-          <p:cNvPr id="20" name="特征分布"/>
+          <p:cNvPr id="23" name="开始学习"/>
           <p:cNvPicPr>
             <a:picLocks noChangeAspect="1"/>
           </p:cNvPicPr>
@@ -632,8 +779,8 @@
         </p:blipFill>
         <p:spPr>
           <a:xfrm>
-            <a:off x="7015720" y="2039112"/>
-            <a:ext cx="1101880" cy="914400"/>
+            <a:off x="9052560" y="2133066"/>
+            <a:ext cx="2057400" cy="726491"/>
           </a:xfrm>
           <a:prstGeom prst="rect">
             <a:avLst/>
@@ -647,98 +794,6 @@
       </p:pic>
       <p:sp>
         <p:nvSpPr>
-          <p:cNvPr id="21" name="Image card"/>
-          <p:cNvSpPr/>
-          <p:nvPr/>
-        </p:nvSpPr>
-        <p:spPr>
-          <a:xfrm>
-            <a:off x="8869680" y="1874520"/>
-            <a:ext cx="2423160" cy="1508760"/>
-          </a:xfrm>
-          <a:prstGeom prst="roundRect">
-            <a:avLst/>
-          </a:prstGeom>
-          <a:solidFill>
-            <a:srgbClr val="FFFFFF"/>
-          </a:solidFill>
-          <a:ln w="12700">
-            <a:solidFill>
-              <a:srgbClr val="A7A7A7"/>
-            </a:solidFill>
-          </a:ln>
-        </p:spPr>
-      </p:sp>
-      <p:sp>
-        <p:nvSpPr>
-          <p:cNvPr id="22" name="Image title"/>
-          <p:cNvSpPr txBox="1"/>
-          <p:nvPr/>
-        </p:nvSpPr>
-        <p:spPr>
-          <a:xfrm>
-            <a:off x="8915400" y="3035808"/>
-            <a:ext cx="2331720" cy="274320"/>
-          </a:xfrm>
-          <a:prstGeom prst="rect">
-            <a:avLst/>
-          </a:prstGeom>
-          <a:noFill/>
-          <a:ln>
-            <a:noFill/>
-          </a:ln>
-        </p:spPr>
-        <p:txBody>
-          <a:bodyPr wrap="square" lIns="9144" tIns="9144" rIns="9144" bIns="9144">
-            <a:spAutoFit/>
-          </a:bodyPr>
-          <a:lstStyle/>
-          <a:p>
-            <a:pPr algn="c"/>
-            <a:r>
-              <a:rPr lang="zh-CN" sz="1400" b="1">
-                <a:solidFill>
-                  <a:srgbClr val="009CA6"/>
-                </a:solidFill>
-                <a:latin typeface="Microsoft YaHei"/>
-                <a:ea typeface="Microsoft YaHei"/>
-              </a:rPr>
-              <a:t>开始学习</a:t>
-            </a:r>
-          </a:p>
-        </p:txBody>
-      </p:sp>
-      <p:pic>
-        <p:nvPicPr>
-          <p:cNvPr id="23" name="开始学习"/>
-          <p:cNvPicPr>
-            <a:picLocks noChangeAspect="1"/>
-          </p:cNvPicPr>
-          <p:nvPr/>
-        </p:nvPicPr>
-        <p:blipFill>
-          <a:blip r:embed="rId5"/>
-          <a:stretch>
-            <a:fillRect/>
-          </a:stretch>
-        </p:blipFill>
-        <p:spPr>
-          <a:xfrm>
-            <a:off x="9052560" y="2133066"/>
-            <a:ext cx="2057400" cy="726491"/>
-          </a:xfrm>
-          <a:prstGeom prst="rect">
-            <a:avLst/>
-          </a:prstGeom>
-          <a:ln w="6350">
-            <a:solidFill>
-              <a:srgbClr val="D1D5DB"/>
-            </a:solidFill>
-          </a:ln>
-        </p:spPr>
-      </p:pic>
-      <p:sp>
-        <p:nvSpPr>
           <p:cNvPr id="24" name="Flow step"/>
           <p:cNvSpPr txBox="1"/>
           <p:nvPr/>
@@ -764,17 +819,24 @@
           </a:bodyPr>
           <a:lstStyle/>
           <a:p>
-            <a:pPr algn="c"/>
+            <a:pPr algn="l"/>
             <a:r>
               <a:rPr lang="zh-CN" sz="1500" b="1">
                 <a:solidFill>
                   <a:srgbClr val="FFFFFF"/>
                 </a:solidFill>
-                <a:latin typeface="Microsoft YaHei"/>
-                <a:ea typeface="Microsoft YaHei"/>
+                <a:latin typeface="微软雅黑" panose="020B0503020204020204" charset="-122"/>
+                <a:ea typeface="微软雅黑" panose="020B0503020204020204" charset="-122"/>
               </a:rPr>
               <a:t>添加 OK/NG 样本</a:t>
             </a:r>
+            <a:endParaRPr lang="zh-CN" sz="1500" b="1">
+              <a:solidFill>
+                <a:srgbClr val="FFFFFF"/>
+              </a:solidFill>
+              <a:latin typeface="微软雅黑" panose="020B0503020204020204" charset="-122"/>
+              <a:ea typeface="微软雅黑" panose="020B0503020204020204" charset="-122"/>
+            </a:endParaRPr>
           </a:p>
         </p:txBody>
       </p:sp>
@@ -827,17 +889,24 @@
           </a:bodyPr>
           <a:lstStyle/>
           <a:p>
-            <a:pPr algn="c"/>
+            <a:pPr algn="l"/>
             <a:r>
               <a:rPr lang="zh-CN" sz="1500" b="1">
                 <a:solidFill>
                   <a:srgbClr val="FFFFFF"/>
                 </a:solidFill>
-                <a:latin typeface="Microsoft YaHei"/>
-                <a:ea typeface="Microsoft YaHei"/>
+                <a:latin typeface="微软雅黑" panose="020B0503020204020204" charset="-122"/>
+                <a:ea typeface="微软雅黑" panose="020B0503020204020204" charset="-122"/>
               </a:rPr>
               <a:t>选择匹配/学习区域</a:t>
             </a:r>
+            <a:endParaRPr lang="zh-CN" sz="1500" b="1">
+              <a:solidFill>
+                <a:srgbClr val="FFFFFF"/>
+              </a:solidFill>
+              <a:latin typeface="微软雅黑" panose="020B0503020204020204" charset="-122"/>
+              <a:ea typeface="微软雅黑" panose="020B0503020204020204" charset="-122"/>
+            </a:endParaRPr>
           </a:p>
         </p:txBody>
       </p:sp>
@@ -890,17 +959,24 @@
           </a:bodyPr>
           <a:lstStyle/>
           <a:p>
-            <a:pPr algn="c"/>
+            <a:pPr algn="l"/>
             <a:r>
               <a:rPr lang="zh-CN" sz="1500" b="1">
                 <a:solidFill>
                   <a:srgbClr val="FFFFFF"/>
                 </a:solidFill>
-                <a:latin typeface="Microsoft YaHei"/>
-                <a:ea typeface="Microsoft YaHei"/>
+                <a:latin typeface="微软雅黑" panose="020B0503020204020204" charset="-122"/>
+                <a:ea typeface="微软雅黑" panose="020B0503020204020204" charset="-122"/>
               </a:rPr>
               <a:t>开始学习</a:t>
             </a:r>
+            <a:endParaRPr lang="zh-CN" sz="1500" b="1">
+              <a:solidFill>
+                <a:srgbClr val="FFFFFF"/>
+              </a:solidFill>
+              <a:latin typeface="微软雅黑" panose="020B0503020204020204" charset="-122"/>
+              <a:ea typeface="微软雅黑" panose="020B0503020204020204" charset="-122"/>
+            </a:endParaRPr>
           </a:p>
         </p:txBody>
       </p:sp>
@@ -953,17 +1029,24 @@
           </a:bodyPr>
           <a:lstStyle/>
           <a:p>
-            <a:pPr algn="c"/>
+            <a:pPr algn="l"/>
             <a:r>
               <a:rPr lang="zh-CN" sz="1500" b="1">
                 <a:solidFill>
                   <a:srgbClr val="FFFFFF"/>
                 </a:solidFill>
-                <a:latin typeface="Microsoft YaHei"/>
-                <a:ea typeface="Microsoft YaHei"/>
+                <a:latin typeface="微软雅黑" panose="020B0503020204020204" charset="-122"/>
+                <a:ea typeface="微软雅黑" panose="020B0503020204020204" charset="-122"/>
               </a:rPr>
               <a:t>配置完成，开始检测</a:t>
             </a:r>
+            <a:endParaRPr lang="zh-CN" sz="1500" b="1">
+              <a:solidFill>
+                <a:srgbClr val="FFFFFF"/>
+              </a:solidFill>
+              <a:latin typeface="微软雅黑" panose="020B0503020204020204" charset="-122"/>
+              <a:ea typeface="微软雅黑" panose="020B0503020204020204" charset="-122"/>
+            </a:endParaRPr>
           </a:p>
         </p:txBody>
       </p:sp>
@@ -998,11 +1081,18 @@
                 <a:solidFill>
                   <a:srgbClr val="111827"/>
                 </a:solidFill>
-                <a:latin typeface="Microsoft YaHei"/>
-                <a:ea typeface="Microsoft YaHei"/>
+                <a:latin typeface="微软雅黑" panose="020B0503020204020204" charset="-122"/>
+                <a:ea typeface="微软雅黑" panose="020B0503020204020204" charset="-122"/>
               </a:rPr>
               <a:t>关键：不重新训练大模型，只注册 OK/NG 特征</a:t>
             </a:r>
+            <a:endParaRPr lang="zh-CN" sz="1900" b="1">
+              <a:solidFill>
+                <a:srgbClr val="111827"/>
+              </a:solidFill>
+              <a:latin typeface="微软雅黑" panose="020B0503020204020204" charset="-122"/>
+              <a:ea typeface="微软雅黑" panose="020B0503020204020204" charset="-122"/>
+            </a:endParaRPr>
           </a:p>
           <a:p>
             <a:pPr algn="l"/>
@@ -1011,14 +1101,136 @@
                 <a:solidFill>
                   <a:srgbClr val="475569"/>
                 </a:solidFill>
-                <a:latin typeface="Microsoft YaHei"/>
-                <a:ea typeface="Microsoft YaHei"/>
+                <a:latin typeface="微软雅黑" panose="020B0503020204020204" charset="-122"/>
+                <a:ea typeface="微软雅黑" panose="020B0503020204020204" charset="-122"/>
               </a:rPr>
               <a:t>学习时间短，适合产线快速换型</a:t>
             </a:r>
-          </a:p>
-        </p:txBody>
-      </p:sp>
+            <a:endParaRPr lang="zh-CN" sz="1500">
+              <a:solidFill>
+                <a:srgbClr val="475569"/>
+              </a:solidFill>
+              <a:latin typeface="微软雅黑" panose="020B0503020204020204" charset="-122"/>
+              <a:ea typeface="微软雅黑" panose="020B0503020204020204" charset="-122"/>
+            </a:endParaRPr>
+          </a:p>
+        </p:txBody>
+      </p:sp>
+    </p:spTree>
+  </p:cSld>
+  <p:clrMapOvr>
+    <a:masterClrMapping/>
+  </p:clrMapOvr>
+</p:sld>
+</file>
+
+<file path=ppt/slides/slide10.xml><?xml version="1.0" encoding="utf-8"?>
+<p:sld xmlns:a="http://schemas.openxmlformats.org/drawingml/2006/main" xmlns:r="http://schemas.openxmlformats.org/officeDocument/2006/relationships" xmlns:p="http://schemas.openxmlformats.org/presentationml/2006/main">
+  <p:cSld>
+    <p:spTree>
+      <p:nvGrpSpPr>
+        <p:cNvPr id="1" name=""/>
+        <p:cNvGrpSpPr/>
+        <p:nvPr/>
+      </p:nvGrpSpPr>
+      <p:grpSpPr/>
+      <p:sp>
+        <p:nvSpPr>
+          <p:cNvPr id="2" name="文本框 1"/>
+          <p:cNvSpPr txBox="1"/>
+          <p:nvPr/>
+        </p:nvSpPr>
+        <p:spPr>
+          <a:xfrm>
+            <a:off x="1464310" y="1058545"/>
+            <a:ext cx="7362825" cy="342265"/>
+          </a:xfrm>
+          <a:prstGeom prst="rect">
+            <a:avLst/>
+          </a:prstGeom>
+          <a:noFill/>
+        </p:spPr>
+        <p:txBody>
+          <a:bodyPr wrap="square" rtlCol="0">
+            <a:noAutofit/>
+          </a:bodyPr>
+          <a:p>
+            <a:r>
+              <a:rPr lang="zh-CN" altLang="en-US"/>
+              <a:t>方便车间维护</a:t>
+            </a:r>
+            <a:r>
+              <a:rPr lang="en-US" altLang="zh-CN"/>
+              <a:t>  </a:t>
+            </a:r>
+            <a:r>
+              <a:rPr lang="zh-CN" altLang="en-US"/>
+              <a:t>不用改代码</a:t>
+            </a:r>
+            <a:r>
+              <a:rPr lang="en-US" altLang="zh-CN"/>
+              <a:t>  </a:t>
+            </a:r>
+            <a:r>
+              <a:rPr lang="zh-CN" altLang="en-US"/>
+              <a:t>界面操作就</a:t>
+            </a:r>
+            <a:r>
+              <a:rPr lang="zh-CN" altLang="en-US"/>
+              <a:t>行</a:t>
+            </a:r>
+            <a:endParaRPr lang="zh-CN" altLang="en-US"/>
+          </a:p>
+        </p:txBody>
+      </p:sp>
+      <p:pic>
+        <p:nvPicPr>
+          <p:cNvPr id="3" name="图片 2"/>
+          <p:cNvPicPr>
+            <a:picLocks noChangeAspect="1"/>
+          </p:cNvPicPr>
+          <p:nvPr/>
+        </p:nvPicPr>
+        <p:blipFill>
+          <a:blip r:embed="rId1"/>
+          <a:stretch>
+            <a:fillRect/>
+          </a:stretch>
+        </p:blipFill>
+        <p:spPr>
+          <a:xfrm>
+            <a:off x="911225" y="1772920"/>
+            <a:ext cx="3981450" cy="3676650"/>
+          </a:xfrm>
+          <a:prstGeom prst="rect">
+            <a:avLst/>
+          </a:prstGeom>
+        </p:spPr>
+      </p:pic>
+      <p:pic>
+        <p:nvPicPr>
+          <p:cNvPr id="4" name="图片 3"/>
+          <p:cNvPicPr>
+            <a:picLocks noChangeAspect="1"/>
+          </p:cNvPicPr>
+          <p:nvPr/>
+        </p:nvPicPr>
+        <p:blipFill>
+          <a:blip r:embed="rId2"/>
+          <a:stretch>
+            <a:fillRect/>
+          </a:stretch>
+        </p:blipFill>
+        <p:spPr>
+          <a:xfrm>
+            <a:off x="5303520" y="1772920"/>
+            <a:ext cx="4295775" cy="3819525"/>
+          </a:xfrm>
+          <a:prstGeom prst="rect">
+            <a:avLst/>
+          </a:prstGeom>
+        </p:spPr>
+      </p:pic>
     </p:spTree>
   </p:cSld>
   <p:clrMapOvr>
@@ -1046,7 +1258,7 @@
       </p:grpSpPr>
       <p:sp>
         <p:nvSpPr>
-          <p:cNvPr id="1" name="Background"/>
+          <p:cNvPr id="2" name="Background"/>
           <p:cNvSpPr/>
           <p:nvPr/>
         </p:nvSpPr>
@@ -1068,7 +1280,7 @@
       </p:sp>
       <p:sp>
         <p:nvSpPr>
-          <p:cNvPr id="2" name="Left accent"/>
+          <p:cNvPr id="3" name="Left accent"/>
           <p:cNvSpPr/>
           <p:nvPr/>
         </p:nvSpPr>
@@ -1090,7 +1302,7 @@
       </p:sp>
       <p:sp>
         <p:nvSpPr>
-          <p:cNvPr id="3" name="Title"/>
+          <p:cNvPr id="4" name="Title"/>
           <p:cNvSpPr txBox="1"/>
           <p:nvPr/>
         </p:nvSpPr>
@@ -1119,17 +1331,24 @@
                 <a:solidFill>
                   <a:srgbClr val="111827"/>
                 </a:solidFill>
-                <a:latin typeface="Microsoft YaHei"/>
-                <a:ea typeface="Microsoft YaHei"/>
+                <a:latin typeface="微软雅黑" panose="020B0503020204020204" charset="-122"/>
+                <a:ea typeface="微软雅黑" panose="020B0503020204020204" charset="-122"/>
               </a:rPr>
               <a:t>传统方法本质：少量人工特征 + 阈值</a:t>
             </a:r>
-          </a:p>
-        </p:txBody>
-      </p:sp>
-      <p:sp>
-        <p:nvSpPr>
-          <p:cNvPr id="4" name="Bottom teal dot"/>
+            <a:endParaRPr lang="zh-CN" sz="2400" b="1">
+              <a:solidFill>
+                <a:srgbClr val="111827"/>
+              </a:solidFill>
+              <a:latin typeface="微软雅黑" panose="020B0503020204020204" charset="-122"/>
+              <a:ea typeface="微软雅黑" panose="020B0503020204020204" charset="-122"/>
+            </a:endParaRPr>
+          </a:p>
+        </p:txBody>
+      </p:sp>
+      <p:sp>
+        <p:nvSpPr>
+          <p:cNvPr id="5" name="Bottom teal dot"/>
           <p:cNvSpPr/>
           <p:nvPr/>
         </p:nvSpPr>
@@ -1151,7 +1370,7 @@
       </p:sp>
       <p:sp>
         <p:nvSpPr>
-          <p:cNvPr id="5" name="Bottom teal dot 2"/>
+          <p:cNvPr id="6" name="Bottom teal dot 2"/>
           <p:cNvSpPr/>
           <p:nvPr/>
         </p:nvSpPr>
@@ -1173,7 +1392,7 @@
       </p:sp>
       <p:sp>
         <p:nvSpPr>
-          <p:cNvPr id="6" name="Bottom pill"/>
+          <p:cNvPr id="7" name="Bottom pill"/>
           <p:cNvSpPr/>
           <p:nvPr/>
         </p:nvSpPr>
@@ -1195,7 +1414,7 @@
       </p:sp>
       <p:sp>
         <p:nvSpPr>
-          <p:cNvPr id="7" name="Bottom teal dot 3"/>
+          <p:cNvPr id="8" name="Bottom teal dot 3"/>
           <p:cNvSpPr/>
           <p:nvPr/>
         </p:nvSpPr>
@@ -1217,7 +1436,7 @@
       </p:sp>
       <p:sp>
         <p:nvSpPr>
-          <p:cNvPr id="8" name="Bottom teal dot 4"/>
+          <p:cNvPr id="9" name="Bottom teal dot 4"/>
           <p:cNvSpPr/>
           <p:nvPr/>
         </p:nvSpPr>
@@ -1286,17 +1505,24 @@
           </a:bodyPr>
           <a:lstStyle/>
           <a:p>
-            <a:pPr algn="c"/>
+            <a:pPr algn="l"/>
             <a:r>
               <a:rPr lang="zh-CN" sz="1400" b="1">
                 <a:solidFill>
                   <a:srgbClr val="009CA6"/>
                 </a:solidFill>
-                <a:latin typeface="Microsoft YaHei"/>
-                <a:ea typeface="Microsoft YaHei"/>
+                <a:latin typeface="微软雅黑" panose="020B0503020204020204" charset="-122"/>
+                <a:ea typeface="微软雅黑" panose="020B0503020204020204" charset="-122"/>
               </a:rPr>
               <a:t>ROI 图像</a:t>
             </a:r>
+            <a:endParaRPr lang="zh-CN" sz="1400" b="1">
+              <a:solidFill>
+                <a:srgbClr val="009CA6"/>
+              </a:solidFill>
+              <a:latin typeface="微软雅黑" panose="020B0503020204020204" charset="-122"/>
+              <a:ea typeface="微软雅黑" panose="020B0503020204020204" charset="-122"/>
+            </a:endParaRPr>
           </a:p>
         </p:txBody>
       </p:sp>
@@ -1309,7 +1535,7 @@
           <p:nvPr/>
         </p:nvPicPr>
         <p:blipFill>
-          <a:blip r:embed="rId2"/>
+          <a:blip r:embed="rId1"/>
           <a:stretch>
             <a:fillRect/>
           </a:stretch>
@@ -1378,43 +1604,64 @@
           </a:bodyPr>
           <a:lstStyle/>
           <a:p>
-            <a:pPr algn="c"/>
+            <a:pPr algn="l"/>
             <a:r>
               <a:rPr lang="zh-CN" sz="2300" b="1">
                 <a:solidFill>
                   <a:srgbClr val="FFFFFF"/>
                 </a:solidFill>
-                <a:latin typeface="Microsoft YaHei"/>
-                <a:ea typeface="Microsoft YaHei"/>
+                <a:latin typeface="微软雅黑" panose="020B0503020204020204" charset="-122"/>
+                <a:ea typeface="微软雅黑" panose="020B0503020204020204" charset="-122"/>
               </a:rPr>
               <a:t>手工特征</a:t>
             </a:r>
-          </a:p>
-          <a:p>
-            <a:pPr algn="c"/>
+            <a:endParaRPr lang="zh-CN" sz="2300" b="1">
+              <a:solidFill>
+                <a:srgbClr val="FFFFFF"/>
+              </a:solidFill>
+              <a:latin typeface="微软雅黑" panose="020B0503020204020204" charset="-122"/>
+              <a:ea typeface="微软雅黑" panose="020B0503020204020204" charset="-122"/>
+            </a:endParaRPr>
+          </a:p>
+          <a:p>
+            <a:pPr algn="l"/>
             <a:r>
               <a:rPr lang="zh-CN" sz="1700">
                 <a:solidFill>
                   <a:srgbClr val="FFFFFF"/>
                 </a:solidFill>
-                <a:latin typeface="Microsoft YaHei"/>
-                <a:ea typeface="Microsoft YaHei"/>
+                <a:latin typeface="微软雅黑" panose="020B0503020204020204" charset="-122"/>
+                <a:ea typeface="微软雅黑" panose="020B0503020204020204" charset="-122"/>
               </a:rPr>
               <a:t>灰度均值 / 灰度标准差</a:t>
             </a:r>
-          </a:p>
-          <a:p>
-            <a:pPr algn="c"/>
+            <a:endParaRPr lang="zh-CN" sz="1700">
+              <a:solidFill>
+                <a:srgbClr val="FFFFFF"/>
+              </a:solidFill>
+              <a:latin typeface="微软雅黑" panose="020B0503020204020204" charset="-122"/>
+              <a:ea typeface="微软雅黑" panose="020B0503020204020204" charset="-122"/>
+            </a:endParaRPr>
+          </a:p>
+          <a:p>
+            <a:pPr algn="l"/>
             <a:r>
               <a:rPr lang="zh-CN" sz="1700">
                 <a:solidFill>
                   <a:srgbClr val="FFFFFF"/>
                 </a:solidFill>
-                <a:latin typeface="Microsoft YaHei"/>
-                <a:ea typeface="Microsoft YaHei"/>
+                <a:latin typeface="微软雅黑" panose="020B0503020204020204" charset="-122"/>
+                <a:ea typeface="微软雅黑" panose="020B0503020204020204" charset="-122"/>
               </a:rPr>
               <a:t>HSV 色相 / 饱和度 / 明度均值</a:t>
             </a:r>
+            <a:endParaRPr lang="zh-CN" sz="1700">
+              <a:solidFill>
+                <a:srgbClr val="FFFFFF"/>
+              </a:solidFill>
+              <a:latin typeface="微软雅黑" panose="020B0503020204020204" charset="-122"/>
+              <a:ea typeface="微软雅黑" panose="020B0503020204020204" charset="-122"/>
+            </a:endParaRPr>
           </a:p>
         </p:txBody>
       </p:sp>
@@ -1467,43 +1714,64 @@
           </a:bodyPr>
           <a:lstStyle/>
           <a:p>
-            <a:pPr algn="c"/>
+            <a:pPr algn="l"/>
             <a:r>
               <a:rPr lang="zh-CN" sz="2400" b="1">
                 <a:solidFill>
                   <a:srgbClr val="FFFFFF"/>
                 </a:solidFill>
-                <a:latin typeface="Microsoft YaHei"/>
-                <a:ea typeface="Microsoft YaHei"/>
+                <a:latin typeface="微软雅黑" panose="020B0503020204020204" charset="-122"/>
+                <a:ea typeface="微软雅黑" panose="020B0503020204020204" charset="-122"/>
               </a:rPr>
               <a:t>一个阈值</a:t>
             </a:r>
-          </a:p>
-          <a:p>
-            <a:pPr algn="c"/>
+            <a:endParaRPr lang="zh-CN" sz="2400" b="1">
+              <a:solidFill>
+                <a:srgbClr val="FFFFFF"/>
+              </a:solidFill>
+              <a:latin typeface="微软雅黑" panose="020B0503020204020204" charset="-122"/>
+              <a:ea typeface="微软雅黑" panose="020B0503020204020204" charset="-122"/>
+            </a:endParaRPr>
+          </a:p>
+          <a:p>
+            <a:pPr algn="l"/>
             <a:r>
               <a:rPr lang="zh-CN" sz="1600">
                 <a:solidFill>
                   <a:srgbClr val="FFFFFF"/>
                 </a:solidFill>
-                <a:latin typeface="Microsoft YaHei"/>
-                <a:ea typeface="Microsoft YaHei"/>
+                <a:latin typeface="微软雅黑" panose="020B0503020204020204" charset="-122"/>
+                <a:ea typeface="微软雅黑" panose="020B0503020204020204" charset="-122"/>
               </a:rPr>
               <a:t>value &gt;= threshold =&gt; OK</a:t>
             </a:r>
-          </a:p>
-          <a:p>
-            <a:pPr algn="c"/>
+            <a:endParaRPr lang="zh-CN" sz="1600">
+              <a:solidFill>
+                <a:srgbClr val="FFFFFF"/>
+              </a:solidFill>
+              <a:latin typeface="微软雅黑" panose="020B0503020204020204" charset="-122"/>
+              <a:ea typeface="微软雅黑" panose="020B0503020204020204" charset="-122"/>
+            </a:endParaRPr>
+          </a:p>
+          <a:p>
+            <a:pPr algn="l"/>
             <a:r>
               <a:rPr lang="zh-CN" sz="1800" b="1">
                 <a:solidFill>
                   <a:srgbClr val="FFFFFF"/>
                 </a:solidFill>
-                <a:latin typeface="Microsoft YaHei"/>
-                <a:ea typeface="Microsoft YaHei"/>
+                <a:latin typeface="微软雅黑" panose="020B0503020204020204" charset="-122"/>
+                <a:ea typeface="微软雅黑" panose="020B0503020204020204" charset="-122"/>
               </a:rPr>
               <a:t>否则 NG</a:t>
             </a:r>
+            <a:endParaRPr lang="zh-CN" sz="1800" b="1">
+              <a:solidFill>
+                <a:srgbClr val="FFFFFF"/>
+              </a:solidFill>
+              <a:latin typeface="微软雅黑" panose="020B0503020204020204" charset="-122"/>
+              <a:ea typeface="微软雅黑" panose="020B0503020204020204" charset="-122"/>
+            </a:endParaRPr>
           </a:p>
         </p:txBody>
       </p:sp>
@@ -1542,11 +1810,18 @@
                 <a:solidFill>
                   <a:srgbClr val="111827"/>
                 </a:solidFill>
-                <a:latin typeface="Microsoft YaHei"/>
-                <a:ea typeface="Microsoft YaHei"/>
+                <a:latin typeface="微软雅黑" panose="020B0503020204020204" charset="-122"/>
+                <a:ea typeface="微软雅黑" panose="020B0503020204020204" charset="-122"/>
               </a:rPr>
               <a:t>当前代码中的传统算法就是这种形式</a:t>
             </a:r>
+            <a:endParaRPr lang="zh-CN" sz="2400" b="1">
+              <a:solidFill>
+                <a:srgbClr val="111827"/>
+              </a:solidFill>
+              <a:latin typeface="微软雅黑" panose="020B0503020204020204" charset="-122"/>
+              <a:ea typeface="微软雅黑" panose="020B0503020204020204" charset="-122"/>
+            </a:endParaRPr>
           </a:p>
           <a:p>
             <a:pPr algn="l"/>
@@ -1555,11 +1830,18 @@
                 <a:solidFill>
                   <a:srgbClr val="475569"/>
                 </a:solidFill>
-                <a:latin typeface="Microsoft YaHei"/>
-                <a:ea typeface="Microsoft YaHei"/>
+                <a:latin typeface="微软雅黑" panose="020B0503020204020204" charset="-122"/>
+                <a:ea typeface="微软雅黑" panose="020B0503020204020204" charset="-122"/>
               </a:rPr>
               <a:t>algorithms/traditional.py：meanintensity、meanstd、meanhsv_h、meanhsv_s、meanhsv_v；训练时扫描阈值，选择训练集准确率最高的 threshold。</a:t>
             </a:r>
+            <a:endParaRPr lang="zh-CN" sz="1800">
+              <a:solidFill>
+                <a:srgbClr val="475569"/>
+              </a:solidFill>
+              <a:latin typeface="微软雅黑" panose="020B0503020204020204" charset="-122"/>
+              <a:ea typeface="微软雅黑" panose="020B0503020204020204" charset="-122"/>
+            </a:endParaRPr>
           </a:p>
         </p:txBody>
       </p:sp>
@@ -1592,17 +1874,24 @@
           </a:bodyPr>
           <a:lstStyle/>
           <a:p>
-            <a:pPr algn="c"/>
+            <a:pPr algn="l"/>
             <a:r>
               <a:rPr lang="zh-CN" sz="2000" b="1">
                 <a:solidFill>
                   <a:srgbClr val="DC2626"/>
                 </a:solidFill>
-                <a:latin typeface="Microsoft YaHei"/>
-                <a:ea typeface="Microsoft YaHei"/>
+                <a:latin typeface="微软雅黑" panose="020B0503020204020204" charset="-122"/>
+                <a:ea typeface="微软雅黑" panose="020B0503020204020204" charset="-122"/>
               </a:rPr>
               <a:t>问题根源：如果一个缺陷不能被“一个数值是否超过阈值”稳定描述，传统方法就会不可靠。</a:t>
             </a:r>
+            <a:endParaRPr lang="zh-CN" sz="2000" b="1">
+              <a:solidFill>
+                <a:srgbClr val="DC2626"/>
+              </a:solidFill>
+              <a:latin typeface="微软雅黑" panose="020B0503020204020204" charset="-122"/>
+              <a:ea typeface="微软雅黑" panose="020B0503020204020204" charset="-122"/>
+            </a:endParaRPr>
           </a:p>
         </p:txBody>
       </p:sp>
@@ -1633,7 +1922,7 @@
       </p:grpSpPr>
       <p:sp>
         <p:nvSpPr>
-          <p:cNvPr id="1" name="Background"/>
+          <p:cNvPr id="2" name="Background"/>
           <p:cNvSpPr/>
           <p:nvPr/>
         </p:nvSpPr>
@@ -1655,7 +1944,7 @@
       </p:sp>
       <p:sp>
         <p:nvSpPr>
-          <p:cNvPr id="2" name="Left accent"/>
+          <p:cNvPr id="3" name="Left accent"/>
           <p:cNvSpPr/>
           <p:nvPr/>
         </p:nvSpPr>
@@ -1677,7 +1966,7 @@
       </p:sp>
       <p:sp>
         <p:nvSpPr>
-          <p:cNvPr id="3" name="Title"/>
+          <p:cNvPr id="4" name="Title"/>
           <p:cNvSpPr txBox="1"/>
           <p:nvPr/>
         </p:nvSpPr>
@@ -1706,17 +1995,24 @@
                 <a:solidFill>
                   <a:srgbClr val="111827"/>
                 </a:solidFill>
-                <a:latin typeface="Microsoft YaHei"/>
-                <a:ea typeface="Microsoft YaHei"/>
+                <a:latin typeface="微软雅黑" panose="020B0503020204020204" charset="-122"/>
+                <a:ea typeface="微软雅黑" panose="020B0503020204020204" charset="-122"/>
               </a:rPr>
               <a:t>传统方法缺点：误判原因要一目了然</a:t>
             </a:r>
-          </a:p>
-        </p:txBody>
-      </p:sp>
-      <p:sp>
-        <p:nvSpPr>
-          <p:cNvPr id="4" name="Bottom teal dot"/>
+            <a:endParaRPr lang="zh-CN" sz="2400" b="1">
+              <a:solidFill>
+                <a:srgbClr val="111827"/>
+              </a:solidFill>
+              <a:latin typeface="微软雅黑" panose="020B0503020204020204" charset="-122"/>
+              <a:ea typeface="微软雅黑" panose="020B0503020204020204" charset="-122"/>
+            </a:endParaRPr>
+          </a:p>
+        </p:txBody>
+      </p:sp>
+      <p:sp>
+        <p:nvSpPr>
+          <p:cNvPr id="5" name="Bottom teal dot"/>
           <p:cNvSpPr/>
           <p:nvPr/>
         </p:nvSpPr>
@@ -1738,7 +2034,7 @@
       </p:sp>
       <p:sp>
         <p:nvSpPr>
-          <p:cNvPr id="5" name="Bottom teal dot 2"/>
+          <p:cNvPr id="6" name="Bottom teal dot 2"/>
           <p:cNvSpPr/>
           <p:nvPr/>
         </p:nvSpPr>
@@ -1760,7 +2056,7 @@
       </p:sp>
       <p:sp>
         <p:nvSpPr>
-          <p:cNvPr id="6" name="Bottom pill"/>
+          <p:cNvPr id="7" name="Bottom pill"/>
           <p:cNvSpPr/>
           <p:nvPr/>
         </p:nvSpPr>
@@ -1782,7 +2078,7 @@
       </p:sp>
       <p:sp>
         <p:nvSpPr>
-          <p:cNvPr id="7" name="Bottom teal dot 3"/>
+          <p:cNvPr id="8" name="Bottom teal dot 3"/>
           <p:cNvSpPr/>
           <p:nvPr/>
         </p:nvSpPr>
@@ -1804,7 +2100,7 @@
       </p:sp>
       <p:sp>
         <p:nvSpPr>
-          <p:cNvPr id="8" name="Bottom teal dot 4"/>
+          <p:cNvPr id="9" name="Bottom teal dot 4"/>
           <p:cNvSpPr/>
           <p:nvPr/>
         </p:nvSpPr>
@@ -1851,30 +2147,44 @@
           </a:bodyPr>
           <a:lstStyle/>
           <a:p>
-            <a:pPr algn="c"/>
+            <a:pPr algn="l"/>
             <a:r>
               <a:rPr lang="zh-CN" sz="2200" b="1">
                 <a:solidFill>
                   <a:srgbClr val="FFFFFF"/>
                 </a:solidFill>
-                <a:latin typeface="Microsoft YaHei"/>
-                <a:ea typeface="Microsoft YaHei"/>
+                <a:latin typeface="微软雅黑" panose="020B0503020204020204" charset="-122"/>
+                <a:ea typeface="微软雅黑" panose="020B0503020204020204" charset="-122"/>
               </a:rPr>
               <a:t>光照变化</a:t>
             </a:r>
-          </a:p>
-          <a:p>
-            <a:pPr algn="c"/>
+            <a:endParaRPr lang="zh-CN" sz="2200" b="1">
+              <a:solidFill>
+                <a:srgbClr val="FFFFFF"/>
+              </a:solidFill>
+              <a:latin typeface="微软雅黑" panose="020B0503020204020204" charset="-122"/>
+              <a:ea typeface="微软雅黑" panose="020B0503020204020204" charset="-122"/>
+            </a:endParaRPr>
+          </a:p>
+          <a:p>
+            <a:pPr algn="l"/>
             <a:r>
               <a:rPr lang="zh-CN" sz="1500">
                 <a:solidFill>
                   <a:srgbClr val="FFFFFF"/>
                 </a:solidFill>
-                <a:latin typeface="Microsoft YaHei"/>
-                <a:ea typeface="Microsoft YaHei"/>
+                <a:latin typeface="微软雅黑" panose="020B0503020204020204" charset="-122"/>
+                <a:ea typeface="微软雅黑" panose="020B0503020204020204" charset="-122"/>
               </a:rPr>
               <a:t>同一产品变亮/变暗，灰度均值、HSV-V 直接漂移，容易跨过阈值。</a:t>
             </a:r>
+            <a:endParaRPr lang="zh-CN" sz="1500">
+              <a:solidFill>
+                <a:srgbClr val="FFFFFF"/>
+              </a:solidFill>
+              <a:latin typeface="微软雅黑" panose="020B0503020204020204" charset="-122"/>
+              <a:ea typeface="微软雅黑" panose="020B0503020204020204" charset="-122"/>
+            </a:endParaRPr>
           </a:p>
         </p:txBody>
       </p:sp>
@@ -1905,30 +2215,44 @@
           </a:bodyPr>
           <a:lstStyle/>
           <a:p>
-            <a:pPr algn="c"/>
+            <a:pPr algn="l"/>
             <a:r>
               <a:rPr lang="zh-CN" sz="2200" b="1">
                 <a:solidFill>
                   <a:srgbClr val="FFFFFF"/>
                 </a:solidFill>
-                <a:latin typeface="Microsoft YaHei"/>
-                <a:ea typeface="Microsoft YaHei"/>
+                <a:latin typeface="微软雅黑" panose="020B0503020204020204" charset="-122"/>
+                <a:ea typeface="微软雅黑" panose="020B0503020204020204" charset="-122"/>
               </a:rPr>
               <a:t>ROI 偏移/姿态变化</a:t>
             </a:r>
-          </a:p>
-          <a:p>
-            <a:pPr algn="c"/>
+            <a:endParaRPr lang="zh-CN" sz="2200" b="1">
+              <a:solidFill>
+                <a:srgbClr val="FFFFFF"/>
+              </a:solidFill>
+              <a:latin typeface="微软雅黑" panose="020B0503020204020204" charset="-122"/>
+              <a:ea typeface="微软雅黑" panose="020B0503020204020204" charset="-122"/>
+            </a:endParaRPr>
+          </a:p>
+          <a:p>
+            <a:pPr algn="l"/>
             <a:r>
               <a:rPr lang="zh-CN" sz="1500">
                 <a:solidFill>
                   <a:srgbClr val="FFFFFF"/>
                 </a:solidFill>
-                <a:latin typeface="Microsoft YaHei"/>
-                <a:ea typeface="Microsoft YaHei"/>
+                <a:latin typeface="微软雅黑" panose="020B0503020204020204" charset="-122"/>
+                <a:ea typeface="微软雅黑" panose="020B0503020204020204" charset="-122"/>
               </a:rPr>
               <a:t>框到一点背景、边缘或阴影，均值/标准差马上改变。</a:t>
             </a:r>
+            <a:endParaRPr lang="zh-CN" sz="1500">
+              <a:solidFill>
+                <a:srgbClr val="FFFFFF"/>
+              </a:solidFill>
+              <a:latin typeface="微软雅黑" panose="020B0503020204020204" charset="-122"/>
+              <a:ea typeface="微软雅黑" panose="020B0503020204020204" charset="-122"/>
+            </a:endParaRPr>
           </a:p>
         </p:txBody>
       </p:sp>
@@ -1959,30 +2283,44 @@
           </a:bodyPr>
           <a:lstStyle/>
           <a:p>
-            <a:pPr algn="c"/>
+            <a:pPr algn="l"/>
             <a:r>
               <a:rPr lang="zh-CN" sz="2200" b="1">
                 <a:solidFill>
                   <a:srgbClr val="FFFFFF"/>
                 </a:solidFill>
-                <a:latin typeface="Microsoft YaHei"/>
-                <a:ea typeface="Microsoft YaHei"/>
+                <a:latin typeface="微软雅黑" panose="020B0503020204020204" charset="-122"/>
+                <a:ea typeface="微软雅黑" panose="020B0503020204020204" charset="-122"/>
               </a:rPr>
               <a:t>缺陷不是颜色变化</a:t>
             </a:r>
-          </a:p>
-          <a:p>
-            <a:pPr algn="c"/>
+            <a:endParaRPr lang="zh-CN" sz="2200" b="1">
+              <a:solidFill>
+                <a:srgbClr val="FFFFFF"/>
+              </a:solidFill>
+              <a:latin typeface="微软雅黑" panose="020B0503020204020204" charset="-122"/>
+              <a:ea typeface="微软雅黑" panose="020B0503020204020204" charset="-122"/>
+            </a:endParaRPr>
+          </a:p>
+          <a:p>
+            <a:pPr algn="l"/>
             <a:r>
               <a:rPr lang="zh-CN" sz="1500">
                 <a:solidFill>
                   <a:srgbClr val="FFFFFF"/>
                 </a:solidFill>
-                <a:latin typeface="Microsoft YaHei"/>
-                <a:ea typeface="Microsoft YaHei"/>
+                <a:latin typeface="微软雅黑" panose="020B0503020204020204" charset="-122"/>
+                <a:ea typeface="微软雅黑" panose="020B0503020204020204" charset="-122"/>
               </a:rPr>
               <a:t>划痕、缺口、装配偏移可能平均亮度差不多，阈值看不出来。</a:t>
             </a:r>
+            <a:endParaRPr lang="zh-CN" sz="1500">
+              <a:solidFill>
+                <a:srgbClr val="FFFFFF"/>
+              </a:solidFill>
+              <a:latin typeface="微软雅黑" panose="020B0503020204020204" charset="-122"/>
+              <a:ea typeface="微软雅黑" panose="020B0503020204020204" charset="-122"/>
+            </a:endParaRPr>
           </a:p>
         </p:txBody>
       </p:sp>
@@ -2015,17 +2353,24 @@
           </a:bodyPr>
           <a:lstStyle/>
           <a:p>
-            <a:pPr algn="c"/>
+            <a:pPr algn="l"/>
             <a:r>
               <a:rPr lang="zh-CN" sz="1900" b="1">
                 <a:solidFill>
                   <a:srgbClr val="111827"/>
                 </a:solidFill>
-                <a:latin typeface="Microsoft YaHei"/>
-                <a:ea typeface="Microsoft YaHei"/>
+                <a:latin typeface="微软雅黑" panose="020B0503020204020204" charset="-122"/>
+                <a:ea typeface="微软雅黑" panose="020B0503020204020204" charset="-122"/>
               </a:rPr>
               <a:t>阈值法的典型风险：光照一变，OK/NG 数值区间重叠</a:t>
             </a:r>
+            <a:endParaRPr lang="zh-CN" sz="1900" b="1">
+              <a:solidFill>
+                <a:srgbClr val="111827"/>
+              </a:solidFill>
+              <a:latin typeface="微软雅黑" panose="020B0503020204020204" charset="-122"/>
+              <a:ea typeface="微软雅黑" panose="020B0503020204020204" charset="-122"/>
+            </a:endParaRPr>
           </a:p>
         </p:txBody>
       </p:sp>
@@ -2098,17 +2443,24 @@
           </a:bodyPr>
           <a:lstStyle/>
           <a:p>
-            <a:pPr algn="c"/>
+            <a:pPr algn="l"/>
             <a:r>
               <a:rPr lang="zh-CN" sz="1300" b="1">
                 <a:solidFill>
                   <a:srgbClr val="DC2626"/>
                 </a:solidFill>
-                <a:latin typeface="Microsoft YaHei"/>
-                <a:ea typeface="Microsoft YaHei"/>
+                <a:latin typeface="微软雅黑" panose="020B0503020204020204" charset="-122"/>
+                <a:ea typeface="微软雅黑" panose="020B0503020204020204" charset="-122"/>
               </a:rPr>
               <a:t>阈值</a:t>
             </a:r>
+            <a:endParaRPr lang="zh-CN" sz="1300" b="1">
+              <a:solidFill>
+                <a:srgbClr val="DC2626"/>
+              </a:solidFill>
+              <a:latin typeface="微软雅黑" panose="020B0503020204020204" charset="-122"/>
+              <a:ea typeface="微软雅黑" panose="020B0503020204020204" charset="-122"/>
+            </a:endParaRPr>
           </a:p>
         </p:txBody>
       </p:sp>
@@ -2319,11 +2671,18 @@
                 <a:solidFill>
                   <a:srgbClr val="8BC20F"/>
                 </a:solidFill>
-                <a:latin typeface="Microsoft YaHei"/>
-                <a:ea typeface="Microsoft YaHei"/>
+                <a:latin typeface="微软雅黑" panose="020B0503020204020204" charset="-122"/>
+                <a:ea typeface="微软雅黑" panose="020B0503020204020204" charset="-122"/>
               </a:rPr>
               <a:t>OK 数值</a:t>
             </a:r>
+            <a:endParaRPr lang="zh-CN" sz="1300" b="1">
+              <a:solidFill>
+                <a:srgbClr val="8BC20F"/>
+              </a:solidFill>
+              <a:latin typeface="微软雅黑" panose="020B0503020204020204" charset="-122"/>
+              <a:ea typeface="微软雅黑" panose="020B0503020204020204" charset="-122"/>
+            </a:endParaRPr>
           </a:p>
         </p:txBody>
       </p:sp>
@@ -2358,11 +2717,18 @@
                 <a:solidFill>
                   <a:srgbClr val="DC2626"/>
                 </a:solidFill>
-                <a:latin typeface="Microsoft YaHei"/>
-                <a:ea typeface="Microsoft YaHei"/>
+                <a:latin typeface="微软雅黑" panose="020B0503020204020204" charset="-122"/>
+                <a:ea typeface="微软雅黑" panose="020B0503020204020204" charset="-122"/>
               </a:rPr>
               <a:t>NG 数值</a:t>
             </a:r>
+            <a:endParaRPr lang="zh-CN" sz="1300" b="1">
+              <a:solidFill>
+                <a:srgbClr val="DC2626"/>
+              </a:solidFill>
+              <a:latin typeface="微软雅黑" panose="020B0503020204020204" charset="-122"/>
+              <a:ea typeface="微软雅黑" panose="020B0503020204020204" charset="-122"/>
+            </a:endParaRPr>
           </a:p>
         </p:txBody>
       </p:sp>
@@ -2401,15 +2767,22 @@
                 <a:solidFill>
                   <a:srgbClr val="111827"/>
                 </a:solidFill>
-                <a:latin typeface="Microsoft YaHei"/>
-                <a:ea typeface="Microsoft YaHei"/>
+                <a:latin typeface="微软雅黑" panose="020B0503020204020204" charset="-122"/>
+                <a:ea typeface="微软雅黑" panose="020B0503020204020204" charset="-122"/>
               </a:rPr>
               <a:t>对产线意味着什么</a:t>
             </a:r>
-          </a:p>
-          <a:p>
-            <a:pPr marL="240000" indent="-140000">
-              <a:buFont typeface="Microsoft YaHei"/>
+            <a:endParaRPr lang="zh-CN" sz="2300" b="1">
+              <a:solidFill>
+                <a:srgbClr val="111827"/>
+              </a:solidFill>
+              <a:latin typeface="微软雅黑" panose="020B0503020204020204" charset="-122"/>
+              <a:ea typeface="微软雅黑" panose="020B0503020204020204" charset="-122"/>
+            </a:endParaRPr>
+          </a:p>
+          <a:p>
+            <a:pPr marL="240030" indent="-139700">
+              <a:buFont typeface="微软雅黑" panose="020B0503020204020204" charset="-122"/>
               <a:buChar char="▪"/>
             </a:pPr>
             <a:r>
@@ -2417,15 +2790,22 @@
                 <a:solidFill>
                   <a:srgbClr val="111827"/>
                 </a:solidFill>
-                <a:latin typeface="Microsoft YaHei"/>
-                <a:ea typeface="Microsoft YaHei"/>
+                <a:latin typeface="微软雅黑" panose="020B0503020204020204" charset="-122"/>
+                <a:ea typeface="微软雅黑" panose="020B0503020204020204" charset="-122"/>
               </a:rPr>
               <a:t>灯光衰减、反光、曝光变化后要重新调阈值。</a:t>
             </a:r>
-          </a:p>
-          <a:p>
-            <a:pPr marL="240000" indent="-140000">
-              <a:buFont typeface="Microsoft YaHei"/>
+            <a:endParaRPr lang="zh-CN" sz="1800">
+              <a:solidFill>
+                <a:srgbClr val="111827"/>
+              </a:solidFill>
+              <a:latin typeface="微软雅黑" panose="020B0503020204020204" charset="-122"/>
+              <a:ea typeface="微软雅黑" panose="020B0503020204020204" charset="-122"/>
+            </a:endParaRPr>
+          </a:p>
+          <a:p>
+            <a:pPr marL="240030" indent="-139700">
+              <a:buFont typeface="微软雅黑" panose="020B0503020204020204" charset="-122"/>
               <a:buChar char="▪"/>
             </a:pPr>
             <a:r>
@@ -2433,15 +2813,22 @@
                 <a:solidFill>
                   <a:srgbClr val="111827"/>
                 </a:solidFill>
-                <a:latin typeface="Microsoft YaHei"/>
-                <a:ea typeface="Microsoft YaHei"/>
+                <a:latin typeface="微软雅黑" panose="020B0503020204020204" charset="-122"/>
+                <a:ea typeface="微软雅黑" panose="020B0503020204020204" charset="-122"/>
               </a:rPr>
               <a:t>产品换批、材质颜色差异会改变统计值。</a:t>
             </a:r>
-          </a:p>
-          <a:p>
-            <a:pPr marL="240000" indent="-140000">
-              <a:buFont typeface="Microsoft YaHei"/>
+            <a:endParaRPr lang="zh-CN" sz="1800">
+              <a:solidFill>
+                <a:srgbClr val="111827"/>
+              </a:solidFill>
+              <a:latin typeface="微软雅黑" panose="020B0503020204020204" charset="-122"/>
+              <a:ea typeface="微软雅黑" panose="020B0503020204020204" charset="-122"/>
+            </a:endParaRPr>
+          </a:p>
+          <a:p>
+            <a:pPr marL="240030" indent="-139700">
+              <a:buFont typeface="微软雅黑" panose="020B0503020204020204" charset="-122"/>
               <a:buChar char="▪"/>
             </a:pPr>
             <a:r>
@@ -2449,15 +2836,22 @@
                 <a:solidFill>
                   <a:srgbClr val="111827"/>
                 </a:solidFill>
-                <a:latin typeface="Microsoft YaHei"/>
-                <a:ea typeface="Microsoft YaHei"/>
+                <a:latin typeface="微软雅黑" panose="020B0503020204020204" charset="-122"/>
+                <a:ea typeface="微软雅黑" panose="020B0503020204020204" charset="-122"/>
               </a:rPr>
               <a:t>多种缺陷要写多套规则，维护成本上升。</a:t>
             </a:r>
-          </a:p>
-          <a:p>
-            <a:pPr marL="240000" indent="-140000">
-              <a:buFont typeface="Microsoft YaHei"/>
+            <a:endParaRPr lang="zh-CN" sz="1800">
+              <a:solidFill>
+                <a:srgbClr val="111827"/>
+              </a:solidFill>
+              <a:latin typeface="微软雅黑" panose="020B0503020204020204" charset="-122"/>
+              <a:ea typeface="微软雅黑" panose="020B0503020204020204" charset="-122"/>
+            </a:endParaRPr>
+          </a:p>
+          <a:p>
+            <a:pPr marL="240030" indent="-139700">
+              <a:buFont typeface="微软雅黑" panose="020B0503020204020204" charset="-122"/>
               <a:buChar char="▪"/>
             </a:pPr>
             <a:r>
@@ -2465,11 +2859,18 @@
                 <a:solidFill>
                   <a:srgbClr val="111827"/>
                 </a:solidFill>
-                <a:latin typeface="Microsoft YaHei"/>
-                <a:ea typeface="Microsoft YaHei"/>
+                <a:latin typeface="微软雅黑" panose="020B0503020204020204" charset="-122"/>
+                <a:ea typeface="微软雅黑" panose="020B0503020204020204" charset="-122"/>
               </a:rPr>
               <a:t>阈值一旦卡得太紧，容易误杀 OK；卡得太松，容易漏检 NG。</a:t>
             </a:r>
+            <a:endParaRPr lang="zh-CN" sz="1800">
+              <a:solidFill>
+                <a:srgbClr val="111827"/>
+              </a:solidFill>
+              <a:latin typeface="微软雅黑" panose="020B0503020204020204" charset="-122"/>
+              <a:ea typeface="微软雅黑" panose="020B0503020204020204" charset="-122"/>
+            </a:endParaRPr>
           </a:p>
         </p:txBody>
       </p:sp>
@@ -2500,7 +2901,7 @@
       </p:grpSpPr>
       <p:sp>
         <p:nvSpPr>
-          <p:cNvPr id="1" name="Background"/>
+          <p:cNvPr id="2" name="Background"/>
           <p:cNvSpPr/>
           <p:nvPr/>
         </p:nvSpPr>
@@ -2522,7 +2923,7 @@
       </p:sp>
       <p:sp>
         <p:nvSpPr>
-          <p:cNvPr id="2" name="Left accent"/>
+          <p:cNvPr id="3" name="Left accent"/>
           <p:cNvSpPr/>
           <p:nvPr/>
         </p:nvSpPr>
@@ -2544,7 +2945,7 @@
       </p:sp>
       <p:sp>
         <p:nvSpPr>
-          <p:cNvPr id="3" name="Title"/>
+          <p:cNvPr id="4" name="Title"/>
           <p:cNvSpPr txBox="1"/>
           <p:nvPr/>
         </p:nvSpPr>
@@ -2573,17 +2974,24 @@
                 <a:solidFill>
                   <a:srgbClr val="111827"/>
                 </a:solidFill>
-                <a:latin typeface="Microsoft YaHei"/>
-                <a:ea typeface="Microsoft YaHei"/>
+                <a:latin typeface="微软雅黑" panose="020B0503020204020204" charset="-122"/>
+                <a:ea typeface="微软雅黑" panose="020B0503020204020204" charset="-122"/>
               </a:rPr>
               <a:t>为什么模型检测方式更好</a:t>
             </a:r>
-          </a:p>
-        </p:txBody>
-      </p:sp>
-      <p:sp>
-        <p:nvSpPr>
-          <p:cNvPr id="4" name="Bottom teal dot"/>
+            <a:endParaRPr lang="zh-CN" sz="2400" b="1">
+              <a:solidFill>
+                <a:srgbClr val="111827"/>
+              </a:solidFill>
+              <a:latin typeface="微软雅黑" panose="020B0503020204020204" charset="-122"/>
+              <a:ea typeface="微软雅黑" panose="020B0503020204020204" charset="-122"/>
+            </a:endParaRPr>
+          </a:p>
+        </p:txBody>
+      </p:sp>
+      <p:sp>
+        <p:nvSpPr>
+          <p:cNvPr id="5" name="Bottom teal dot"/>
           <p:cNvSpPr/>
           <p:nvPr/>
         </p:nvSpPr>
@@ -2605,7 +3013,7 @@
       </p:sp>
       <p:sp>
         <p:nvSpPr>
-          <p:cNvPr id="5" name="Bottom teal dot 2"/>
+          <p:cNvPr id="6" name="Bottom teal dot 2"/>
           <p:cNvSpPr/>
           <p:nvPr/>
         </p:nvSpPr>
@@ -2627,7 +3035,7 @@
       </p:sp>
       <p:sp>
         <p:nvSpPr>
-          <p:cNvPr id="6" name="Bottom pill"/>
+          <p:cNvPr id="7" name="Bottom pill"/>
           <p:cNvSpPr/>
           <p:nvPr/>
         </p:nvSpPr>
@@ -2649,7 +3057,7 @@
       </p:sp>
       <p:sp>
         <p:nvSpPr>
-          <p:cNvPr id="7" name="Bottom teal dot 3"/>
+          <p:cNvPr id="8" name="Bottom teal dot 3"/>
           <p:cNvSpPr/>
           <p:nvPr/>
         </p:nvSpPr>
@@ -2671,7 +3079,7 @@
       </p:sp>
       <p:sp>
         <p:nvSpPr>
-          <p:cNvPr id="8" name="Bottom teal dot 4"/>
+          <p:cNvPr id="9" name="Bottom teal dot 4"/>
           <p:cNvSpPr/>
           <p:nvPr/>
         </p:nvSpPr>
@@ -2748,11 +3156,18 @@
                 <a:solidFill>
                   <a:srgbClr val="111827"/>
                 </a:solidFill>
-                <a:latin typeface="Microsoft YaHei"/>
-                <a:ea typeface="Microsoft YaHei"/>
+                <a:latin typeface="微软雅黑" panose="020B0503020204020204" charset="-122"/>
+                <a:ea typeface="微软雅黑" panose="020B0503020204020204" charset="-122"/>
               </a:rPr>
               <a:t>看结构，而不是只看平均值</a:t>
             </a:r>
+            <a:endParaRPr lang="zh-CN" sz="2200" b="1">
+              <a:solidFill>
+                <a:srgbClr val="111827"/>
+              </a:solidFill>
+              <a:latin typeface="微软雅黑" panose="020B0503020204020204" charset="-122"/>
+              <a:ea typeface="微软雅黑" panose="020B0503020204020204" charset="-122"/>
+            </a:endParaRPr>
           </a:p>
           <a:p>
             <a:pPr algn="l"/>
@@ -2761,11 +3176,18 @@
                 <a:solidFill>
                   <a:srgbClr val="475569"/>
                 </a:solidFill>
-                <a:latin typeface="Microsoft YaHei"/>
-                <a:ea typeface="Microsoft YaHei"/>
+                <a:latin typeface="微软雅黑" panose="020B0503020204020204" charset="-122"/>
+                <a:ea typeface="微软雅黑" panose="020B0503020204020204" charset="-122"/>
               </a:rPr>
               <a:t>CNN 特征会组合边缘、纹理、形状和局部空间模式；缺口、划痕、偏移更容易被表达。</a:t>
             </a:r>
+            <a:endParaRPr lang="zh-CN" sz="1700">
+              <a:solidFill>
+                <a:srgbClr val="475569"/>
+              </a:solidFill>
+              <a:latin typeface="微软雅黑" panose="020B0503020204020204" charset="-122"/>
+              <a:ea typeface="微软雅黑" panose="020B0503020204020204" charset="-122"/>
+            </a:endParaRPr>
           </a:p>
         </p:txBody>
       </p:sp>
@@ -2826,11 +3248,18 @@
                 <a:solidFill>
                   <a:srgbClr val="111827"/>
                 </a:solidFill>
-                <a:latin typeface="Microsoft YaHei"/>
-                <a:ea typeface="Microsoft YaHei"/>
+                <a:latin typeface="微软雅黑" panose="020B0503020204020204" charset="-122"/>
+                <a:ea typeface="微软雅黑" panose="020B0503020204020204" charset="-122"/>
               </a:rPr>
               <a:t>对光照更稳</a:t>
             </a:r>
+            <a:endParaRPr lang="zh-CN" sz="2200" b="1">
+              <a:solidFill>
+                <a:srgbClr val="111827"/>
+              </a:solidFill>
+              <a:latin typeface="微软雅黑" panose="020B0503020204020204" charset="-122"/>
+              <a:ea typeface="微软雅黑" panose="020B0503020204020204" charset="-122"/>
+            </a:endParaRPr>
           </a:p>
           <a:p>
             <a:pPr algn="l"/>
@@ -2839,11 +3268,18 @@
                 <a:solidFill>
                   <a:srgbClr val="475569"/>
                 </a:solidFill>
-                <a:latin typeface="Microsoft YaHei"/>
-                <a:ea typeface="Microsoft YaHei"/>
+                <a:latin typeface="微软雅黑" panose="020B0503020204020204" charset="-122"/>
+                <a:ea typeface="微软雅黑" panose="020B0503020204020204" charset="-122"/>
               </a:rPr>
               <a:t>输入做 ImageNet 标准化，输出做 L2 归一化，再用 cosine 相似度；整体亮暗变化对判定影响更小。</a:t>
             </a:r>
+            <a:endParaRPr lang="zh-CN" sz="1700">
+              <a:solidFill>
+                <a:srgbClr val="475569"/>
+              </a:solidFill>
+              <a:latin typeface="微软雅黑" panose="020B0503020204020204" charset="-122"/>
+              <a:ea typeface="微软雅黑" panose="020B0503020204020204" charset="-122"/>
+            </a:endParaRPr>
           </a:p>
         </p:txBody>
       </p:sp>
@@ -2904,11 +3340,18 @@
                 <a:solidFill>
                   <a:srgbClr val="111827"/>
                 </a:solidFill>
-                <a:latin typeface="Microsoft YaHei"/>
-                <a:ea typeface="Microsoft YaHei"/>
+                <a:latin typeface="微软雅黑" panose="020B0503020204020204" charset="-122"/>
+                <a:ea typeface="微软雅黑" panose="020B0503020204020204" charset="-122"/>
               </a:rPr>
               <a:t>少样本即可学习</a:t>
             </a:r>
+            <a:endParaRPr lang="zh-CN" sz="2200" b="1">
+              <a:solidFill>
+                <a:srgbClr val="111827"/>
+              </a:solidFill>
+              <a:latin typeface="微软雅黑" panose="020B0503020204020204" charset="-122"/>
+              <a:ea typeface="微软雅黑" panose="020B0503020204020204" charset="-122"/>
+            </a:endParaRPr>
           </a:p>
           <a:p>
             <a:pPr algn="l"/>
@@ -2917,11 +3360,18 @@
                 <a:solidFill>
                   <a:srgbClr val="475569"/>
                 </a:solidFill>
-                <a:latin typeface="Microsoft YaHei"/>
-                <a:ea typeface="Microsoft YaHei"/>
+                <a:latin typeface="微软雅黑" panose="020B0503020204020204" charset="-122"/>
+                <a:ea typeface="微软雅黑" panose="020B0503020204020204" charset="-122"/>
               </a:rPr>
               <a:t>不训练新分类器，只提取 OK/NG 样本 embedding，形成原型和样本库。</a:t>
             </a:r>
+            <a:endParaRPr lang="zh-CN" sz="1700">
+              <a:solidFill>
+                <a:srgbClr val="475569"/>
+              </a:solidFill>
+              <a:latin typeface="微软雅黑" panose="020B0503020204020204" charset="-122"/>
+              <a:ea typeface="微软雅黑" panose="020B0503020204020204" charset="-122"/>
+            </a:endParaRPr>
           </a:p>
         </p:txBody>
       </p:sp>
@@ -2982,11 +3432,18 @@
                 <a:solidFill>
                   <a:srgbClr val="111827"/>
                 </a:solidFill>
-                <a:latin typeface="Microsoft YaHei"/>
-                <a:ea typeface="Microsoft YaHei"/>
+                <a:latin typeface="微软雅黑" panose="020B0503020204020204" charset="-122"/>
+                <a:ea typeface="微软雅黑" panose="020B0503020204020204" charset="-122"/>
               </a:rPr>
               <a:t>快速换型</a:t>
             </a:r>
+            <a:endParaRPr lang="zh-CN" sz="2200" b="1">
+              <a:solidFill>
+                <a:srgbClr val="111827"/>
+              </a:solidFill>
+              <a:latin typeface="微软雅黑" panose="020B0503020204020204" charset="-122"/>
+              <a:ea typeface="微软雅黑" panose="020B0503020204020204" charset="-122"/>
+            </a:endParaRPr>
           </a:p>
           <a:p>
             <a:pPr algn="l"/>
@@ -2995,11 +3452,18 @@
                 <a:solidFill>
                   <a:srgbClr val="475569"/>
                 </a:solidFill>
-                <a:latin typeface="Microsoft YaHei"/>
-                <a:ea typeface="Microsoft YaHei"/>
+                <a:latin typeface="微软雅黑" panose="020B0503020204020204" charset="-122"/>
+                <a:ea typeface="微软雅黑" panose="020B0503020204020204" charset="-122"/>
               </a:rPr>
               <a:t>backbone 复用；换产品主要重新标 ROI、采 OK/NG 样本并保存 npz。</a:t>
             </a:r>
+            <a:endParaRPr lang="zh-CN" sz="1700">
+              <a:solidFill>
+                <a:srgbClr val="475569"/>
+              </a:solidFill>
+              <a:latin typeface="微软雅黑" panose="020B0503020204020204" charset="-122"/>
+              <a:ea typeface="微软雅黑" panose="020B0503020204020204" charset="-122"/>
+            </a:endParaRPr>
           </a:p>
         </p:txBody>
       </p:sp>
@@ -3032,17 +3496,24 @@
           </a:bodyPr>
           <a:lstStyle/>
           <a:p>
-            <a:pPr algn="c"/>
+            <a:pPr algn="l"/>
             <a:r>
               <a:rPr lang="zh-CN" sz="1800" b="1">
                 <a:solidFill>
                   <a:srgbClr val="111827"/>
                 </a:solidFill>
-                <a:latin typeface="Microsoft YaHei"/>
-                <a:ea typeface="Microsoft YaHei"/>
+                <a:latin typeface="微软雅黑" panose="020B0503020204020204" charset="-122"/>
+                <a:ea typeface="微软雅黑" panose="020B0503020204020204" charset="-122"/>
               </a:rPr>
               <a:t>注意：模型方法不是完全不怕光照；它的优势是比单一灰度/颜色阈值更能利用结构信息，轻微光照波动下更不容易被数值漂移带偏。</a:t>
             </a:r>
+            <a:endParaRPr lang="zh-CN" sz="1800" b="1">
+              <a:solidFill>
+                <a:srgbClr val="111827"/>
+              </a:solidFill>
+              <a:latin typeface="微软雅黑" panose="020B0503020204020204" charset="-122"/>
+              <a:ea typeface="微软雅黑" panose="020B0503020204020204" charset="-122"/>
+            </a:endParaRPr>
           </a:p>
         </p:txBody>
       </p:sp>
@@ -3073,7 +3544,7 @@
       </p:grpSpPr>
       <p:sp>
         <p:nvSpPr>
-          <p:cNvPr id="1" name="Background"/>
+          <p:cNvPr id="2" name="Background"/>
           <p:cNvSpPr/>
           <p:nvPr/>
         </p:nvSpPr>
@@ -3095,7 +3566,7 @@
       </p:sp>
       <p:sp>
         <p:nvSpPr>
-          <p:cNvPr id="2" name="Left accent"/>
+          <p:cNvPr id="3" name="Left accent"/>
           <p:cNvSpPr/>
           <p:nvPr/>
         </p:nvSpPr>
@@ -3117,7 +3588,7 @@
       </p:sp>
       <p:sp>
         <p:nvSpPr>
-          <p:cNvPr id="3" name="Title"/>
+          <p:cNvPr id="4" name="Title"/>
           <p:cNvSpPr txBox="1"/>
           <p:nvPr/>
         </p:nvSpPr>
@@ -3146,17 +3617,24 @@
                 <a:solidFill>
                   <a:srgbClr val="111827"/>
                 </a:solidFill>
-                <a:latin typeface="Microsoft YaHei"/>
-                <a:ea typeface="Microsoft YaHei"/>
+                <a:latin typeface="微软雅黑" panose="020B0503020204020204" charset="-122"/>
+                <a:ea typeface="微软雅黑" panose="020B0503020204020204" charset="-122"/>
               </a:rPr>
               <a:t>算法原理图：训练阶段</a:t>
             </a:r>
-          </a:p>
-        </p:txBody>
-      </p:sp>
-      <p:sp>
-        <p:nvSpPr>
-          <p:cNvPr id="4" name="Bottom teal dot"/>
+            <a:endParaRPr lang="zh-CN" sz="2400" b="1">
+              <a:solidFill>
+                <a:srgbClr val="111827"/>
+              </a:solidFill>
+              <a:latin typeface="微软雅黑" panose="020B0503020204020204" charset="-122"/>
+              <a:ea typeface="微软雅黑" panose="020B0503020204020204" charset="-122"/>
+            </a:endParaRPr>
+          </a:p>
+        </p:txBody>
+      </p:sp>
+      <p:sp>
+        <p:nvSpPr>
+          <p:cNvPr id="5" name="Bottom teal dot"/>
           <p:cNvSpPr/>
           <p:nvPr/>
         </p:nvSpPr>
@@ -3178,7 +3656,7 @@
       </p:sp>
       <p:sp>
         <p:nvSpPr>
-          <p:cNvPr id="5" name="Bottom teal dot 2"/>
+          <p:cNvPr id="6" name="Bottom teal dot 2"/>
           <p:cNvSpPr/>
           <p:nvPr/>
         </p:nvSpPr>
@@ -3200,7 +3678,7 @@
       </p:sp>
       <p:sp>
         <p:nvSpPr>
-          <p:cNvPr id="6" name="Bottom pill"/>
+          <p:cNvPr id="7" name="Bottom pill"/>
           <p:cNvSpPr/>
           <p:nvPr/>
         </p:nvSpPr>
@@ -3222,7 +3700,7 @@
       </p:sp>
       <p:sp>
         <p:nvSpPr>
-          <p:cNvPr id="7" name="Bottom teal dot 3"/>
+          <p:cNvPr id="8" name="Bottom teal dot 3"/>
           <p:cNvSpPr/>
           <p:nvPr/>
         </p:nvSpPr>
@@ -3244,7 +3722,7 @@
       </p:sp>
       <p:sp>
         <p:nvSpPr>
-          <p:cNvPr id="8" name="Bottom teal dot 4"/>
+          <p:cNvPr id="9" name="Bottom teal dot 4"/>
           <p:cNvSpPr/>
           <p:nvPr/>
         </p:nvSpPr>
@@ -3313,23 +3791,511 @@
           </a:bodyPr>
           <a:lstStyle/>
           <a:p>
-            <a:pPr algn="c"/>
+            <a:pPr algn="l"/>
             <a:r>
               <a:rPr lang="zh-CN" sz="1400" b="1">
                 <a:solidFill>
                   <a:srgbClr val="009CA6"/>
                 </a:solidFill>
-                <a:latin typeface="Microsoft YaHei"/>
-                <a:ea typeface="Microsoft YaHei"/>
+                <a:latin typeface="微软雅黑" panose="020B0503020204020204" charset="-122"/>
+                <a:ea typeface="微软雅黑" panose="020B0503020204020204" charset="-122"/>
               </a:rPr>
               <a:t>OK/NG 样本</a:t>
             </a:r>
+            <a:endParaRPr lang="zh-CN" sz="1400" b="1">
+              <a:solidFill>
+                <a:srgbClr val="009CA6"/>
+              </a:solidFill>
+              <a:latin typeface="微软雅黑" panose="020B0503020204020204" charset="-122"/>
+              <a:ea typeface="微软雅黑" panose="020B0503020204020204" charset="-122"/>
+            </a:endParaRPr>
           </a:p>
         </p:txBody>
       </p:sp>
       <p:pic>
         <p:nvPicPr>
           <p:cNvPr id="12" name="OK/NG 样本"/>
+          <p:cNvPicPr>
+            <a:picLocks noChangeAspect="1"/>
+          </p:cNvPicPr>
+          <p:nvPr/>
+        </p:nvPicPr>
+        <p:blipFill>
+          <a:blip r:embed="rId1"/>
+          <a:stretch>
+            <a:fillRect/>
+          </a:stretch>
+        </p:blipFill>
+        <p:spPr>
+          <a:xfrm>
+            <a:off x="784141" y="1078992"/>
+            <a:ext cx="1449238" cy="731520"/>
+          </a:xfrm>
+          <a:prstGeom prst="rect">
+            <a:avLst/>
+          </a:prstGeom>
+          <a:ln w="6350">
+            <a:solidFill>
+              <a:srgbClr val="D1D5DB"/>
+            </a:solidFill>
+          </a:ln>
+        </p:spPr>
+      </p:pic>
+      <p:cxnSp>
+        <p:nvCxnSpPr>
+          <p:cNvPr id="13" name="Arrow 13"/>
+          <p:cNvCxnSpPr/>
+          <p:nvPr/>
+        </p:nvCxnSpPr>
+        <p:spPr>
+          <a:xfrm>
+            <a:off x="2697480" y="1572768"/>
+            <a:ext cx="548640" cy="9144"/>
+          </a:xfrm>
+          <a:prstGeom prst="line">
+            <a:avLst/>
+          </a:prstGeom>
+          <a:ln w="42000">
+            <a:solidFill>
+              <a:srgbClr val="009CA6"/>
+            </a:solidFill>
+            <a:tailEnd type="triangle"/>
+          </a:ln>
+        </p:spPr>
+      </p:cxnSp>
+      <p:sp>
+        <p:nvSpPr>
+          <p:cNvPr id="14" name="ROI"/>
+          <p:cNvSpPr txBox="1"/>
+          <p:nvPr/>
+        </p:nvSpPr>
+        <p:spPr>
+          <a:xfrm>
+            <a:off x="3383280" y="914400"/>
+            <a:ext cx="1691640" cy="1325880"/>
+          </a:xfrm>
+          <a:prstGeom prst="roundRect">
+            <a:avLst/>
+          </a:prstGeom>
+          <a:solidFill>
+            <a:srgbClr val="009CA6"/>
+          </a:solidFill>
+          <a:ln>
+            <a:noFill/>
+          </a:ln>
+        </p:spPr>
+        <p:txBody>
+          <a:bodyPr wrap="square" lIns="36576" tIns="36576" rIns="36576" bIns="36576">
+            <a:spAutoFit/>
+          </a:bodyPr>
+          <a:lstStyle/>
+          <a:p>
+            <a:pPr algn="l"/>
+            <a:r>
+              <a:rPr lang="zh-CN" sz="2100" b="1">
+                <a:solidFill>
+                  <a:srgbClr val="FFFFFF"/>
+                </a:solidFill>
+                <a:latin typeface="微软雅黑" panose="020B0503020204020204" charset="-122"/>
+                <a:ea typeface="微软雅黑" panose="020B0503020204020204" charset="-122"/>
+              </a:rPr>
+              <a:t>ROI 裁剪</a:t>
+            </a:r>
+            <a:endParaRPr lang="zh-CN" sz="2100" b="1">
+              <a:solidFill>
+                <a:srgbClr val="FFFFFF"/>
+              </a:solidFill>
+              <a:latin typeface="微软雅黑" panose="020B0503020204020204" charset="-122"/>
+              <a:ea typeface="微软雅黑" panose="020B0503020204020204" charset="-122"/>
+            </a:endParaRPr>
+          </a:p>
+          <a:p>
+            <a:pPr algn="l"/>
+            <a:r>
+              <a:rPr lang="zh-CN" sz="1400">
+                <a:solidFill>
+                  <a:srgbClr val="FFFFFF"/>
+                </a:solidFill>
+                <a:latin typeface="微软雅黑" panose="020B0503020204020204" charset="-122"/>
+                <a:ea typeface="微软雅黑" panose="020B0503020204020204" charset="-122"/>
+              </a:rPr>
+              <a:t>矩形 / polygon mask</a:t>
+            </a:r>
+            <a:endParaRPr lang="zh-CN" sz="1400">
+              <a:solidFill>
+                <a:srgbClr val="FFFFFF"/>
+              </a:solidFill>
+              <a:latin typeface="微软雅黑" panose="020B0503020204020204" charset="-122"/>
+              <a:ea typeface="微软雅黑" panose="020B0503020204020204" charset="-122"/>
+            </a:endParaRPr>
+          </a:p>
+        </p:txBody>
+      </p:sp>
+      <p:cxnSp>
+        <p:nvCxnSpPr>
+          <p:cNvPr id="15" name="Arrow 15"/>
+          <p:cNvCxnSpPr/>
+          <p:nvPr/>
+        </p:nvCxnSpPr>
+        <p:spPr>
+          <a:xfrm>
+            <a:off x="5257800" y="1572768"/>
+            <a:ext cx="548640" cy="9144"/>
+          </a:xfrm>
+          <a:prstGeom prst="line">
+            <a:avLst/>
+          </a:prstGeom>
+          <a:ln w="42000">
+            <a:solidFill>
+              <a:srgbClr val="009CA6"/>
+            </a:solidFill>
+            <a:tailEnd type="triangle"/>
+          </a:ln>
+        </p:spPr>
+      </p:cxnSp>
+      <p:sp>
+        <p:nvSpPr>
+          <p:cNvPr id="16" name="Backbone"/>
+          <p:cNvSpPr txBox="1"/>
+          <p:nvPr/>
+        </p:nvSpPr>
+        <p:spPr>
+          <a:xfrm>
+            <a:off x="5943600" y="914400"/>
+            <a:ext cx="2011680" cy="1325880"/>
+          </a:xfrm>
+          <a:prstGeom prst="roundRect">
+            <a:avLst/>
+          </a:prstGeom>
+          <a:solidFill>
+            <a:srgbClr val="2563EB"/>
+          </a:solidFill>
+          <a:ln>
+            <a:noFill/>
+          </a:ln>
+        </p:spPr>
+        <p:txBody>
+          <a:bodyPr wrap="square" lIns="36576" tIns="36576" rIns="36576" bIns="36576">
+            <a:spAutoFit/>
+          </a:bodyPr>
+          <a:lstStyle/>
+          <a:p>
+            <a:pPr algn="l"/>
+            <a:r>
+              <a:rPr lang="zh-CN" sz="2100" b="1">
+                <a:solidFill>
+                  <a:srgbClr val="FFFFFF"/>
+                </a:solidFill>
+                <a:latin typeface="微软雅黑" panose="020B0503020204020204" charset="-122"/>
+                <a:ea typeface="微软雅黑" panose="020B0503020204020204" charset="-122"/>
+              </a:rPr>
+              <a:t>预训练 CNN</a:t>
+            </a:r>
+            <a:endParaRPr lang="zh-CN" sz="2100" b="1">
+              <a:solidFill>
+                <a:srgbClr val="FFFFFF"/>
+              </a:solidFill>
+              <a:latin typeface="微软雅黑" panose="020B0503020204020204" charset="-122"/>
+              <a:ea typeface="微软雅黑" panose="020B0503020204020204" charset="-122"/>
+            </a:endParaRPr>
+          </a:p>
+          <a:p>
+            <a:pPr algn="l"/>
+            <a:r>
+              <a:rPr lang="zh-CN" sz="1300">
+                <a:solidFill>
+                  <a:srgbClr val="FFFFFF"/>
+                </a:solidFill>
+                <a:latin typeface="微软雅黑" panose="020B0503020204020204" charset="-122"/>
+                <a:ea typeface="微软雅黑" panose="020B0503020204020204" charset="-122"/>
+              </a:rPr>
+              <a:t>EfficientNet / MobileNetV3</a:t>
+            </a:r>
+            <a:endParaRPr lang="zh-CN" sz="1300">
+              <a:solidFill>
+                <a:srgbClr val="FFFFFF"/>
+              </a:solidFill>
+              <a:latin typeface="微软雅黑" panose="020B0503020204020204" charset="-122"/>
+              <a:ea typeface="微软雅黑" panose="020B0503020204020204" charset="-122"/>
+            </a:endParaRPr>
+          </a:p>
+        </p:txBody>
+      </p:sp>
+      <p:cxnSp>
+        <p:nvCxnSpPr>
+          <p:cNvPr id="17" name="Arrow 17"/>
+          <p:cNvCxnSpPr/>
+          <p:nvPr/>
+        </p:nvCxnSpPr>
+        <p:spPr>
+          <a:xfrm>
+            <a:off x="8138160" y="1572768"/>
+            <a:ext cx="548640" cy="9144"/>
+          </a:xfrm>
+          <a:prstGeom prst="line">
+            <a:avLst/>
+          </a:prstGeom>
+          <a:ln w="42000">
+            <a:solidFill>
+              <a:srgbClr val="009CA6"/>
+            </a:solidFill>
+            <a:tailEnd type="triangle"/>
+          </a:ln>
+        </p:spPr>
+      </p:cxnSp>
+      <p:sp>
+        <p:nvSpPr>
+          <p:cNvPr id="18" name="Embedding"/>
+          <p:cNvSpPr txBox="1"/>
+          <p:nvPr/>
+        </p:nvSpPr>
+        <p:spPr>
+          <a:xfrm>
+            <a:off x="8823960" y="914400"/>
+            <a:ext cx="2057400" cy="1325880"/>
+          </a:xfrm>
+          <a:prstGeom prst="roundRect">
+            <a:avLst/>
+          </a:prstGeom>
+          <a:solidFill>
+            <a:srgbClr val="8BC20F"/>
+          </a:solidFill>
+          <a:ln>
+            <a:noFill/>
+          </a:ln>
+        </p:spPr>
+        <p:txBody>
+          <a:bodyPr wrap="square" lIns="36576" tIns="36576" rIns="36576" bIns="36576">
+            <a:spAutoFit/>
+          </a:bodyPr>
+          <a:lstStyle/>
+          <a:p>
+            <a:pPr algn="l"/>
+            <a:r>
+              <a:rPr lang="zh-CN" sz="2100" b="1">
+                <a:solidFill>
+                  <a:srgbClr val="FFFFFF"/>
+                </a:solidFill>
+                <a:latin typeface="微软雅黑" panose="020B0503020204020204" charset="-122"/>
+                <a:ea typeface="微软雅黑" panose="020B0503020204020204" charset="-122"/>
+              </a:rPr>
+              <a:t>Embedding 向量</a:t>
+            </a:r>
+            <a:endParaRPr lang="zh-CN" sz="2100" b="1">
+              <a:solidFill>
+                <a:srgbClr val="FFFFFF"/>
+              </a:solidFill>
+              <a:latin typeface="微软雅黑" panose="020B0503020204020204" charset="-122"/>
+              <a:ea typeface="微软雅黑" panose="020B0503020204020204" charset="-122"/>
+            </a:endParaRPr>
+          </a:p>
+          <a:p>
+            <a:pPr algn="l"/>
+            <a:r>
+              <a:rPr lang="zh-CN" sz="1400">
+                <a:solidFill>
+                  <a:srgbClr val="FFFFFF"/>
+                </a:solidFill>
+                <a:latin typeface="微软雅黑" panose="020B0503020204020204" charset="-122"/>
+                <a:ea typeface="微软雅黑" panose="020B0503020204020204" charset="-122"/>
+              </a:rPr>
+              <a:t>池化 + 归一化</a:t>
+            </a:r>
+            <a:endParaRPr lang="zh-CN" sz="1400">
+              <a:solidFill>
+                <a:srgbClr val="FFFFFF"/>
+              </a:solidFill>
+              <a:latin typeface="微软雅黑" panose="020B0503020204020204" charset="-122"/>
+              <a:ea typeface="微软雅黑" panose="020B0503020204020204" charset="-122"/>
+            </a:endParaRPr>
+          </a:p>
+        </p:txBody>
+      </p:sp>
+      <p:cxnSp>
+        <p:nvCxnSpPr>
+          <p:cNvPr id="19" name="Arrow 19"/>
+          <p:cNvCxnSpPr/>
+          <p:nvPr/>
+        </p:nvCxnSpPr>
+        <p:spPr>
+          <a:xfrm>
+            <a:off x="9829800" y="2331720"/>
+            <a:ext cx="9144" cy="502920"/>
+          </a:xfrm>
+          <a:prstGeom prst="line">
+            <a:avLst/>
+          </a:prstGeom>
+          <a:ln w="42000">
+            <a:solidFill>
+              <a:srgbClr val="8BC20F"/>
+            </a:solidFill>
+            <a:tailEnd type="triangle"/>
+          </a:ln>
+        </p:spPr>
+      </p:cxnSp>
+      <p:sp>
+        <p:nvSpPr>
+          <p:cNvPr id="20" name="Bank"/>
+          <p:cNvSpPr txBox="1"/>
+          <p:nvPr/>
+        </p:nvSpPr>
+        <p:spPr>
+          <a:xfrm>
+            <a:off x="6400800" y="2971800"/>
+            <a:ext cx="4297680" cy="1325880"/>
+          </a:xfrm>
+          <a:prstGeom prst="rect">
+            <a:avLst/>
+          </a:prstGeom>
+          <a:solidFill>
+            <a:srgbClr val="FFFFFF"/>
+          </a:solidFill>
+          <a:ln w="12700">
+            <a:solidFill>
+              <a:srgbClr val="C8CDD2"/>
+            </a:solidFill>
+          </a:ln>
+        </p:spPr>
+        <p:txBody>
+          <a:bodyPr wrap="square" lIns="73152" tIns="73152" rIns="73152" bIns="73152">
+            <a:spAutoFit/>
+          </a:bodyPr>
+          <a:lstStyle/>
+          <a:p>
+            <a:pPr algn="l"/>
+            <a:r>
+              <a:rPr lang="zh-CN" sz="2300" b="1">
+                <a:solidFill>
+                  <a:srgbClr val="111827"/>
+                </a:solidFill>
+                <a:latin typeface="微软雅黑" panose="020B0503020204020204" charset="-122"/>
+                <a:ea typeface="微软雅黑" panose="020B0503020204020204" charset="-122"/>
+              </a:rPr>
+              <a:t>生成注册模型</a:t>
+            </a:r>
+            <a:endParaRPr lang="zh-CN" sz="2300" b="1">
+              <a:solidFill>
+                <a:srgbClr val="111827"/>
+              </a:solidFill>
+              <a:latin typeface="微软雅黑" panose="020B0503020204020204" charset="-122"/>
+              <a:ea typeface="微软雅黑" panose="020B0503020204020204" charset="-122"/>
+            </a:endParaRPr>
+          </a:p>
+          <a:p>
+            <a:pPr algn="l"/>
+            <a:r>
+              <a:rPr lang="zh-CN" sz="1700">
+                <a:solidFill>
+                  <a:srgbClr val="475569"/>
+                </a:solidFill>
+                <a:latin typeface="微软雅黑" panose="020B0503020204020204" charset="-122"/>
+                <a:ea typeface="微软雅黑" panose="020B0503020204020204" charset="-122"/>
+              </a:rPr>
+              <a:t>ok_proto / ng_proto：OK、NG 的中心特征</a:t>
+            </a:r>
+            <a:endParaRPr lang="zh-CN" sz="1700">
+              <a:solidFill>
+                <a:srgbClr val="475569"/>
+              </a:solidFill>
+              <a:latin typeface="微软雅黑" panose="020B0503020204020204" charset="-122"/>
+              <a:ea typeface="微软雅黑" panose="020B0503020204020204" charset="-122"/>
+            </a:endParaRPr>
+          </a:p>
+          <a:p>
+            <a:pPr algn="l"/>
+            <a:r>
+              <a:rPr lang="zh-CN" sz="1700">
+                <a:solidFill>
+                  <a:srgbClr val="475569"/>
+                </a:solidFill>
+                <a:latin typeface="微软雅黑" panose="020B0503020204020204" charset="-122"/>
+                <a:ea typeface="微软雅黑" panose="020B0503020204020204" charset="-122"/>
+              </a:rPr>
+              <a:t>ok_bank / ng_bank：OK、NG 样本特征库</a:t>
+            </a:r>
+            <a:endParaRPr lang="zh-CN" sz="1700">
+              <a:solidFill>
+                <a:srgbClr val="475569"/>
+              </a:solidFill>
+              <a:latin typeface="微软雅黑" panose="020B0503020204020204" charset="-122"/>
+              <a:ea typeface="微软雅黑" panose="020B0503020204020204" charset="-122"/>
+            </a:endParaRPr>
+          </a:p>
+        </p:txBody>
+      </p:sp>
+      <p:sp>
+        <p:nvSpPr>
+          <p:cNvPr id="21" name="Image card"/>
+          <p:cNvSpPr/>
+          <p:nvPr/>
+        </p:nvSpPr>
+        <p:spPr>
+          <a:xfrm>
+            <a:off x="731520" y="2880360"/>
+            <a:ext cx="4480560" cy="2057400"/>
+          </a:xfrm>
+          <a:prstGeom prst="roundRect">
+            <a:avLst/>
+          </a:prstGeom>
+          <a:solidFill>
+            <a:srgbClr val="FFFFFF"/>
+          </a:solidFill>
+          <a:ln w="12700">
+            <a:solidFill>
+              <a:srgbClr val="A7A7A7"/>
+            </a:solidFill>
+          </a:ln>
+        </p:spPr>
+      </p:sp>
+      <p:sp>
+        <p:nvSpPr>
+          <p:cNvPr id="22" name="Image title"/>
+          <p:cNvSpPr txBox="1"/>
+          <p:nvPr/>
+        </p:nvSpPr>
+        <p:spPr>
+          <a:xfrm>
+            <a:off x="777240" y="4590288"/>
+            <a:ext cx="4389120" cy="274320"/>
+          </a:xfrm>
+          <a:prstGeom prst="rect">
+            <a:avLst/>
+          </a:prstGeom>
+          <a:noFill/>
+          <a:ln>
+            <a:noFill/>
+          </a:ln>
+        </p:spPr>
+        <p:txBody>
+          <a:bodyPr wrap="square" lIns="9144" tIns="9144" rIns="9144" bIns="9144">
+            <a:spAutoFit/>
+          </a:bodyPr>
+          <a:lstStyle/>
+          <a:p>
+            <a:pPr algn="l"/>
+            <a:r>
+              <a:rPr lang="zh-CN" sz="1400" b="1">
+                <a:solidFill>
+                  <a:srgbClr val="009CA6"/>
+                </a:solidFill>
+                <a:latin typeface="微软雅黑" panose="020B0503020204020204" charset="-122"/>
+                <a:ea typeface="微软雅黑" panose="020B0503020204020204" charset="-122"/>
+              </a:rPr>
+              <a:t>OK/NG 特征在空间中分开</a:t>
+            </a:r>
+            <a:endParaRPr lang="zh-CN" sz="1400" b="1">
+              <a:solidFill>
+                <a:srgbClr val="009CA6"/>
+              </a:solidFill>
+              <a:latin typeface="微软雅黑" panose="020B0503020204020204" charset="-122"/>
+              <a:ea typeface="微软雅黑" panose="020B0503020204020204" charset="-122"/>
+            </a:endParaRPr>
+          </a:p>
+        </p:txBody>
+      </p:sp>
+      <p:pic>
+        <p:nvPicPr>
+          <p:cNvPr id="23" name="OK/NG 特征在空间中分开"/>
           <p:cNvPicPr>
             <a:picLocks noChangeAspect="1"/>
           </p:cNvPicPr>
@@ -3343,8 +4309,8 @@
         </p:blipFill>
         <p:spPr>
           <a:xfrm>
-            <a:off x="784141" y="1078992"/>
-            <a:ext cx="1449238" cy="731520"/>
+            <a:off x="2090296" y="3044952"/>
+            <a:ext cx="1763008" cy="1463040"/>
           </a:xfrm>
           <a:prstGeom prst="rect">
             <a:avLst/>
@@ -3356,417 +4322,6 @@
           </a:ln>
         </p:spPr>
       </p:pic>
-      <p:cxnSp>
-        <p:nvCxnSpPr>
-          <p:cNvPr id="13" name="Arrow 13"/>
-          <p:cNvCxnSpPr/>
-          <p:nvPr/>
-        </p:nvCxnSpPr>
-        <p:spPr>
-          <a:xfrm>
-            <a:off x="2697480" y="1572768"/>
-            <a:ext cx="548640" cy="9144"/>
-          </a:xfrm>
-          <a:prstGeom prst="line">
-            <a:avLst/>
-          </a:prstGeom>
-          <a:ln w="42000">
-            <a:solidFill>
-              <a:srgbClr val="009CA6"/>
-            </a:solidFill>
-            <a:tailEnd type="triangle"/>
-          </a:ln>
-        </p:spPr>
-      </p:cxnSp>
-      <p:sp>
-        <p:nvSpPr>
-          <p:cNvPr id="14" name="ROI"/>
-          <p:cNvSpPr txBox="1"/>
-          <p:nvPr/>
-        </p:nvSpPr>
-        <p:spPr>
-          <a:xfrm>
-            <a:off x="3383280" y="914400"/>
-            <a:ext cx="1691640" cy="1325880"/>
-          </a:xfrm>
-          <a:prstGeom prst="roundRect">
-            <a:avLst/>
-          </a:prstGeom>
-          <a:solidFill>
-            <a:srgbClr val="009CA6"/>
-          </a:solidFill>
-          <a:ln>
-            <a:noFill/>
-          </a:ln>
-        </p:spPr>
-        <p:txBody>
-          <a:bodyPr wrap="square" lIns="36576" tIns="36576" rIns="36576" bIns="36576">
-            <a:spAutoFit/>
-          </a:bodyPr>
-          <a:lstStyle/>
-          <a:p>
-            <a:pPr algn="c"/>
-            <a:r>
-              <a:rPr lang="zh-CN" sz="2100" b="1">
-                <a:solidFill>
-                  <a:srgbClr val="FFFFFF"/>
-                </a:solidFill>
-                <a:latin typeface="Microsoft YaHei"/>
-                <a:ea typeface="Microsoft YaHei"/>
-              </a:rPr>
-              <a:t>ROI 裁剪</a:t>
-            </a:r>
-          </a:p>
-          <a:p>
-            <a:pPr algn="c"/>
-            <a:r>
-              <a:rPr lang="zh-CN" sz="1400">
-                <a:solidFill>
-                  <a:srgbClr val="FFFFFF"/>
-                </a:solidFill>
-                <a:latin typeface="Microsoft YaHei"/>
-                <a:ea typeface="Microsoft YaHei"/>
-              </a:rPr>
-              <a:t>矩形 / polygon mask</a:t>
-            </a:r>
-          </a:p>
-        </p:txBody>
-      </p:sp>
-      <p:cxnSp>
-        <p:nvCxnSpPr>
-          <p:cNvPr id="15" name="Arrow 15"/>
-          <p:cNvCxnSpPr/>
-          <p:nvPr/>
-        </p:nvCxnSpPr>
-        <p:spPr>
-          <a:xfrm>
-            <a:off x="5257800" y="1572768"/>
-            <a:ext cx="548640" cy="9144"/>
-          </a:xfrm>
-          <a:prstGeom prst="line">
-            <a:avLst/>
-          </a:prstGeom>
-          <a:ln w="42000">
-            <a:solidFill>
-              <a:srgbClr val="009CA6"/>
-            </a:solidFill>
-            <a:tailEnd type="triangle"/>
-          </a:ln>
-        </p:spPr>
-      </p:cxnSp>
-      <p:sp>
-        <p:nvSpPr>
-          <p:cNvPr id="16" name="Backbone"/>
-          <p:cNvSpPr txBox="1"/>
-          <p:nvPr/>
-        </p:nvSpPr>
-        <p:spPr>
-          <a:xfrm>
-            <a:off x="5943600" y="914400"/>
-            <a:ext cx="2011680" cy="1325880"/>
-          </a:xfrm>
-          <a:prstGeom prst="roundRect">
-            <a:avLst/>
-          </a:prstGeom>
-          <a:solidFill>
-            <a:srgbClr val="2563EB"/>
-          </a:solidFill>
-          <a:ln>
-            <a:noFill/>
-          </a:ln>
-        </p:spPr>
-        <p:txBody>
-          <a:bodyPr wrap="square" lIns="36576" tIns="36576" rIns="36576" bIns="36576">
-            <a:spAutoFit/>
-          </a:bodyPr>
-          <a:lstStyle/>
-          <a:p>
-            <a:pPr algn="c"/>
-            <a:r>
-              <a:rPr lang="zh-CN" sz="2100" b="1">
-                <a:solidFill>
-                  <a:srgbClr val="FFFFFF"/>
-                </a:solidFill>
-                <a:latin typeface="Microsoft YaHei"/>
-                <a:ea typeface="Microsoft YaHei"/>
-              </a:rPr>
-              <a:t>预训练 CNN</a:t>
-            </a:r>
-          </a:p>
-          <a:p>
-            <a:pPr algn="c"/>
-            <a:r>
-              <a:rPr lang="zh-CN" sz="1300">
-                <a:solidFill>
-                  <a:srgbClr val="FFFFFF"/>
-                </a:solidFill>
-                <a:latin typeface="Microsoft YaHei"/>
-                <a:ea typeface="Microsoft YaHei"/>
-              </a:rPr>
-              <a:t>EfficientNet / MobileNetV3</a:t>
-            </a:r>
-          </a:p>
-        </p:txBody>
-      </p:sp>
-      <p:cxnSp>
-        <p:nvCxnSpPr>
-          <p:cNvPr id="17" name="Arrow 17"/>
-          <p:cNvCxnSpPr/>
-          <p:nvPr/>
-        </p:nvCxnSpPr>
-        <p:spPr>
-          <a:xfrm>
-            <a:off x="8138160" y="1572768"/>
-            <a:ext cx="548640" cy="9144"/>
-          </a:xfrm>
-          <a:prstGeom prst="line">
-            <a:avLst/>
-          </a:prstGeom>
-          <a:ln w="42000">
-            <a:solidFill>
-              <a:srgbClr val="009CA6"/>
-            </a:solidFill>
-            <a:tailEnd type="triangle"/>
-          </a:ln>
-        </p:spPr>
-      </p:cxnSp>
-      <p:sp>
-        <p:nvSpPr>
-          <p:cNvPr id="18" name="Embedding"/>
-          <p:cNvSpPr txBox="1"/>
-          <p:nvPr/>
-        </p:nvSpPr>
-        <p:spPr>
-          <a:xfrm>
-            <a:off x="8823960" y="914400"/>
-            <a:ext cx="2057400" cy="1325880"/>
-          </a:xfrm>
-          <a:prstGeom prst="roundRect">
-            <a:avLst/>
-          </a:prstGeom>
-          <a:solidFill>
-            <a:srgbClr val="8BC20F"/>
-          </a:solidFill>
-          <a:ln>
-            <a:noFill/>
-          </a:ln>
-        </p:spPr>
-        <p:txBody>
-          <a:bodyPr wrap="square" lIns="36576" tIns="36576" rIns="36576" bIns="36576">
-            <a:spAutoFit/>
-          </a:bodyPr>
-          <a:lstStyle/>
-          <a:p>
-            <a:pPr algn="c"/>
-            <a:r>
-              <a:rPr lang="zh-CN" sz="2100" b="1">
-                <a:solidFill>
-                  <a:srgbClr val="FFFFFF"/>
-                </a:solidFill>
-                <a:latin typeface="Microsoft YaHei"/>
-                <a:ea typeface="Microsoft YaHei"/>
-              </a:rPr>
-              <a:t>Embedding 向量</a:t>
-            </a:r>
-          </a:p>
-          <a:p>
-            <a:pPr algn="c"/>
-            <a:r>
-              <a:rPr lang="zh-CN" sz="1400">
-                <a:solidFill>
-                  <a:srgbClr val="FFFFFF"/>
-                </a:solidFill>
-                <a:latin typeface="Microsoft YaHei"/>
-                <a:ea typeface="Microsoft YaHei"/>
-              </a:rPr>
-              <a:t>池化 + 归一化</a:t>
-            </a:r>
-          </a:p>
-        </p:txBody>
-      </p:sp>
-      <p:cxnSp>
-        <p:nvCxnSpPr>
-          <p:cNvPr id="19" name="Arrow 19"/>
-          <p:cNvCxnSpPr/>
-          <p:nvPr/>
-        </p:nvCxnSpPr>
-        <p:spPr>
-          <a:xfrm>
-            <a:off x="9829800" y="2331720"/>
-            <a:ext cx="9144" cy="502920"/>
-          </a:xfrm>
-          <a:prstGeom prst="line">
-            <a:avLst/>
-          </a:prstGeom>
-          <a:ln w="42000">
-            <a:solidFill>
-              <a:srgbClr val="8BC20F"/>
-            </a:solidFill>
-            <a:tailEnd type="triangle"/>
-          </a:ln>
-        </p:spPr>
-      </p:cxnSp>
-      <p:sp>
-        <p:nvSpPr>
-          <p:cNvPr id="20" name="Bank"/>
-          <p:cNvSpPr txBox="1"/>
-          <p:nvPr/>
-        </p:nvSpPr>
-        <p:spPr>
-          <a:xfrm>
-            <a:off x="6400800" y="2971800"/>
-            <a:ext cx="4297680" cy="1325880"/>
-          </a:xfrm>
-          <a:prstGeom prst="rect">
-            <a:avLst/>
-          </a:prstGeom>
-          <a:solidFill>
-            <a:srgbClr val="FFFFFF"/>
-          </a:solidFill>
-          <a:ln w="12700">
-            <a:solidFill>
-              <a:srgbClr val="C8CDD2"/>
-            </a:solidFill>
-          </a:ln>
-        </p:spPr>
-        <p:txBody>
-          <a:bodyPr wrap="square" lIns="73152" tIns="73152" rIns="73152" bIns="73152">
-            <a:spAutoFit/>
-          </a:bodyPr>
-          <a:lstStyle/>
-          <a:p>
-            <a:pPr algn="c"/>
-            <a:r>
-              <a:rPr lang="zh-CN" sz="2300" b="1">
-                <a:solidFill>
-                  <a:srgbClr val="111827"/>
-                </a:solidFill>
-                <a:latin typeface="Microsoft YaHei"/>
-                <a:ea typeface="Microsoft YaHei"/>
-              </a:rPr>
-              <a:t>生成注册模型</a:t>
-            </a:r>
-          </a:p>
-          <a:p>
-            <a:pPr algn="c"/>
-            <a:r>
-              <a:rPr lang="zh-CN" sz="1700">
-                <a:solidFill>
-                  <a:srgbClr val="475569"/>
-                </a:solidFill>
-                <a:latin typeface="Microsoft YaHei"/>
-                <a:ea typeface="Microsoft YaHei"/>
-              </a:rPr>
-              <a:t>ok_proto / ng_proto：OK、NG 的中心特征</a:t>
-            </a:r>
-          </a:p>
-          <a:p>
-            <a:pPr algn="c"/>
-            <a:r>
-              <a:rPr lang="zh-CN" sz="1700">
-                <a:solidFill>
-                  <a:srgbClr val="475569"/>
-                </a:solidFill>
-                <a:latin typeface="Microsoft YaHei"/>
-                <a:ea typeface="Microsoft YaHei"/>
-              </a:rPr>
-              <a:t>ok_bank / ng_bank：OK、NG 样本特征库</a:t>
-            </a:r>
-          </a:p>
-        </p:txBody>
-      </p:sp>
-      <p:sp>
-        <p:nvSpPr>
-          <p:cNvPr id="21" name="Image card"/>
-          <p:cNvSpPr/>
-          <p:nvPr/>
-        </p:nvSpPr>
-        <p:spPr>
-          <a:xfrm>
-            <a:off x="731520" y="2880360"/>
-            <a:ext cx="4480560" cy="2057400"/>
-          </a:xfrm>
-          <a:prstGeom prst="roundRect">
-            <a:avLst/>
-          </a:prstGeom>
-          <a:solidFill>
-            <a:srgbClr val="FFFFFF"/>
-          </a:solidFill>
-          <a:ln w="12700">
-            <a:solidFill>
-              <a:srgbClr val="A7A7A7"/>
-            </a:solidFill>
-          </a:ln>
-        </p:spPr>
-      </p:sp>
-      <p:sp>
-        <p:nvSpPr>
-          <p:cNvPr id="22" name="Image title"/>
-          <p:cNvSpPr txBox="1"/>
-          <p:nvPr/>
-        </p:nvSpPr>
-        <p:spPr>
-          <a:xfrm>
-            <a:off x="777240" y="4590288"/>
-            <a:ext cx="4389120" cy="274320"/>
-          </a:xfrm>
-          <a:prstGeom prst="rect">
-            <a:avLst/>
-          </a:prstGeom>
-          <a:noFill/>
-          <a:ln>
-            <a:noFill/>
-          </a:ln>
-        </p:spPr>
-        <p:txBody>
-          <a:bodyPr wrap="square" lIns="9144" tIns="9144" rIns="9144" bIns="9144">
-            <a:spAutoFit/>
-          </a:bodyPr>
-          <a:lstStyle/>
-          <a:p>
-            <a:pPr algn="c"/>
-            <a:r>
-              <a:rPr lang="zh-CN" sz="1400" b="1">
-                <a:solidFill>
-                  <a:srgbClr val="009CA6"/>
-                </a:solidFill>
-                <a:latin typeface="Microsoft YaHei"/>
-                <a:ea typeface="Microsoft YaHei"/>
-              </a:rPr>
-              <a:t>OK/NG 特征在空间中分开</a:t>
-            </a:r>
-          </a:p>
-        </p:txBody>
-      </p:sp>
-      <p:pic>
-        <p:nvPicPr>
-          <p:cNvPr id="23" name="OK/NG 特征在空间中分开"/>
-          <p:cNvPicPr>
-            <a:picLocks noChangeAspect="1"/>
-          </p:cNvPicPr>
-          <p:nvPr/>
-        </p:nvPicPr>
-        <p:blipFill>
-          <a:blip r:embed="rId3"/>
-          <a:stretch>
-            <a:fillRect/>
-          </a:stretch>
-        </p:blipFill>
-        <p:spPr>
-          <a:xfrm>
-            <a:off x="2090296" y="3044952"/>
-            <a:ext cx="1763008" cy="1463040"/>
-          </a:xfrm>
-          <a:prstGeom prst="rect">
-            <a:avLst/>
-          </a:prstGeom>
-          <a:ln w="6350">
-            <a:solidFill>
-              <a:srgbClr val="D1D5DB"/>
-            </a:solidFill>
-          </a:ln>
-        </p:spPr>
-      </p:pic>
       <p:sp>
         <p:nvSpPr>
           <p:cNvPr id="24" name="Training note"/>
@@ -3796,17 +4351,24 @@
           </a:bodyPr>
           <a:lstStyle/>
           <a:p>
-            <a:pPr algn="c"/>
+            <a:pPr algn="l"/>
             <a:r>
               <a:rPr lang="zh-CN" sz="1800" b="1">
                 <a:solidFill>
                   <a:srgbClr val="111827"/>
                 </a:solidFill>
-                <a:latin typeface="Microsoft YaHei"/>
-                <a:ea typeface="Microsoft YaHei"/>
+                <a:latin typeface="微软雅黑" panose="020B0503020204020204" charset="-122"/>
+                <a:ea typeface="微软雅黑" panose="020B0503020204020204" charset="-122"/>
               </a:rPr>
               <a:t>训练不是重新训练 CNN，而是把当前产品的 OK/NG 样本压缩成特征库；所以小样本、速度快、易换型。</a:t>
             </a:r>
+            <a:endParaRPr lang="zh-CN" sz="1800" b="1">
+              <a:solidFill>
+                <a:srgbClr val="111827"/>
+              </a:solidFill>
+              <a:latin typeface="微软雅黑" panose="020B0503020204020204" charset="-122"/>
+              <a:ea typeface="微软雅黑" panose="020B0503020204020204" charset="-122"/>
+            </a:endParaRPr>
           </a:p>
         </p:txBody>
       </p:sp>
@@ -3837,7 +4399,7 @@
       </p:grpSpPr>
       <p:sp>
         <p:nvSpPr>
-          <p:cNvPr id="1" name="Background"/>
+          <p:cNvPr id="2" name="Background"/>
           <p:cNvSpPr/>
           <p:nvPr/>
         </p:nvSpPr>
@@ -3859,7 +4421,7 @@
       </p:sp>
       <p:sp>
         <p:nvSpPr>
-          <p:cNvPr id="2" name="Left accent"/>
+          <p:cNvPr id="3" name="Left accent"/>
           <p:cNvSpPr/>
           <p:nvPr/>
         </p:nvSpPr>
@@ -3881,7 +4443,7 @@
       </p:sp>
       <p:sp>
         <p:nvSpPr>
-          <p:cNvPr id="3" name="Title"/>
+          <p:cNvPr id="4" name="Title"/>
           <p:cNvSpPr txBox="1"/>
           <p:nvPr/>
         </p:nvSpPr>
@@ -3910,17 +4472,24 @@
                 <a:solidFill>
                   <a:srgbClr val="111827"/>
                 </a:solidFill>
-                <a:latin typeface="Microsoft YaHei"/>
-                <a:ea typeface="Microsoft YaHei"/>
+                <a:latin typeface="微软雅黑" panose="020B0503020204020204" charset="-122"/>
+                <a:ea typeface="微软雅黑" panose="020B0503020204020204" charset="-122"/>
               </a:rPr>
               <a:t>算法原理图：检测阶段</a:t>
             </a:r>
-          </a:p>
-        </p:txBody>
-      </p:sp>
-      <p:sp>
-        <p:nvSpPr>
-          <p:cNvPr id="4" name="Bottom teal dot"/>
+            <a:endParaRPr lang="zh-CN" sz="2400" b="1">
+              <a:solidFill>
+                <a:srgbClr val="111827"/>
+              </a:solidFill>
+              <a:latin typeface="微软雅黑" panose="020B0503020204020204" charset="-122"/>
+              <a:ea typeface="微软雅黑" panose="020B0503020204020204" charset="-122"/>
+            </a:endParaRPr>
+          </a:p>
+        </p:txBody>
+      </p:sp>
+      <p:sp>
+        <p:nvSpPr>
+          <p:cNvPr id="5" name="Bottom teal dot"/>
           <p:cNvSpPr/>
           <p:nvPr/>
         </p:nvSpPr>
@@ -3942,7 +4511,7 @@
       </p:sp>
       <p:sp>
         <p:nvSpPr>
-          <p:cNvPr id="5" name="Bottom teal dot 2"/>
+          <p:cNvPr id="6" name="Bottom teal dot 2"/>
           <p:cNvSpPr/>
           <p:nvPr/>
         </p:nvSpPr>
@@ -3964,7 +4533,7 @@
       </p:sp>
       <p:sp>
         <p:nvSpPr>
-          <p:cNvPr id="6" name="Bottom pill"/>
+          <p:cNvPr id="7" name="Bottom pill"/>
           <p:cNvSpPr/>
           <p:nvPr/>
         </p:nvSpPr>
@@ -3986,7 +4555,7 @@
       </p:sp>
       <p:sp>
         <p:nvSpPr>
-          <p:cNvPr id="7" name="Bottom teal dot 3"/>
+          <p:cNvPr id="8" name="Bottom teal dot 3"/>
           <p:cNvSpPr/>
           <p:nvPr/>
         </p:nvSpPr>
@@ -4008,7 +4577,7 @@
       </p:sp>
       <p:sp>
         <p:nvSpPr>
-          <p:cNvPr id="8" name="Bottom teal dot 4"/>
+          <p:cNvPr id="9" name="Bottom teal dot 4"/>
           <p:cNvSpPr/>
           <p:nvPr/>
         </p:nvSpPr>
@@ -4077,17 +4646,24 @@
           </a:bodyPr>
           <a:lstStyle/>
           <a:p>
-            <a:pPr algn="c"/>
+            <a:pPr algn="l"/>
             <a:r>
               <a:rPr lang="zh-CN" sz="1400" b="1">
                 <a:solidFill>
                   <a:srgbClr val="009CA6"/>
                 </a:solidFill>
-                <a:latin typeface="Microsoft YaHei"/>
-                <a:ea typeface="Microsoft YaHei"/>
+                <a:latin typeface="微软雅黑" panose="020B0503020204020204" charset="-122"/>
+                <a:ea typeface="微软雅黑" panose="020B0503020204020204" charset="-122"/>
               </a:rPr>
               <a:t>待检测图 + ROI</a:t>
             </a:r>
+            <a:endParaRPr lang="zh-CN" sz="1400" b="1">
+              <a:solidFill>
+                <a:srgbClr val="009CA6"/>
+              </a:solidFill>
+              <a:latin typeface="微软雅黑" panose="020B0503020204020204" charset="-122"/>
+              <a:ea typeface="微软雅黑" panose="020B0503020204020204" charset="-122"/>
+            </a:endParaRPr>
           </a:p>
         </p:txBody>
       </p:sp>
@@ -4100,7 +4676,7 @@
           <p:nvPr/>
         </p:nvPicPr>
         <p:blipFill>
-          <a:blip r:embed="rId2"/>
+          <a:blip r:embed="rId1"/>
           <a:stretch>
             <a:fillRect/>
           </a:stretch>
@@ -4169,30 +4745,44 @@
           </a:bodyPr>
           <a:lstStyle/>
           <a:p>
-            <a:pPr algn="c"/>
+            <a:pPr algn="l"/>
             <a:r>
               <a:rPr lang="zh-CN" sz="2200" b="1">
                 <a:solidFill>
                   <a:srgbClr val="FFFFFF"/>
                 </a:solidFill>
-                <a:latin typeface="Microsoft YaHei"/>
-                <a:ea typeface="Microsoft YaHei"/>
+                <a:latin typeface="微软雅黑" panose="020B0503020204020204" charset="-122"/>
+                <a:ea typeface="微软雅黑" panose="020B0503020204020204" charset="-122"/>
               </a:rPr>
               <a:t>同一个 CNN</a:t>
             </a:r>
-          </a:p>
-          <a:p>
-            <a:pPr algn="c"/>
+            <a:endParaRPr lang="zh-CN" sz="2200" b="1">
+              <a:solidFill>
+                <a:srgbClr val="FFFFFF"/>
+              </a:solidFill>
+              <a:latin typeface="微软雅黑" panose="020B0503020204020204" charset="-122"/>
+              <a:ea typeface="微软雅黑" panose="020B0503020204020204" charset="-122"/>
+            </a:endParaRPr>
+          </a:p>
+          <a:p>
+            <a:pPr algn="l"/>
             <a:r>
               <a:rPr lang="zh-CN" sz="1500">
                 <a:solidFill>
                   <a:srgbClr val="FFFFFF"/>
                 </a:solidFill>
-                <a:latin typeface="Microsoft YaHei"/>
-                <a:ea typeface="Microsoft YaHei"/>
+                <a:latin typeface="微软雅黑" panose="020B0503020204020204" charset="-122"/>
+                <a:ea typeface="微软雅黑" panose="020B0503020204020204" charset="-122"/>
               </a:rPr>
               <a:t>输出当前 ROI 的 e 向量</a:t>
             </a:r>
+            <a:endParaRPr lang="zh-CN" sz="1500">
+              <a:solidFill>
+                <a:srgbClr val="FFFFFF"/>
+              </a:solidFill>
+              <a:latin typeface="微软雅黑" panose="020B0503020204020204" charset="-122"/>
+              <a:ea typeface="微软雅黑" panose="020B0503020204020204" charset="-122"/>
+            </a:endParaRPr>
           </a:p>
         </p:txBody>
       </p:sp>
@@ -4247,56 +4837,84 @@
           </a:bodyPr>
           <a:lstStyle/>
           <a:p>
-            <a:pPr algn="c"/>
+            <a:pPr algn="l"/>
             <a:r>
               <a:rPr lang="zh-CN" sz="2400" b="1">
                 <a:solidFill>
                   <a:srgbClr val="111827"/>
                 </a:solidFill>
-                <a:latin typeface="Microsoft YaHei"/>
-                <a:ea typeface="Microsoft YaHei"/>
+                <a:latin typeface="微软雅黑" panose="020B0503020204020204" charset="-122"/>
+                <a:ea typeface="微软雅黑" panose="020B0503020204020204" charset="-122"/>
               </a:rPr>
               <a:t>相似度比较</a:t>
             </a:r>
-          </a:p>
-          <a:p>
-            <a:pPr algn="c"/>
+            <a:endParaRPr lang="zh-CN" sz="2400" b="1">
+              <a:solidFill>
+                <a:srgbClr val="111827"/>
+              </a:solidFill>
+              <a:latin typeface="微软雅黑" panose="020B0503020204020204" charset="-122"/>
+              <a:ea typeface="微软雅黑" panose="020B0503020204020204" charset="-122"/>
+            </a:endParaRPr>
+          </a:p>
+          <a:p>
+            <a:pPr algn="l"/>
             <a:r>
               <a:rPr lang="zh-CN" sz="1800">
                 <a:solidFill>
                   <a:srgbClr val="475569"/>
                 </a:solidFill>
-                <a:latin typeface="Microsoft YaHei"/>
-                <a:ea typeface="Microsoft YaHei"/>
+                <a:latin typeface="微软雅黑" panose="020B0503020204020204" charset="-122"/>
+                <a:ea typeface="微软雅黑" panose="020B0503020204020204" charset="-122"/>
               </a:rPr>
               <a:t>simOK = e · ok_proto</a:t>
             </a:r>
-          </a:p>
-          <a:p>
-            <a:pPr algn="c"/>
+            <a:endParaRPr lang="zh-CN" sz="1800">
+              <a:solidFill>
+                <a:srgbClr val="475569"/>
+              </a:solidFill>
+              <a:latin typeface="微软雅黑" panose="020B0503020204020204" charset="-122"/>
+              <a:ea typeface="微软雅黑" panose="020B0503020204020204" charset="-122"/>
+            </a:endParaRPr>
+          </a:p>
+          <a:p>
+            <a:pPr algn="l"/>
             <a:r>
               <a:rPr lang="zh-CN" sz="1800">
                 <a:solidFill>
                   <a:srgbClr val="475569"/>
                 </a:solidFill>
-                <a:latin typeface="Microsoft YaHei"/>
-                <a:ea typeface="Microsoft YaHei"/>
+                <a:latin typeface="微软雅黑" panose="020B0503020204020204" charset="-122"/>
+                <a:ea typeface="微软雅黑" panose="020B0503020204020204" charset="-122"/>
               </a:rPr>
               <a:t>simNG = e · ng_proto</a:t>
             </a:r>
-          </a:p>
-          <a:p>
-            <a:pPr algn="c"/>
+            <a:endParaRPr lang="zh-CN" sz="1800">
+              <a:solidFill>
+                <a:srgbClr val="475569"/>
+              </a:solidFill>
+              <a:latin typeface="微软雅黑" panose="020B0503020204020204" charset="-122"/>
+              <a:ea typeface="微软雅黑" panose="020B0503020204020204" charset="-122"/>
+            </a:endParaRPr>
+          </a:p>
+          <a:p>
+            <a:pPr algn="l"/>
             <a:r>
               <a:rPr lang="zh-CN" sz="1900" b="1">
                 <a:solidFill>
                   <a:srgbClr val="009CA6"/>
                 </a:solidFill>
-                <a:latin typeface="Microsoft YaHei"/>
-                <a:ea typeface="Microsoft YaHei"/>
+                <a:latin typeface="微软雅黑" panose="020B0503020204020204" charset="-122"/>
+                <a:ea typeface="微软雅黑" panose="020B0503020204020204" charset="-122"/>
               </a:rPr>
               <a:t>diff = simOK - simNG</a:t>
             </a:r>
+            <a:endParaRPr lang="zh-CN" sz="1900" b="1">
+              <a:solidFill>
+                <a:srgbClr val="009CA6"/>
+              </a:solidFill>
+              <a:latin typeface="微软雅黑" panose="020B0503020204020204" charset="-122"/>
+              <a:ea typeface="微软雅黑" panose="020B0503020204020204" charset="-122"/>
+            </a:endParaRPr>
           </a:p>
         </p:txBody>
       </p:sp>
@@ -4327,30 +4945,44 @@
           </a:bodyPr>
           <a:lstStyle/>
           <a:p>
-            <a:pPr algn="c"/>
+            <a:pPr algn="l"/>
             <a:r>
               <a:rPr lang="zh-CN" sz="2400" b="1">
                 <a:solidFill>
                   <a:srgbClr val="FFFFFF"/>
                 </a:solidFill>
-                <a:latin typeface="Microsoft YaHei"/>
-                <a:ea typeface="Microsoft YaHei"/>
+                <a:latin typeface="微软雅黑" panose="020B0503020204020204" charset="-122"/>
+                <a:ea typeface="微软雅黑" panose="020B0503020204020204" charset="-122"/>
               </a:rPr>
               <a:t>判定规则</a:t>
             </a:r>
-          </a:p>
-          <a:p>
-            <a:pPr algn="c"/>
+            <a:endParaRPr lang="zh-CN" sz="2400" b="1">
+              <a:solidFill>
+                <a:srgbClr val="FFFFFF"/>
+              </a:solidFill>
+              <a:latin typeface="微软雅黑" panose="020B0503020204020204" charset="-122"/>
+              <a:ea typeface="微软雅黑" panose="020B0503020204020204" charset="-122"/>
+            </a:endParaRPr>
+          </a:p>
+          <a:p>
+            <a:pPr algn="l"/>
             <a:r>
               <a:rPr lang="zh-CN" sz="2000" b="1">
                 <a:solidFill>
                   <a:srgbClr val="FFFFFF"/>
                 </a:solidFill>
-                <a:latin typeface="Microsoft YaHei"/>
-                <a:ea typeface="Microsoft YaHei"/>
+                <a:latin typeface="微软雅黑" panose="020B0503020204020204" charset="-122"/>
+                <a:ea typeface="微软雅黑" panose="020B0503020204020204" charset="-122"/>
               </a:rPr>
               <a:t>diff &gt;= margin  判 OK；否则判 NG</a:t>
             </a:r>
+            <a:endParaRPr lang="zh-CN" sz="2000" b="1">
+              <a:solidFill>
+                <a:srgbClr val="FFFFFF"/>
+              </a:solidFill>
+              <a:latin typeface="微软雅黑" panose="020B0503020204020204" charset="-122"/>
+              <a:ea typeface="微软雅黑" panose="020B0503020204020204" charset="-122"/>
+            </a:endParaRPr>
           </a:p>
         </p:txBody>
       </p:sp>
@@ -4389,11 +5021,18 @@
                 <a:solidFill>
                   <a:srgbClr val="111827"/>
                 </a:solidFill>
-                <a:latin typeface="Microsoft YaHei"/>
-                <a:ea typeface="Microsoft YaHei"/>
+                <a:latin typeface="微软雅黑" panose="020B0503020204020204" charset="-122"/>
+                <a:ea typeface="微软雅黑" panose="020B0503020204020204" charset="-122"/>
               </a:rPr>
               <a:t>Top-K 模式</a:t>
             </a:r>
+            <a:endParaRPr lang="zh-CN" sz="2300" b="1">
+              <a:solidFill>
+                <a:srgbClr val="111827"/>
+              </a:solidFill>
+              <a:latin typeface="微软雅黑" panose="020B0503020204020204" charset="-122"/>
+              <a:ea typeface="微软雅黑" panose="020B0503020204020204" charset="-122"/>
+            </a:endParaRPr>
           </a:p>
           <a:p>
             <a:pPr algn="l"/>
@@ -4402,11 +5041,18 @@
                 <a:solidFill>
                   <a:srgbClr val="475569"/>
                 </a:solidFill>
-                <a:latin typeface="Microsoft YaHei"/>
-                <a:ea typeface="Microsoft YaHei"/>
+                <a:latin typeface="微软雅黑" panose="020B0503020204020204" charset="-122"/>
+                <a:ea typeface="微软雅黑" panose="020B0503020204020204" charset="-122"/>
               </a:rPr>
               <a:t>如果样本分布不是一个中心能代表，就取最像的 k 个 OK/NG 样本均值，减少单个异常样本影响。</a:t>
             </a:r>
+            <a:endParaRPr lang="zh-CN" sz="1800">
+              <a:solidFill>
+                <a:srgbClr val="475569"/>
+              </a:solidFill>
+              <a:latin typeface="微软雅黑" panose="020B0503020204020204" charset="-122"/>
+              <a:ea typeface="微软雅黑" panose="020B0503020204020204" charset="-122"/>
+            </a:endParaRPr>
           </a:p>
         </p:txBody>
       </p:sp>
@@ -4437,7 +5083,7 @@
       </p:grpSpPr>
       <p:sp>
         <p:nvSpPr>
-          <p:cNvPr id="1" name="Background"/>
+          <p:cNvPr id="2" name="Background"/>
           <p:cNvSpPr/>
           <p:nvPr/>
         </p:nvSpPr>
@@ -4459,7 +5105,7 @@
       </p:sp>
       <p:sp>
         <p:nvSpPr>
-          <p:cNvPr id="2" name="Left accent"/>
+          <p:cNvPr id="3" name="Left accent"/>
           <p:cNvSpPr/>
           <p:nvPr/>
         </p:nvSpPr>
@@ -4481,7 +5127,7 @@
       </p:sp>
       <p:sp>
         <p:nvSpPr>
-          <p:cNvPr id="3" name="Title"/>
+          <p:cNvPr id="4" name="Title"/>
           <p:cNvSpPr txBox="1"/>
           <p:nvPr/>
         </p:nvSpPr>
@@ -4510,17 +5156,24 @@
                 <a:solidFill>
                   <a:srgbClr val="111827"/>
                 </a:solidFill>
-                <a:latin typeface="Microsoft YaHei"/>
-                <a:ea typeface="Microsoft YaHei"/>
+                <a:latin typeface="微软雅黑" panose="020B0503020204020204" charset="-122"/>
+                <a:ea typeface="微软雅黑" panose="020B0503020204020204" charset="-122"/>
               </a:rPr>
               <a:t>为什么要丢弃头部：保留特征，丢掉 ImageNet 分类器</a:t>
             </a:r>
-          </a:p>
-        </p:txBody>
-      </p:sp>
-      <p:sp>
-        <p:nvSpPr>
-          <p:cNvPr id="4" name="Bottom teal dot"/>
+            <a:endParaRPr lang="zh-CN" sz="2400" b="1">
+              <a:solidFill>
+                <a:srgbClr val="111827"/>
+              </a:solidFill>
+              <a:latin typeface="微软雅黑" panose="020B0503020204020204" charset="-122"/>
+              <a:ea typeface="微软雅黑" panose="020B0503020204020204" charset="-122"/>
+            </a:endParaRPr>
+          </a:p>
+        </p:txBody>
+      </p:sp>
+      <p:sp>
+        <p:nvSpPr>
+          <p:cNvPr id="5" name="Bottom teal dot"/>
           <p:cNvSpPr/>
           <p:nvPr/>
         </p:nvSpPr>
@@ -4542,7 +5195,7 @@
       </p:sp>
       <p:sp>
         <p:nvSpPr>
-          <p:cNvPr id="5" name="Bottom teal dot 2"/>
+          <p:cNvPr id="6" name="Bottom teal dot 2"/>
           <p:cNvSpPr/>
           <p:nvPr/>
         </p:nvSpPr>
@@ -4564,7 +5217,7 @@
       </p:sp>
       <p:sp>
         <p:nvSpPr>
-          <p:cNvPr id="6" name="Bottom pill"/>
+          <p:cNvPr id="7" name="Bottom pill"/>
           <p:cNvSpPr/>
           <p:nvPr/>
         </p:nvSpPr>
@@ -4586,7 +5239,7 @@
       </p:sp>
       <p:sp>
         <p:nvSpPr>
-          <p:cNvPr id="7" name="Bottom teal dot 3"/>
+          <p:cNvPr id="8" name="Bottom teal dot 3"/>
           <p:cNvSpPr/>
           <p:nvPr/>
         </p:nvSpPr>
@@ -4608,7 +5261,7 @@
       </p:sp>
       <p:sp>
         <p:nvSpPr>
-          <p:cNvPr id="8" name="Bottom teal dot 4"/>
+          <p:cNvPr id="9" name="Bottom teal dot 4"/>
           <p:cNvSpPr/>
           <p:nvPr/>
         </p:nvSpPr>
@@ -4657,30 +5310,44 @@
           </a:bodyPr>
           <a:lstStyle/>
           <a:p>
-            <a:pPr algn="c"/>
+            <a:pPr algn="l"/>
             <a:r>
               <a:rPr lang="zh-CN" sz="2000" b="1">
                 <a:solidFill>
                   <a:srgbClr val="111827"/>
                 </a:solidFill>
-                <a:latin typeface="Microsoft YaHei"/>
-                <a:ea typeface="Microsoft YaHei"/>
+                <a:latin typeface="微软雅黑" panose="020B0503020204020204" charset="-122"/>
+                <a:ea typeface="微软雅黑" panose="020B0503020204020204" charset="-122"/>
               </a:rPr>
               <a:t>ROI 图像</a:t>
             </a:r>
-          </a:p>
-          <a:p>
-            <a:pPr algn="c"/>
+            <a:endParaRPr lang="zh-CN" sz="2000" b="1">
+              <a:solidFill>
+                <a:srgbClr val="111827"/>
+              </a:solidFill>
+              <a:latin typeface="微软雅黑" panose="020B0503020204020204" charset="-122"/>
+              <a:ea typeface="微软雅黑" panose="020B0503020204020204" charset="-122"/>
+            </a:endParaRPr>
+          </a:p>
+          <a:p>
+            <a:pPr algn="l"/>
             <a:r>
               <a:rPr lang="zh-CN" sz="1400">
                 <a:solidFill>
                   <a:srgbClr val="475569"/>
                 </a:solidFill>
-                <a:latin typeface="Microsoft YaHei"/>
-                <a:ea typeface="Microsoft YaHei"/>
+                <a:latin typeface="微软雅黑" panose="020B0503020204020204" charset="-122"/>
+                <a:ea typeface="微软雅黑" panose="020B0503020204020204" charset="-122"/>
               </a:rPr>
               <a:t>224×224</a:t>
             </a:r>
+            <a:endParaRPr lang="zh-CN" sz="1400">
+              <a:solidFill>
+                <a:srgbClr val="475569"/>
+              </a:solidFill>
+              <a:latin typeface="微软雅黑" panose="020B0503020204020204" charset="-122"/>
+              <a:ea typeface="微软雅黑" panose="020B0503020204020204" charset="-122"/>
+            </a:endParaRPr>
           </a:p>
         </p:txBody>
       </p:sp>
@@ -4733,30 +5400,44 @@
           </a:bodyPr>
           <a:lstStyle/>
           <a:p>
-            <a:pPr algn="c"/>
+            <a:pPr algn="l"/>
             <a:r>
               <a:rPr lang="zh-CN" sz="2100" b="1">
                 <a:solidFill>
                   <a:srgbClr val="FFFFFF"/>
                 </a:solidFill>
-                <a:latin typeface="Microsoft YaHei"/>
-                <a:ea typeface="Microsoft YaHei"/>
+                <a:latin typeface="微软雅黑" panose="020B0503020204020204" charset="-122"/>
+                <a:ea typeface="微软雅黑" panose="020B0503020204020204" charset="-122"/>
               </a:rPr>
               <a:t>CNN features</a:t>
             </a:r>
-          </a:p>
-          <a:p>
-            <a:pPr algn="c"/>
+            <a:endParaRPr lang="zh-CN" sz="2100" b="1">
+              <a:solidFill>
+                <a:srgbClr val="FFFFFF"/>
+              </a:solidFill>
+              <a:latin typeface="微软雅黑" panose="020B0503020204020204" charset="-122"/>
+              <a:ea typeface="微软雅黑" panose="020B0503020204020204" charset="-122"/>
+            </a:endParaRPr>
+          </a:p>
+          <a:p>
+            <a:pPr algn="l"/>
             <a:r>
               <a:rPr lang="zh-CN" sz="1400">
                 <a:solidFill>
                   <a:srgbClr val="FFFFFF"/>
                 </a:solidFill>
-                <a:latin typeface="Microsoft YaHei"/>
-                <a:ea typeface="Microsoft YaHei"/>
+                <a:latin typeface="微软雅黑" panose="020B0503020204020204" charset="-122"/>
+                <a:ea typeface="微软雅黑" panose="020B0503020204020204" charset="-122"/>
               </a:rPr>
               <a:t>边缘 / 纹理 / 形状</a:t>
             </a:r>
+            <a:endParaRPr lang="zh-CN" sz="1400">
+              <a:solidFill>
+                <a:srgbClr val="FFFFFF"/>
+              </a:solidFill>
+              <a:latin typeface="微软雅黑" panose="020B0503020204020204" charset="-122"/>
+              <a:ea typeface="微软雅黑" panose="020B0503020204020204" charset="-122"/>
+            </a:endParaRPr>
           </a:p>
         </p:txBody>
       </p:sp>
@@ -4809,30 +5490,44 @@
           </a:bodyPr>
           <a:lstStyle/>
           <a:p>
-            <a:pPr algn="c"/>
+            <a:pPr algn="l"/>
             <a:r>
               <a:rPr lang="zh-CN" sz="2000" b="1">
                 <a:solidFill>
                   <a:srgbClr val="FFFFFF"/>
                 </a:solidFill>
-                <a:latin typeface="Microsoft YaHei"/>
-                <a:ea typeface="Microsoft YaHei"/>
+                <a:latin typeface="微软雅黑" panose="020B0503020204020204" charset="-122"/>
+                <a:ea typeface="微软雅黑" panose="020B0503020204020204" charset="-122"/>
               </a:rPr>
               <a:t>分类头 Head</a:t>
             </a:r>
-          </a:p>
-          <a:p>
-            <a:pPr algn="c"/>
+            <a:endParaRPr lang="zh-CN" sz="2000" b="1">
+              <a:solidFill>
+                <a:srgbClr val="FFFFFF"/>
+              </a:solidFill>
+              <a:latin typeface="微软雅黑" panose="020B0503020204020204" charset="-122"/>
+              <a:ea typeface="微软雅黑" panose="020B0503020204020204" charset="-122"/>
+            </a:endParaRPr>
+          </a:p>
+          <a:p>
+            <a:pPr algn="l"/>
             <a:r>
               <a:rPr lang="zh-CN" sz="1400">
                 <a:solidFill>
                   <a:srgbClr val="FFFFFF"/>
                 </a:solidFill>
-                <a:latin typeface="Microsoft YaHei"/>
-                <a:ea typeface="Microsoft YaHei"/>
+                <a:latin typeface="微软雅黑" panose="020B0503020204020204" charset="-122"/>
+                <a:ea typeface="微软雅黑" panose="020B0503020204020204" charset="-122"/>
               </a:rPr>
               <a:t>ImageNet 1000 类</a:t>
             </a:r>
+            <a:endParaRPr lang="zh-CN" sz="1400">
+              <a:solidFill>
+                <a:srgbClr val="FFFFFF"/>
+              </a:solidFill>
+              <a:latin typeface="微软雅黑" panose="020B0503020204020204" charset="-122"/>
+              <a:ea typeface="微软雅黑" panose="020B0503020204020204" charset="-122"/>
+            </a:endParaRPr>
           </a:p>
         </p:txBody>
       </p:sp>
@@ -4885,30 +5580,44 @@
           </a:bodyPr>
           <a:lstStyle/>
           <a:p>
-            <a:pPr algn="c"/>
+            <a:pPr algn="l"/>
             <a:r>
               <a:rPr lang="zh-CN" sz="2000" b="1">
                 <a:solidFill>
                   <a:srgbClr val="FFFFFF"/>
                 </a:solidFill>
-                <a:latin typeface="Microsoft YaHei"/>
-                <a:ea typeface="Microsoft YaHei"/>
+                <a:latin typeface="微软雅黑" panose="020B0503020204020204" charset="-122"/>
+                <a:ea typeface="微软雅黑" panose="020B0503020204020204" charset="-122"/>
               </a:rPr>
               <a:t>全局池化 + L2 归一化</a:t>
             </a:r>
-          </a:p>
-          <a:p>
-            <a:pPr algn="c"/>
+            <a:endParaRPr lang="zh-CN" sz="2000" b="1">
+              <a:solidFill>
+                <a:srgbClr val="FFFFFF"/>
+              </a:solidFill>
+              <a:latin typeface="微软雅黑" panose="020B0503020204020204" charset="-122"/>
+              <a:ea typeface="微软雅黑" panose="020B0503020204020204" charset="-122"/>
+            </a:endParaRPr>
+          </a:p>
+          <a:p>
+            <a:pPr algn="l"/>
             <a:r>
               <a:rPr lang="zh-CN" sz="1500">
                 <a:solidFill>
                   <a:srgbClr val="FFFFFF"/>
                 </a:solidFill>
-                <a:latin typeface="Microsoft YaHei"/>
-                <a:ea typeface="Microsoft YaHei"/>
+                <a:latin typeface="微软雅黑" panose="020B0503020204020204" charset="-122"/>
+                <a:ea typeface="微软雅黑" panose="020B0503020204020204" charset="-122"/>
               </a:rPr>
               <a:t>得到通用 embedding</a:t>
             </a:r>
+            <a:endParaRPr lang="zh-CN" sz="1500">
+              <a:solidFill>
+                <a:srgbClr val="FFFFFF"/>
+              </a:solidFill>
+              <a:latin typeface="微软雅黑" panose="020B0503020204020204" charset="-122"/>
+              <a:ea typeface="微软雅黑" panose="020B0503020204020204" charset="-122"/>
+            </a:endParaRPr>
           </a:p>
         </p:txBody>
       </p:sp>
@@ -4961,30 +5670,44 @@
           </a:bodyPr>
           <a:lstStyle/>
           <a:p>
-            <a:pPr algn="c"/>
+            <a:pPr algn="l"/>
             <a:r>
               <a:rPr lang="zh-CN" sz="2000" b="1">
                 <a:solidFill>
                   <a:srgbClr val="FFFFFF"/>
                 </a:solidFill>
-                <a:latin typeface="Microsoft YaHei"/>
-                <a:ea typeface="Microsoft YaHei"/>
+                <a:latin typeface="微软雅黑" panose="020B0503020204020204" charset="-122"/>
+                <a:ea typeface="微软雅黑" panose="020B0503020204020204" charset="-122"/>
               </a:rPr>
               <a:t>OK/NG 相似度</a:t>
             </a:r>
-          </a:p>
-          <a:p>
-            <a:pPr algn="c"/>
+            <a:endParaRPr lang="zh-CN" sz="2000" b="1">
+              <a:solidFill>
+                <a:srgbClr val="FFFFFF"/>
+              </a:solidFill>
+              <a:latin typeface="微软雅黑" panose="020B0503020204020204" charset="-122"/>
+              <a:ea typeface="微软雅黑" panose="020B0503020204020204" charset="-122"/>
+            </a:endParaRPr>
+          </a:p>
+          <a:p>
+            <a:pPr algn="l"/>
             <a:r>
               <a:rPr lang="zh-CN" sz="1500">
                 <a:solidFill>
                   <a:srgbClr val="FFFFFF"/>
                 </a:solidFill>
-                <a:latin typeface="Microsoft YaHei"/>
-                <a:ea typeface="Microsoft YaHei"/>
+                <a:latin typeface="微软雅黑" panose="020B0503020204020204" charset="-122"/>
+                <a:ea typeface="微软雅黑" panose="020B0503020204020204" charset="-122"/>
               </a:rPr>
               <a:t>适配当前产品</a:t>
             </a:r>
+            <a:endParaRPr lang="zh-CN" sz="1500">
+              <a:solidFill>
+                <a:srgbClr val="FFFFFF"/>
+              </a:solidFill>
+              <a:latin typeface="微软雅黑" panose="020B0503020204020204" charset="-122"/>
+              <a:ea typeface="微软雅黑" panose="020B0503020204020204" charset="-122"/>
+            </a:endParaRPr>
           </a:p>
         </p:txBody>
       </p:sp>
@@ -5023,15 +5746,22 @@
                 <a:solidFill>
                   <a:srgbClr val="111827"/>
                 </a:solidFill>
-                <a:latin typeface="Microsoft YaHei"/>
-                <a:ea typeface="Microsoft YaHei"/>
+                <a:latin typeface="微软雅黑" panose="020B0503020204020204" charset="-122"/>
+                <a:ea typeface="微软雅黑" panose="020B0503020204020204" charset="-122"/>
               </a:rPr>
               <a:t>丢弃头部的原因</a:t>
             </a:r>
-          </a:p>
-          <a:p>
-            <a:pPr marL="240000" indent="-140000">
-              <a:buFont typeface="Microsoft YaHei"/>
+            <a:endParaRPr lang="zh-CN" sz="2300" b="1">
+              <a:solidFill>
+                <a:srgbClr val="111827"/>
+              </a:solidFill>
+              <a:latin typeface="微软雅黑" panose="020B0503020204020204" charset="-122"/>
+              <a:ea typeface="微软雅黑" panose="020B0503020204020204" charset="-122"/>
+            </a:endParaRPr>
+          </a:p>
+          <a:p>
+            <a:pPr marL="240030" indent="-139700">
+              <a:buFont typeface="微软雅黑" panose="020B0503020204020204" charset="-122"/>
               <a:buChar char="▪"/>
             </a:pPr>
             <a:r>
@@ -5039,15 +5769,22 @@
                 <a:solidFill>
                   <a:srgbClr val="111827"/>
                 </a:solidFill>
-                <a:latin typeface="Microsoft YaHei"/>
-                <a:ea typeface="Microsoft YaHei"/>
+                <a:latin typeface="微软雅黑" panose="020B0503020204020204" charset="-122"/>
+                <a:ea typeface="微软雅黑" panose="020B0503020204020204" charset="-122"/>
               </a:rPr>
               <a:t>原分类头回答的是 ImageNet 类别，例如猫、狗、车，不回答“当前零件 OK/NG”。</a:t>
             </a:r>
-          </a:p>
-          <a:p>
-            <a:pPr marL="240000" indent="-140000">
-              <a:buFont typeface="Microsoft YaHei"/>
+            <a:endParaRPr lang="zh-CN" sz="1800">
+              <a:solidFill>
+                <a:srgbClr val="111827"/>
+              </a:solidFill>
+              <a:latin typeface="微软雅黑" panose="020B0503020204020204" charset="-122"/>
+              <a:ea typeface="微软雅黑" panose="020B0503020204020204" charset="-122"/>
+            </a:endParaRPr>
+          </a:p>
+          <a:p>
+            <a:pPr marL="240030" indent="-139700">
+              <a:buFont typeface="微软雅黑" panose="020B0503020204020204" charset="-122"/>
               <a:buChar char="▪"/>
             </a:pPr>
             <a:r>
@@ -5055,15 +5792,22 @@
                 <a:solidFill>
                   <a:srgbClr val="111827"/>
                 </a:solidFill>
-                <a:latin typeface="Microsoft YaHei"/>
-                <a:ea typeface="Microsoft YaHei"/>
+                <a:latin typeface="微软雅黑" panose="020B0503020204020204" charset="-122"/>
+                <a:ea typeface="微软雅黑" panose="020B0503020204020204" charset="-122"/>
               </a:rPr>
               <a:t>如果重新训练一个 OK/NG 头部，需要大量缺陷样本和训练流程；这不符合产线少样本快速学习。</a:t>
             </a:r>
-          </a:p>
-          <a:p>
-            <a:pPr marL="240000" indent="-140000">
-              <a:buFont typeface="Microsoft YaHei"/>
+            <a:endParaRPr lang="zh-CN" sz="1800">
+              <a:solidFill>
+                <a:srgbClr val="111827"/>
+              </a:solidFill>
+              <a:latin typeface="微软雅黑" panose="020B0503020204020204" charset="-122"/>
+              <a:ea typeface="微软雅黑" panose="020B0503020204020204" charset="-122"/>
+            </a:endParaRPr>
+          </a:p>
+          <a:p>
+            <a:pPr marL="240030" indent="-139700">
+              <a:buFont typeface="微软雅黑" panose="020B0503020204020204" charset="-122"/>
               <a:buChar char="▪"/>
             </a:pPr>
             <a:r>
@@ -5071,11 +5815,18 @@
                 <a:solidFill>
                   <a:srgbClr val="111827"/>
                 </a:solidFill>
-                <a:latin typeface="Microsoft YaHei"/>
-                <a:ea typeface="Microsoft YaHei"/>
+                <a:latin typeface="微软雅黑" panose="020B0503020204020204" charset="-122"/>
+                <a:ea typeface="微软雅黑" panose="020B0503020204020204" charset="-122"/>
               </a:rPr>
               <a:t>保留 features 可以利用预训练模型学到的通用视觉表示，再用相似度完成当前产品检测。</a:t>
             </a:r>
+            <a:endParaRPr lang="zh-CN" sz="1800">
+              <a:solidFill>
+                <a:srgbClr val="111827"/>
+              </a:solidFill>
+              <a:latin typeface="微软雅黑" panose="020B0503020204020204" charset="-122"/>
+              <a:ea typeface="微软雅黑" panose="020B0503020204020204" charset="-122"/>
+            </a:endParaRPr>
           </a:p>
         </p:txBody>
       </p:sp>
@@ -5108,17 +5859,24 @@
           </a:bodyPr>
           <a:lstStyle/>
           <a:p>
-            <a:pPr algn="c"/>
+            <a:pPr algn="l"/>
             <a:r>
               <a:rPr lang="zh-CN" sz="1400" b="1">
                 <a:solidFill>
                   <a:srgbClr val="DC2626"/>
                 </a:solidFill>
-                <a:latin typeface="Microsoft YaHei"/>
-                <a:ea typeface="Microsoft YaHei"/>
+                <a:latin typeface="微软雅黑" panose="020B0503020204020204" charset="-122"/>
+                <a:ea typeface="微软雅黑" panose="020B0503020204020204" charset="-122"/>
               </a:rPr>
               <a:t>丢弃</a:t>
             </a:r>
+            <a:endParaRPr lang="zh-CN" sz="1400" b="1">
+              <a:solidFill>
+                <a:srgbClr val="DC2626"/>
+              </a:solidFill>
+              <a:latin typeface="微软雅黑" panose="020B0503020204020204" charset="-122"/>
+              <a:ea typeface="微软雅黑" panose="020B0503020204020204" charset="-122"/>
+            </a:endParaRPr>
           </a:p>
         </p:txBody>
       </p:sp>
@@ -5149,7 +5907,7 @@
       </p:grpSpPr>
       <p:sp>
         <p:nvSpPr>
-          <p:cNvPr id="1" name="Background"/>
+          <p:cNvPr id="2" name="Background"/>
           <p:cNvSpPr/>
           <p:nvPr/>
         </p:nvSpPr>
@@ -5171,7 +5929,7 @@
       </p:sp>
       <p:sp>
         <p:nvSpPr>
-          <p:cNvPr id="2" name="Left accent"/>
+          <p:cNvPr id="3" name="Left accent"/>
           <p:cNvSpPr/>
           <p:nvPr/>
         </p:nvSpPr>
@@ -5193,7 +5951,7 @@
       </p:sp>
       <p:sp>
         <p:nvSpPr>
-          <p:cNvPr id="3" name="Title"/>
+          <p:cNvPr id="4" name="Title"/>
           <p:cNvSpPr txBox="1"/>
           <p:nvPr/>
         </p:nvSpPr>
@@ -5222,17 +5980,24 @@
                 <a:solidFill>
                   <a:srgbClr val="111827"/>
                 </a:solidFill>
-                <a:latin typeface="Microsoft YaHei"/>
-                <a:ea typeface="Microsoft YaHei"/>
+                <a:latin typeface="微软雅黑" panose="020B0503020204020204" charset="-122"/>
+                <a:ea typeface="微软雅黑" panose="020B0503020204020204" charset="-122"/>
               </a:rPr>
               <a:t>模型选择与层选择说明</a:t>
             </a:r>
-          </a:p>
-        </p:txBody>
-      </p:sp>
-      <p:sp>
-        <p:nvSpPr>
-          <p:cNvPr id="4" name="Bottom teal dot"/>
+            <a:endParaRPr lang="zh-CN" sz="2400" b="1">
+              <a:solidFill>
+                <a:srgbClr val="111827"/>
+              </a:solidFill>
+              <a:latin typeface="微软雅黑" panose="020B0503020204020204" charset="-122"/>
+              <a:ea typeface="微软雅黑" panose="020B0503020204020204" charset="-122"/>
+            </a:endParaRPr>
+          </a:p>
+        </p:txBody>
+      </p:sp>
+      <p:sp>
+        <p:nvSpPr>
+          <p:cNvPr id="5" name="Bottom teal dot"/>
           <p:cNvSpPr/>
           <p:nvPr/>
         </p:nvSpPr>
@@ -5254,7 +6019,7 @@
       </p:sp>
       <p:sp>
         <p:nvSpPr>
-          <p:cNvPr id="5" name="Bottom teal dot 2"/>
+          <p:cNvPr id="6" name="Bottom teal dot 2"/>
           <p:cNvSpPr/>
           <p:nvPr/>
         </p:nvSpPr>
@@ -5276,7 +6041,7 @@
       </p:sp>
       <p:sp>
         <p:nvSpPr>
-          <p:cNvPr id="6" name="Bottom pill"/>
+          <p:cNvPr id="7" name="Bottom pill"/>
           <p:cNvSpPr/>
           <p:nvPr/>
         </p:nvSpPr>
@@ -5298,7 +6063,7 @@
       </p:sp>
       <p:sp>
         <p:nvSpPr>
-          <p:cNvPr id="7" name="Bottom teal dot 3"/>
+          <p:cNvPr id="8" name="Bottom teal dot 3"/>
           <p:cNvSpPr/>
           <p:nvPr/>
         </p:nvSpPr>
@@ -5320,7 +6085,7 @@
       </p:sp>
       <p:sp>
         <p:nvSpPr>
-          <p:cNvPr id="8" name="Bottom teal dot 4"/>
+          <p:cNvPr id="9" name="Bottom teal dot 4"/>
           <p:cNvSpPr/>
           <p:nvPr/>
         </p:nvSpPr>
@@ -5369,17 +6134,24 @@
           </a:bodyPr>
           <a:lstStyle/>
           <a:p>
-            <a:pPr algn="c"/>
+            <a:pPr algn="l"/>
             <a:r>
               <a:rPr lang="zh-CN" sz="1500" b="1">
                 <a:solidFill>
                   <a:srgbClr val="FFFFFF"/>
                 </a:solidFill>
-                <a:latin typeface="Microsoft YaHei"/>
-                <a:ea typeface="Microsoft YaHei"/>
+                <a:latin typeface="微软雅黑" panose="020B0503020204020204" charset="-122"/>
+                <a:ea typeface="微软雅黑" panose="020B0503020204020204" charset="-122"/>
               </a:rPr>
               <a:t>模型</a:t>
             </a:r>
+            <a:endParaRPr lang="zh-CN" sz="1500" b="1">
+              <a:solidFill>
+                <a:srgbClr val="FFFFFF"/>
+              </a:solidFill>
+              <a:latin typeface="微软雅黑" panose="020B0503020204020204" charset="-122"/>
+              <a:ea typeface="微软雅黑" panose="020B0503020204020204" charset="-122"/>
+            </a:endParaRPr>
           </a:p>
         </p:txBody>
       </p:sp>
@@ -5412,17 +6184,24 @@
           </a:bodyPr>
           <a:lstStyle/>
           <a:p>
-            <a:pPr algn="c"/>
+            <a:pPr algn="l"/>
             <a:r>
               <a:rPr lang="zh-CN" sz="1500" b="1">
                 <a:solidFill>
                   <a:srgbClr val="FFFFFF"/>
                 </a:solidFill>
-                <a:latin typeface="Microsoft YaHei"/>
-                <a:ea typeface="Microsoft YaHei"/>
+                <a:latin typeface="微软雅黑" panose="020B0503020204020204" charset="-122"/>
+                <a:ea typeface="微软雅黑" panose="020B0503020204020204" charset="-122"/>
               </a:rPr>
               <a:t>维度</a:t>
             </a:r>
+            <a:endParaRPr lang="zh-CN" sz="1500" b="1">
+              <a:solidFill>
+                <a:srgbClr val="FFFFFF"/>
+              </a:solidFill>
+              <a:latin typeface="微软雅黑" panose="020B0503020204020204" charset="-122"/>
+              <a:ea typeface="微软雅黑" panose="020B0503020204020204" charset="-122"/>
+            </a:endParaRPr>
           </a:p>
         </p:txBody>
       </p:sp>
@@ -5455,17 +6234,24 @@
           </a:bodyPr>
           <a:lstStyle/>
           <a:p>
-            <a:pPr algn="c"/>
+            <a:pPr algn="l"/>
             <a:r>
               <a:rPr lang="zh-CN" sz="1500" b="1">
                 <a:solidFill>
                   <a:srgbClr val="FFFFFF"/>
                 </a:solidFill>
-                <a:latin typeface="Microsoft YaHei"/>
-                <a:ea typeface="Microsoft YaHei"/>
+                <a:latin typeface="微软雅黑" panose="020B0503020204020204" charset="-122"/>
+                <a:ea typeface="微软雅黑" panose="020B0503020204020204" charset="-122"/>
               </a:rPr>
               <a:t>工具定位</a:t>
             </a:r>
+            <a:endParaRPr lang="zh-CN" sz="1500" b="1">
+              <a:solidFill>
+                <a:srgbClr val="FFFFFF"/>
+              </a:solidFill>
+              <a:latin typeface="微软雅黑" panose="020B0503020204020204" charset="-122"/>
+              <a:ea typeface="微软雅黑" panose="020B0503020204020204" charset="-122"/>
+            </a:endParaRPr>
           </a:p>
         </p:txBody>
       </p:sp>
@@ -5498,17 +6284,24 @@
           </a:bodyPr>
           <a:lstStyle/>
           <a:p>
-            <a:pPr algn="c"/>
+            <a:pPr algn="l"/>
             <a:r>
               <a:rPr lang="zh-CN" sz="1500" b="1">
                 <a:solidFill>
                   <a:srgbClr val="FFFFFF"/>
                 </a:solidFill>
-                <a:latin typeface="Microsoft YaHei"/>
-                <a:ea typeface="Microsoft YaHei"/>
+                <a:latin typeface="微软雅黑" panose="020B0503020204020204" charset="-122"/>
+                <a:ea typeface="微软雅黑" panose="020B0503020204020204" charset="-122"/>
               </a:rPr>
               <a:t>为什么选</a:t>
             </a:r>
+            <a:endParaRPr lang="zh-CN" sz="1500" b="1">
+              <a:solidFill>
+                <a:srgbClr val="FFFFFF"/>
+              </a:solidFill>
+              <a:latin typeface="微软雅黑" panose="020B0503020204020204" charset="-122"/>
+              <a:ea typeface="微软雅黑" panose="020B0503020204020204" charset="-122"/>
+            </a:endParaRPr>
           </a:p>
         </p:txBody>
       </p:sp>
@@ -5547,11 +6340,18 @@
                 <a:solidFill>
                   <a:srgbClr val="111827"/>
                 </a:solidFill>
-                <a:latin typeface="Microsoft YaHei"/>
-                <a:ea typeface="Microsoft YaHei"/>
+                <a:latin typeface="微软雅黑" panose="020B0503020204020204" charset="-122"/>
+                <a:ea typeface="微软雅黑" panose="020B0503020204020204" charset="-122"/>
               </a:rPr>
               <a:t>EfficientNet-B0</a:t>
             </a:r>
+            <a:endParaRPr lang="zh-CN" sz="1400" b="1">
+              <a:solidFill>
+                <a:srgbClr val="111827"/>
+              </a:solidFill>
+              <a:latin typeface="微软雅黑" panose="020B0503020204020204" charset="-122"/>
+              <a:ea typeface="微软雅黑" panose="020B0503020204020204" charset="-122"/>
+            </a:endParaRPr>
           </a:p>
         </p:txBody>
       </p:sp>
@@ -5590,11 +6390,18 @@
                 <a:solidFill>
                   <a:srgbClr val="475569"/>
                 </a:solidFill>
-                <a:latin typeface="Microsoft YaHei"/>
-                <a:ea typeface="Microsoft YaHei"/>
+                <a:latin typeface="微软雅黑" panose="020B0503020204020204" charset="-122"/>
+                <a:ea typeface="微软雅黑" panose="020B0503020204020204" charset="-122"/>
               </a:rPr>
               <a:t>1280</a:t>
             </a:r>
+            <a:endParaRPr lang="zh-CN" sz="1400">
+              <a:solidFill>
+                <a:srgbClr val="475569"/>
+              </a:solidFill>
+              <a:latin typeface="微软雅黑" panose="020B0503020204020204" charset="-122"/>
+              <a:ea typeface="微软雅黑" panose="020B0503020204020204" charset="-122"/>
+            </a:endParaRPr>
           </a:p>
         </p:txBody>
       </p:sp>
@@ -5633,11 +6440,18 @@
                 <a:solidFill>
                   <a:srgbClr val="475569"/>
                 </a:solidFill>
-                <a:latin typeface="Microsoft YaHei"/>
-                <a:ea typeface="Microsoft YaHei"/>
+                <a:latin typeface="微软雅黑" panose="020B0503020204020204" charset="-122"/>
+                <a:ea typeface="微软雅黑" panose="020B0503020204020204" charset="-122"/>
               </a:rPr>
               <a:t>高精度学习工具 / 默认</a:t>
             </a:r>
+            <a:endParaRPr lang="zh-CN" sz="1400">
+              <a:solidFill>
+                <a:srgbClr val="475569"/>
+              </a:solidFill>
+              <a:latin typeface="微软雅黑" panose="020B0503020204020204" charset="-122"/>
+              <a:ea typeface="微软雅黑" panose="020B0503020204020204" charset="-122"/>
+            </a:endParaRPr>
           </a:p>
         </p:txBody>
       </p:sp>
@@ -5676,11 +6490,18 @@
                 <a:solidFill>
                   <a:srgbClr val="475569"/>
                 </a:solidFill>
-                <a:latin typeface="Microsoft YaHei"/>
-                <a:ea typeface="Microsoft YaHei"/>
+                <a:latin typeface="微软雅黑" panose="020B0503020204020204" charset="-122"/>
+                <a:ea typeface="微软雅黑" panose="020B0503020204020204" charset="-122"/>
               </a:rPr>
               <a:t>表达能力强，适合缺陷差异细微、精度优先场景。</a:t>
             </a:r>
+            <a:endParaRPr lang="zh-CN" sz="1300">
+              <a:solidFill>
+                <a:srgbClr val="475569"/>
+              </a:solidFill>
+              <a:latin typeface="微软雅黑" panose="020B0503020204020204" charset="-122"/>
+              <a:ea typeface="微软雅黑" panose="020B0503020204020204" charset="-122"/>
+            </a:endParaRPr>
           </a:p>
         </p:txBody>
       </p:sp>
@@ -5719,11 +6540,18 @@
                 <a:solidFill>
                   <a:srgbClr val="111827"/>
                 </a:solidFill>
-                <a:latin typeface="Microsoft YaHei"/>
-                <a:ea typeface="Microsoft YaHei"/>
+                <a:latin typeface="微软雅黑" panose="020B0503020204020204" charset="-122"/>
+                <a:ea typeface="微软雅黑" panose="020B0503020204020204" charset="-122"/>
               </a:rPr>
               <a:t>MobileNetV3 Small</a:t>
             </a:r>
+            <a:endParaRPr lang="zh-CN" sz="1400" b="1">
+              <a:solidFill>
+                <a:srgbClr val="111827"/>
+              </a:solidFill>
+              <a:latin typeface="微软雅黑" panose="020B0503020204020204" charset="-122"/>
+              <a:ea typeface="微软雅黑" panose="020B0503020204020204" charset="-122"/>
+            </a:endParaRPr>
           </a:p>
         </p:txBody>
       </p:sp>
@@ -5762,11 +6590,18 @@
                 <a:solidFill>
                   <a:srgbClr val="475569"/>
                 </a:solidFill>
-                <a:latin typeface="Microsoft YaHei"/>
-                <a:ea typeface="Microsoft YaHei"/>
+                <a:latin typeface="微软雅黑" panose="020B0503020204020204" charset="-122"/>
+                <a:ea typeface="微软雅黑" panose="020B0503020204020204" charset="-122"/>
               </a:rPr>
               <a:t>576</a:t>
             </a:r>
+            <a:endParaRPr lang="zh-CN" sz="1400">
+              <a:solidFill>
+                <a:srgbClr val="475569"/>
+              </a:solidFill>
+              <a:latin typeface="微软雅黑" panose="020B0503020204020204" charset="-122"/>
+              <a:ea typeface="微软雅黑" panose="020B0503020204020204" charset="-122"/>
+            </a:endParaRPr>
           </a:p>
         </p:txBody>
       </p:sp>
@@ -5805,11 +6640,18 @@
                 <a:solidFill>
                   <a:srgbClr val="475569"/>
                 </a:solidFill>
-                <a:latin typeface="Microsoft YaHei"/>
-                <a:ea typeface="Microsoft YaHei"/>
+                <a:latin typeface="微软雅黑" panose="020B0503020204020204" charset="-122"/>
+                <a:ea typeface="微软雅黑" panose="020B0503020204020204" charset="-122"/>
               </a:rPr>
               <a:t>轻量学习工具</a:t>
             </a:r>
+            <a:endParaRPr lang="zh-CN" sz="1400">
+              <a:solidFill>
+                <a:srgbClr val="475569"/>
+              </a:solidFill>
+              <a:latin typeface="微软雅黑" panose="020B0503020204020204" charset="-122"/>
+              <a:ea typeface="微软雅黑" panose="020B0503020204020204" charset="-122"/>
+            </a:endParaRPr>
           </a:p>
         </p:txBody>
       </p:sp>
@@ -5848,11 +6690,18 @@
                 <a:solidFill>
                   <a:srgbClr val="475569"/>
                 </a:solidFill>
-                <a:latin typeface="Microsoft YaHei"/>
-                <a:ea typeface="Microsoft YaHei"/>
+                <a:latin typeface="微软雅黑" panose="020B0503020204020204" charset="-122"/>
+                <a:ea typeface="微软雅黑" panose="020B0503020204020204" charset="-122"/>
               </a:rPr>
               <a:t>速度快、资源占用低，适合多 ROI 或低算力设备。</a:t>
             </a:r>
+            <a:endParaRPr lang="zh-CN" sz="1300">
+              <a:solidFill>
+                <a:srgbClr val="475569"/>
+              </a:solidFill>
+              <a:latin typeface="微软雅黑" panose="020B0503020204020204" charset="-122"/>
+              <a:ea typeface="微软雅黑" panose="020B0503020204020204" charset="-122"/>
+            </a:endParaRPr>
           </a:p>
         </p:txBody>
       </p:sp>
@@ -5891,11 +6740,18 @@
                 <a:solidFill>
                   <a:srgbClr val="111827"/>
                 </a:solidFill>
-                <a:latin typeface="Microsoft YaHei"/>
-                <a:ea typeface="Microsoft YaHei"/>
+                <a:latin typeface="微软雅黑" panose="020B0503020204020204" charset="-122"/>
+                <a:ea typeface="微软雅黑" panose="020B0503020204020204" charset="-122"/>
               </a:rPr>
               <a:t>MobileNetV3 Large</a:t>
             </a:r>
+            <a:endParaRPr lang="zh-CN" sz="1400" b="1">
+              <a:solidFill>
+                <a:srgbClr val="111827"/>
+              </a:solidFill>
+              <a:latin typeface="微软雅黑" panose="020B0503020204020204" charset="-122"/>
+              <a:ea typeface="微软雅黑" panose="020B0503020204020204" charset="-122"/>
+            </a:endParaRPr>
           </a:p>
         </p:txBody>
       </p:sp>
@@ -5934,11 +6790,18 @@
                 <a:solidFill>
                   <a:srgbClr val="475569"/>
                 </a:solidFill>
-                <a:latin typeface="Microsoft YaHei"/>
-                <a:ea typeface="Microsoft YaHei"/>
+                <a:latin typeface="微软雅黑" panose="020B0503020204020204" charset="-122"/>
+                <a:ea typeface="微软雅黑" panose="020B0503020204020204" charset="-122"/>
               </a:rPr>
               <a:t>960</a:t>
             </a:r>
+            <a:endParaRPr lang="zh-CN" sz="1400">
+              <a:solidFill>
+                <a:srgbClr val="475569"/>
+              </a:solidFill>
+              <a:latin typeface="微软雅黑" panose="020B0503020204020204" charset="-122"/>
+              <a:ea typeface="微软雅黑" panose="020B0503020204020204" charset="-122"/>
+            </a:endParaRPr>
           </a:p>
         </p:txBody>
       </p:sp>
@@ -5977,11 +6840,18 @@
                 <a:solidFill>
                   <a:srgbClr val="475569"/>
                 </a:solidFill>
-                <a:latin typeface="Microsoft YaHei"/>
-                <a:ea typeface="Microsoft YaHei"/>
+                <a:latin typeface="微软雅黑" panose="020B0503020204020204" charset="-122"/>
+                <a:ea typeface="微软雅黑" panose="020B0503020204020204" charset="-122"/>
               </a:rPr>
               <a:t>均衡学习工具</a:t>
             </a:r>
+            <a:endParaRPr lang="zh-CN" sz="1400">
+              <a:solidFill>
+                <a:srgbClr val="475569"/>
+              </a:solidFill>
+              <a:latin typeface="微软雅黑" panose="020B0503020204020204" charset="-122"/>
+              <a:ea typeface="微软雅黑" panose="020B0503020204020204" charset="-122"/>
+            </a:endParaRPr>
           </a:p>
         </p:txBody>
       </p:sp>
@@ -6020,11 +6890,18 @@
                 <a:solidFill>
                   <a:srgbClr val="475569"/>
                 </a:solidFill>
-                <a:latin typeface="Microsoft YaHei"/>
-                <a:ea typeface="Microsoft YaHei"/>
+                <a:latin typeface="微软雅黑" panose="020B0503020204020204" charset="-122"/>
+                <a:ea typeface="微软雅黑" panose="020B0503020204020204" charset="-122"/>
               </a:rPr>
               <a:t>在速度和表达能力之间折中。</a:t>
             </a:r>
+            <a:endParaRPr lang="zh-CN" sz="1300">
+              <a:solidFill>
+                <a:srgbClr val="475569"/>
+              </a:solidFill>
+              <a:latin typeface="微软雅黑" panose="020B0503020204020204" charset="-122"/>
+              <a:ea typeface="微软雅黑" panose="020B0503020204020204" charset="-122"/>
+            </a:endParaRPr>
           </a:p>
         </p:txBody>
       </p:sp>
@@ -6063,11 +6940,18 @@
                 <a:solidFill>
                   <a:srgbClr val="111827"/>
                 </a:solidFill>
-                <a:latin typeface="Microsoft YaHei"/>
-                <a:ea typeface="Microsoft YaHei"/>
+                <a:latin typeface="微软雅黑" panose="020B0503020204020204" charset="-122"/>
+                <a:ea typeface="微软雅黑" panose="020B0503020204020204" charset="-122"/>
               </a:rPr>
               <a:t>层选择结论</a:t>
             </a:r>
+            <a:endParaRPr lang="zh-CN" sz="2400" b="1">
+              <a:solidFill>
+                <a:srgbClr val="111827"/>
+              </a:solidFill>
+              <a:latin typeface="微软雅黑" panose="020B0503020204020204" charset="-122"/>
+              <a:ea typeface="微软雅黑" panose="020B0503020204020204" charset="-122"/>
+            </a:endParaRPr>
           </a:p>
           <a:p>
             <a:pPr algn="l"/>
@@ -6076,11 +6960,18 @@
                 <a:solidFill>
                   <a:srgbClr val="475569"/>
                 </a:solidFill>
-                <a:latin typeface="Microsoft YaHei"/>
-                <a:ea typeface="Microsoft YaHei"/>
+                <a:latin typeface="微软雅黑" panose="020B0503020204020204" charset="-122"/>
+                <a:ea typeface="微软雅黑" panose="020B0503020204020204" charset="-122"/>
               </a:rPr>
               <a:t>代码没有手工挑某个中间层；实际使用 torchvision 模型的 model.features 最终输出，去掉分类头后做 AdaptiveAvgPool2d(1) 和 F.normalize。</a:t>
             </a:r>
+            <a:endParaRPr lang="zh-CN" sz="1900">
+              <a:solidFill>
+                <a:srgbClr val="475569"/>
+              </a:solidFill>
+              <a:latin typeface="微软雅黑" panose="020B0503020204020204" charset="-122"/>
+              <a:ea typeface="微软雅黑" panose="020B0503020204020204" charset="-122"/>
+            </a:endParaRPr>
           </a:p>
         </p:txBody>
       </p:sp>
@@ -6113,17 +7004,24 @@
           </a:bodyPr>
           <a:lstStyle/>
           <a:p>
-            <a:pPr algn="c"/>
+            <a:pPr algn="l"/>
             <a:r>
               <a:rPr lang="zh-CN" sz="1400">
                 <a:solidFill>
                   <a:srgbClr val="475569"/>
                 </a:solidFill>
-                <a:latin typeface="Microsoft YaHei"/>
-                <a:ea typeface="Microsoft YaHei"/>
+                <a:latin typeface="微软雅黑" panose="020B0503020204020204" charset="-122"/>
+                <a:ea typeface="微软雅黑" panose="020B0503020204020204" charset="-122"/>
               </a:rPr>
               <a:t>代码依据：algorithms/embedding.py 中 _build_torch_backbone_model、_NormalizedEmbeddingBackbone、train_register_model、predict_one_with_model。</a:t>
             </a:r>
+            <a:endParaRPr lang="zh-CN" sz="1400">
+              <a:solidFill>
+                <a:srgbClr val="475569"/>
+              </a:solidFill>
+              <a:latin typeface="微软雅黑" panose="020B0503020204020204" charset="-122"/>
+              <a:ea typeface="微软雅黑" panose="020B0503020204020204" charset="-122"/>
+            </a:endParaRPr>
           </a:p>
         </p:txBody>
       </p:sp>
@@ -6154,7 +7052,7 @@
       </p:grpSpPr>
       <p:sp>
         <p:nvSpPr>
-          <p:cNvPr id="1" name="Background"/>
+          <p:cNvPr id="2" name="Background"/>
           <p:cNvSpPr/>
           <p:nvPr/>
         </p:nvSpPr>
@@ -6176,7 +7074,7 @@
       </p:sp>
       <p:sp>
         <p:nvSpPr>
-          <p:cNvPr id="2" name="Left accent"/>
+          <p:cNvPr id="3" name="Left accent"/>
           <p:cNvSpPr/>
           <p:nvPr/>
         </p:nvSpPr>
@@ -6198,7 +7096,7 @@
       </p:sp>
       <p:sp>
         <p:nvSpPr>
-          <p:cNvPr id="3" name="Title"/>
+          <p:cNvPr id="4" name="Title"/>
           <p:cNvSpPr txBox="1"/>
           <p:nvPr/>
         </p:nvSpPr>
@@ -6227,17 +7125,24 @@
                 <a:solidFill>
                   <a:srgbClr val="111827"/>
                 </a:solidFill>
-                <a:latin typeface="Microsoft YaHei"/>
-                <a:ea typeface="Microsoft YaHei"/>
+                <a:latin typeface="微软雅黑" panose="020B0503020204020204" charset="-122"/>
+                <a:ea typeface="微软雅黑" panose="020B0503020204020204" charset="-122"/>
               </a:rPr>
               <a:t>结论：传统方法做辅助，模型特征做主方案</a:t>
             </a:r>
-          </a:p>
-        </p:txBody>
-      </p:sp>
-      <p:sp>
-        <p:nvSpPr>
-          <p:cNvPr id="4" name="Bottom teal dot"/>
+            <a:endParaRPr lang="zh-CN" sz="2400" b="1">
+              <a:solidFill>
+                <a:srgbClr val="111827"/>
+              </a:solidFill>
+              <a:latin typeface="微软雅黑" panose="020B0503020204020204" charset="-122"/>
+              <a:ea typeface="微软雅黑" panose="020B0503020204020204" charset="-122"/>
+            </a:endParaRPr>
+          </a:p>
+        </p:txBody>
+      </p:sp>
+      <p:sp>
+        <p:nvSpPr>
+          <p:cNvPr id="5" name="Bottom teal dot"/>
           <p:cNvSpPr/>
           <p:nvPr/>
         </p:nvSpPr>
@@ -6259,7 +7164,7 @@
       </p:sp>
       <p:sp>
         <p:nvSpPr>
-          <p:cNvPr id="5" name="Bottom teal dot 2"/>
+          <p:cNvPr id="6" name="Bottom teal dot 2"/>
           <p:cNvSpPr/>
           <p:nvPr/>
         </p:nvSpPr>
@@ -6281,7 +7186,7 @@
       </p:sp>
       <p:sp>
         <p:nvSpPr>
-          <p:cNvPr id="6" name="Bottom pill"/>
+          <p:cNvPr id="7" name="Bottom pill"/>
           <p:cNvSpPr/>
           <p:nvPr/>
         </p:nvSpPr>
@@ -6303,7 +7208,7 @@
       </p:sp>
       <p:sp>
         <p:nvSpPr>
-          <p:cNvPr id="7" name="Bottom teal dot 3"/>
+          <p:cNvPr id="8" name="Bottom teal dot 3"/>
           <p:cNvSpPr/>
           <p:nvPr/>
         </p:nvSpPr>
@@ -6325,7 +7230,7 @@
       </p:sp>
       <p:sp>
         <p:nvSpPr>
-          <p:cNvPr id="8" name="Bottom teal dot 4"/>
+          <p:cNvPr id="9" name="Bottom teal dot 4"/>
           <p:cNvSpPr/>
           <p:nvPr/>
         </p:nvSpPr>
@@ -6380,15 +7285,22 @@
                 <a:solidFill>
                   <a:srgbClr val="009CA6"/>
                 </a:solidFill>
-                <a:latin typeface="Microsoft YaHei"/>
-                <a:ea typeface="Microsoft YaHei"/>
+                <a:latin typeface="微软雅黑" panose="020B0503020204020204" charset="-122"/>
+                <a:ea typeface="微软雅黑" panose="020B0503020204020204" charset="-122"/>
               </a:rPr>
               <a:t>传统方法适合什么</a:t>
             </a:r>
-          </a:p>
-          <a:p>
-            <a:pPr marL="240000" indent="-140000">
-              <a:buFont typeface="Microsoft YaHei"/>
+            <a:endParaRPr lang="zh-CN" sz="2500" b="1">
+              <a:solidFill>
+                <a:srgbClr val="009CA6"/>
+              </a:solidFill>
+              <a:latin typeface="微软雅黑" panose="020B0503020204020204" charset="-122"/>
+              <a:ea typeface="微软雅黑" panose="020B0503020204020204" charset="-122"/>
+            </a:endParaRPr>
+          </a:p>
+          <a:p>
+            <a:pPr marL="240030" indent="-139700">
+              <a:buFont typeface="微软雅黑" panose="020B0503020204020204" charset="-122"/>
               <a:buChar char="▪"/>
             </a:pPr>
             <a:r>
@@ -6396,15 +7308,22 @@
                 <a:solidFill>
                   <a:srgbClr val="111827"/>
                 </a:solidFill>
-                <a:latin typeface="Microsoft YaHei"/>
-                <a:ea typeface="Microsoft YaHei"/>
+                <a:latin typeface="微软雅黑" panose="020B0503020204020204" charset="-122"/>
+                <a:ea typeface="微软雅黑" panose="020B0503020204020204" charset="-122"/>
               </a:rPr>
               <a:t>缺陷表现为非常单一的亮度/颜色差异。</a:t>
             </a:r>
-          </a:p>
-          <a:p>
-            <a:pPr marL="240000" indent="-140000">
-              <a:buFont typeface="Microsoft YaHei"/>
+            <a:endParaRPr lang="zh-CN" sz="1900">
+              <a:solidFill>
+                <a:srgbClr val="111827"/>
+              </a:solidFill>
+              <a:latin typeface="微软雅黑" panose="020B0503020204020204" charset="-122"/>
+              <a:ea typeface="微软雅黑" panose="020B0503020204020204" charset="-122"/>
+            </a:endParaRPr>
+          </a:p>
+          <a:p>
+            <a:pPr marL="240030" indent="-139700">
+              <a:buFont typeface="微软雅黑" panose="020B0503020204020204" charset="-122"/>
               <a:buChar char="▪"/>
             </a:pPr>
             <a:r>
@@ -6412,15 +7331,22 @@
                 <a:solidFill>
                   <a:srgbClr val="111827"/>
                 </a:solidFill>
-                <a:latin typeface="Microsoft YaHei"/>
-                <a:ea typeface="Microsoft YaHei"/>
+                <a:latin typeface="微软雅黑" panose="020B0503020204020204" charset="-122"/>
+                <a:ea typeface="微软雅黑" panose="020B0503020204020204" charset="-122"/>
               </a:rPr>
               <a:t>环境光、相机曝光、产品位置都很稳定。</a:t>
             </a:r>
-          </a:p>
-          <a:p>
-            <a:pPr marL="240000" indent="-140000">
-              <a:buFont typeface="Microsoft YaHei"/>
+            <a:endParaRPr lang="zh-CN" sz="1900">
+              <a:solidFill>
+                <a:srgbClr val="111827"/>
+              </a:solidFill>
+              <a:latin typeface="微软雅黑" panose="020B0503020204020204" charset="-122"/>
+              <a:ea typeface="微软雅黑" panose="020B0503020204020204" charset="-122"/>
+            </a:endParaRPr>
+          </a:p>
+          <a:p>
+            <a:pPr marL="240030" indent="-139700">
+              <a:buFont typeface="微软雅黑" panose="020B0503020204020204" charset="-122"/>
               <a:buChar char="▪"/>
             </a:pPr>
             <a:r>
@@ -6428,15 +7354,22 @@
                 <a:solidFill>
                   <a:srgbClr val="111827"/>
                 </a:solidFill>
-                <a:latin typeface="Microsoft YaHei"/>
-                <a:ea typeface="Microsoft YaHei"/>
+                <a:latin typeface="微软雅黑" panose="020B0503020204020204" charset="-122"/>
+                <a:ea typeface="微软雅黑" panose="020B0503020204020204" charset="-122"/>
               </a:rPr>
               <a:t>只需要一个指标和阈值就能清晰分开 OK/NG。</a:t>
             </a:r>
-          </a:p>
-          <a:p>
-            <a:pPr marL="240000" indent="-140000">
-              <a:buFont typeface="Microsoft YaHei"/>
+            <a:endParaRPr lang="zh-CN" sz="1900">
+              <a:solidFill>
+                <a:srgbClr val="111827"/>
+              </a:solidFill>
+              <a:latin typeface="微软雅黑" panose="020B0503020204020204" charset="-122"/>
+              <a:ea typeface="微软雅黑" panose="020B0503020204020204" charset="-122"/>
+            </a:endParaRPr>
+          </a:p>
+          <a:p>
+            <a:pPr marL="240030" indent="-139700">
+              <a:buFont typeface="微软雅黑" panose="020B0503020204020204" charset="-122"/>
               <a:buChar char="▪"/>
             </a:pPr>
             <a:r>
@@ -6444,11 +7377,18 @@
                 <a:solidFill>
                   <a:srgbClr val="111827"/>
                 </a:solidFill>
-                <a:latin typeface="Microsoft YaHei"/>
-                <a:ea typeface="Microsoft YaHei"/>
+                <a:latin typeface="微软雅黑" panose="020B0503020204020204" charset="-122"/>
+                <a:ea typeface="微软雅黑" panose="020B0503020204020204" charset="-122"/>
               </a:rPr>
               <a:t>在本项目中可作为基线或简单工具。</a:t>
             </a:r>
+            <a:endParaRPr lang="zh-CN" sz="1900">
+              <a:solidFill>
+                <a:srgbClr val="111827"/>
+              </a:solidFill>
+              <a:latin typeface="微软雅黑" panose="020B0503020204020204" charset="-122"/>
+              <a:ea typeface="微软雅黑" panose="020B0503020204020204" charset="-122"/>
+            </a:endParaRPr>
           </a:p>
         </p:txBody>
       </p:sp>
@@ -6487,15 +7427,22 @@
                 <a:solidFill>
                   <a:srgbClr val="8BC20F"/>
                 </a:solidFill>
-                <a:latin typeface="Microsoft YaHei"/>
-                <a:ea typeface="Microsoft YaHei"/>
+                <a:latin typeface="微软雅黑" panose="020B0503020204020204" charset="-122"/>
+                <a:ea typeface="微软雅黑" panose="020B0503020204020204" charset="-122"/>
               </a:rPr>
               <a:t>模型检测为什么作为主方案</a:t>
             </a:r>
-          </a:p>
-          <a:p>
-            <a:pPr marL="240000" indent="-140000">
-              <a:buFont typeface="Microsoft YaHei"/>
+            <a:endParaRPr lang="zh-CN" sz="2500" b="1">
+              <a:solidFill>
+                <a:srgbClr val="8BC20F"/>
+              </a:solidFill>
+              <a:latin typeface="微软雅黑" panose="020B0503020204020204" charset="-122"/>
+              <a:ea typeface="微软雅黑" panose="020B0503020204020204" charset="-122"/>
+            </a:endParaRPr>
+          </a:p>
+          <a:p>
+            <a:pPr marL="240030" indent="-139700">
+              <a:buFont typeface="微软雅黑" panose="020B0503020204020204" charset="-122"/>
               <a:buChar char="▪"/>
             </a:pPr>
             <a:r>
@@ -6503,15 +7450,22 @@
                 <a:solidFill>
                   <a:srgbClr val="111827"/>
                 </a:solidFill>
-                <a:latin typeface="Microsoft YaHei"/>
-                <a:ea typeface="Microsoft YaHei"/>
+                <a:latin typeface="微软雅黑" panose="020B0503020204020204" charset="-122"/>
+                <a:ea typeface="微软雅黑" panose="020B0503020204020204" charset="-122"/>
               </a:rPr>
               <a:t>同时利用颜色、纹理、边缘、形状和局部结构。</a:t>
             </a:r>
-          </a:p>
-          <a:p>
-            <a:pPr marL="240000" indent="-140000">
-              <a:buFont typeface="Microsoft YaHei"/>
+            <a:endParaRPr lang="zh-CN" sz="1900">
+              <a:solidFill>
+                <a:srgbClr val="111827"/>
+              </a:solidFill>
+              <a:latin typeface="微软雅黑" panose="020B0503020204020204" charset="-122"/>
+              <a:ea typeface="微软雅黑" panose="020B0503020204020204" charset="-122"/>
+            </a:endParaRPr>
+          </a:p>
+          <a:p>
+            <a:pPr marL="240030" indent="-139700">
+              <a:buFont typeface="微软雅黑" panose="020B0503020204020204" charset="-122"/>
               <a:buChar char="▪"/>
             </a:pPr>
             <a:r>
@@ -6519,15 +7473,22 @@
                 <a:solidFill>
                   <a:srgbClr val="111827"/>
                 </a:solidFill>
-                <a:latin typeface="Microsoft YaHei"/>
-                <a:ea typeface="Microsoft YaHei"/>
+                <a:latin typeface="微软雅黑" panose="020B0503020204020204" charset="-122"/>
+                <a:ea typeface="微软雅黑" panose="020B0503020204020204" charset="-122"/>
               </a:rPr>
               <a:t>对轻微光照/材质/ROI 波动比单阈值更稳。</a:t>
             </a:r>
-          </a:p>
-          <a:p>
-            <a:pPr marL="240000" indent="-140000">
-              <a:buFont typeface="Microsoft YaHei"/>
+            <a:endParaRPr lang="zh-CN" sz="1900">
+              <a:solidFill>
+                <a:srgbClr val="111827"/>
+              </a:solidFill>
+              <a:latin typeface="微软雅黑" panose="020B0503020204020204" charset="-122"/>
+              <a:ea typeface="微软雅黑" panose="020B0503020204020204" charset="-122"/>
+            </a:endParaRPr>
+          </a:p>
+          <a:p>
+            <a:pPr marL="240030" indent="-139700">
+              <a:buFont typeface="微软雅黑" panose="020B0503020204020204" charset="-122"/>
               <a:buChar char="▪"/>
             </a:pPr>
             <a:r>
@@ -6535,15 +7496,22 @@
                 <a:solidFill>
                   <a:srgbClr val="111827"/>
                 </a:solidFill>
-                <a:latin typeface="Microsoft YaHei"/>
-                <a:ea typeface="Microsoft YaHei"/>
+                <a:latin typeface="微软雅黑" panose="020B0503020204020204" charset="-122"/>
+                <a:ea typeface="微软雅黑" panose="020B0503020204020204" charset="-122"/>
               </a:rPr>
               <a:t>少量 OK/NG 样本即可注册，不需要大量训练数据。</a:t>
             </a:r>
-          </a:p>
-          <a:p>
-            <a:pPr marL="240000" indent="-140000">
-              <a:buFont typeface="Microsoft YaHei"/>
+            <a:endParaRPr lang="zh-CN" sz="1900">
+              <a:solidFill>
+                <a:srgbClr val="111827"/>
+              </a:solidFill>
+              <a:latin typeface="微软雅黑" panose="020B0503020204020204" charset="-122"/>
+              <a:ea typeface="微软雅黑" panose="020B0503020204020204" charset="-122"/>
+            </a:endParaRPr>
+          </a:p>
+          <a:p>
+            <a:pPr marL="240030" indent="-139700">
+              <a:buFont typeface="微软雅黑" panose="020B0503020204020204" charset="-122"/>
               <a:buChar char="▪"/>
             </a:pPr>
             <a:r>
@@ -6551,11 +7519,18 @@
                 <a:solidFill>
                   <a:srgbClr val="111827"/>
                 </a:solidFill>
-                <a:latin typeface="Microsoft YaHei"/>
-                <a:ea typeface="Microsoft YaHei"/>
+                <a:latin typeface="微软雅黑" panose="020B0503020204020204" charset="-122"/>
+                <a:ea typeface="微软雅黑" panose="020B0503020204020204" charset="-122"/>
               </a:rPr>
               <a:t>换产品只需重采样本和 ROI，工程维护更简单。</a:t>
             </a:r>
+            <a:endParaRPr lang="zh-CN" sz="1900">
+              <a:solidFill>
+                <a:srgbClr val="111827"/>
+              </a:solidFill>
+              <a:latin typeface="微软雅黑" panose="020B0503020204020204" charset="-122"/>
+              <a:ea typeface="微软雅黑" panose="020B0503020204020204" charset="-122"/>
+            </a:endParaRPr>
           </a:p>
         </p:txBody>
       </p:sp>
@@ -6588,17 +7563,24 @@
           </a:bodyPr>
           <a:lstStyle/>
           <a:p>
-            <a:pPr algn="c"/>
+            <a:pPr algn="l"/>
             <a:r>
               <a:rPr lang="zh-CN" sz="2000" b="1">
                 <a:solidFill>
                   <a:srgbClr val="111827"/>
                 </a:solidFill>
-                <a:latin typeface="Microsoft YaHei"/>
-                <a:ea typeface="Microsoft YaHei"/>
+                <a:latin typeface="微软雅黑" panose="020B0503020204020204" charset="-122"/>
+                <a:ea typeface="微软雅黑" panose="020B0503020204020204" charset="-122"/>
               </a:rPr>
               <a:t>一句话：传统阈值看“数值是否变了”，模型 embedding 看“这个 ROI 整体视觉特征更像 OK 还是 NG”。</a:t>
             </a:r>
+            <a:endParaRPr lang="zh-CN" sz="2000" b="1">
+              <a:solidFill>
+                <a:srgbClr val="111827"/>
+              </a:solidFill>
+              <a:latin typeface="微软雅黑" panose="020B0503020204020204" charset="-122"/>
+              <a:ea typeface="微软雅黑" panose="020B0503020204020204" charset="-122"/>
+            </a:endParaRPr>
           </a:p>
         </p:txBody>
       </p:sp>
@@ -6655,10 +7637,12 @@
       <a:majorFont>
         <a:latin typeface="Microsoft YaHei"/>
         <a:ea typeface="Microsoft YaHei"/>
+        <a:cs typeface=""/>
       </a:majorFont>
       <a:minorFont>
         <a:latin typeface="Microsoft YaHei"/>
         <a:ea typeface="Microsoft YaHei"/>
+        <a:cs typeface=""/>
       </a:minorFont>
     </a:fontScheme>
     <a:fmtScheme name="fmt">
@@ -6673,6 +7657,8 @@
             <a:schemeClr val="phClr"/>
           </a:solidFill>
         </a:ln>
+        <a:ln/>
+        <a:ln/>
       </a:lnStyleLst>
       <a:effectStyleLst>
         <a:effectStyle>
@@ -6686,5 +7672,10 @@
       </a:bgFillStyleLst>
     </a:fmtScheme>
   </a:themeElements>
+  <a:extLst>
+    <a:ext uri="{05A4C25C-085E-4340-85A3-A5531E510DB2}">
+      <thm15:themeFamily xmlns:thm15="http://schemas.microsoft.com/office/thememl/2012/main" name="Office Theme" id="{62F939B6-93AF-4DB8-9C6B-D6C7DFDC589F}" vid="{4A3C46E8-61CC-4603-A589-7422A47A8E4A}"/>
+    </a:ext>
+  </a:extLst>
 </a:theme>
 </file>
--- a/Embedding算法分析汇报_增强版.pptx
+++ b/Embedding算法分析汇报_增强版.pptx
@@ -1133,104 +1133,895 @@
         <p:cNvGrpSpPr/>
         <p:nvPr/>
       </p:nvGrpSpPr>
-      <p:grpSpPr/>
-      <p:sp>
-        <p:nvSpPr>
-          <p:cNvPr id="2" name="文本框 1"/>
-          <p:cNvSpPr txBox="1"/>
-          <p:nvPr/>
-        </p:nvSpPr>
-        <p:spPr>
-          <a:xfrm>
-            <a:off x="1464310" y="1058545"/>
-            <a:ext cx="7362825" cy="342265"/>
+      <p:grpSpPr>
+        <a:xfrm>
+          <a:off x="0" y="0"/>
+          <a:ext cx="0" cy="0"/>
+          <a:chOff x="0" y="0"/>
+          <a:chExt cx="0" cy="0"/>
+        </a:xfrm>
+      </p:grpSpPr>
+      <p:sp>
+        <p:nvSpPr>
+          <p:cNvPr id="1" name="Background"/>
+          <p:cNvSpPr/>
+          <p:nvPr/>
+        </p:nvSpPr>
+        <p:spPr>
+          <a:xfrm>
+            <a:off x="0" y="0"/>
+            <a:ext cx="12192000" cy="6858000"/>
+          </a:xfrm>
+          <a:prstGeom prst="rect">
+            <a:avLst/>
+          </a:prstGeom>
+          <a:solidFill>
+            <a:srgbClr val="F7F7F5"/>
+          </a:solidFill>
+          <a:ln>
+            <a:noFill/>
+          </a:ln>
+        </p:spPr>
+      </p:sp>
+      <p:sp>
+        <p:nvSpPr>
+          <p:cNvPr id="2" name="Left accent"/>
+          <p:cNvSpPr/>
+          <p:nvPr/>
+        </p:nvSpPr>
+        <p:spPr>
+          <a:xfrm>
+            <a:off x="0" y="0"/>
+            <a:ext cx="146304" cy="6858000"/>
+          </a:xfrm>
+          <a:prstGeom prst="rect">
+            <a:avLst/>
+          </a:prstGeom>
+          <a:solidFill>
+            <a:srgbClr val="009CA6"/>
+          </a:solidFill>
+          <a:ln>
+            <a:noFill/>
+          </a:ln>
+        </p:spPr>
+      </p:sp>
+      <p:sp>
+        <p:nvSpPr>
+          <p:cNvPr id="3" name="Title"/>
+          <p:cNvSpPr txBox="1"/>
+          <p:nvPr/>
+        </p:nvSpPr>
+        <p:spPr>
+          <a:xfrm>
+            <a:off x="411480" y="137160"/>
+            <a:ext cx="7863840" cy="475488"/>
           </a:xfrm>
           <a:prstGeom prst="rect">
             <a:avLst/>
           </a:prstGeom>
           <a:noFill/>
-        </p:spPr>
-        <p:txBody>
-          <a:bodyPr wrap="square" rtlCol="0">
-            <a:noAutofit/>
-          </a:bodyPr>
-          <a:p>
-            <a:r>
-              <a:rPr lang="zh-CN" altLang="en-US"/>
-              <a:t>方便车间维护</a:t>
-            </a:r>
-            <a:r>
-              <a:rPr lang="en-US" altLang="zh-CN"/>
-              <a:t>  </a:t>
-            </a:r>
-            <a:r>
-              <a:rPr lang="zh-CN" altLang="en-US"/>
-              <a:t>不用改代码</a:t>
-            </a:r>
-            <a:r>
-              <a:rPr lang="en-US" altLang="zh-CN"/>
-              <a:t>  </a:t>
-            </a:r>
-            <a:r>
-              <a:rPr lang="zh-CN" altLang="en-US"/>
-              <a:t>界面操作就</a:t>
-            </a:r>
-            <a:r>
-              <a:rPr lang="zh-CN" altLang="en-US"/>
-              <a:t>行</a:t>
-            </a:r>
-            <a:endParaRPr lang="zh-CN" altLang="en-US"/>
-          </a:p>
-        </p:txBody>
-      </p:sp>
-      <p:pic>
-        <p:nvPicPr>
-          <p:cNvPr id="3" name="图片 2"/>
-          <p:cNvPicPr>
-            <a:picLocks noChangeAspect="1"/>
-          </p:cNvPicPr>
-          <p:nvPr/>
-        </p:nvPicPr>
-        <p:blipFill>
-          <a:blip r:embed="rId1"/>
-          <a:stretch>
-            <a:fillRect/>
-          </a:stretch>
-        </p:blipFill>
-        <p:spPr>
-          <a:xfrm>
-            <a:off x="911225" y="1772920"/>
-            <a:ext cx="3981450" cy="3676650"/>
-          </a:xfrm>
-          <a:prstGeom prst="rect">
-            <a:avLst/>
-          </a:prstGeom>
-        </p:spPr>
-      </p:pic>
-      <p:pic>
-        <p:nvPicPr>
-          <p:cNvPr id="4" name="图片 3"/>
-          <p:cNvPicPr>
-            <a:picLocks noChangeAspect="1"/>
-          </p:cNvPicPr>
-          <p:nvPr/>
-        </p:nvPicPr>
-        <p:blipFill>
-          <a:blip r:embed="rId2"/>
-          <a:stretch>
-            <a:fillRect/>
-          </a:stretch>
-        </p:blipFill>
-        <p:spPr>
-          <a:xfrm>
-            <a:off x="5303520" y="1772920"/>
-            <a:ext cx="4295775" cy="3819525"/>
-          </a:xfrm>
-          <a:prstGeom prst="rect">
-            <a:avLst/>
-          </a:prstGeom>
-        </p:spPr>
-      </p:pic>
+          <a:ln>
+            <a:noFill/>
+          </a:ln>
+        </p:spPr>
+        <p:txBody>
+          <a:bodyPr wrap="square" lIns="18288" tIns="18288" rIns="18288" bIns="18288">
+            <a:spAutoFit/>
+          </a:bodyPr>
+          <a:lstStyle/>
+          <a:p>
+            <a:pPr algn="l"/>
+            <a:r>
+              <a:rPr lang="zh-CN" sz="2400" b="1">
+                <a:solidFill>
+                  <a:srgbClr val="111827"/>
+                </a:solidFill>
+                <a:latin typeface="Microsoft YaHei"/>
+                <a:ea typeface="Microsoft YaHei"/>
+              </a:rPr>
+              <a:t>为什么采用注册训练：让检测像智能传感器 Teach-in</a:t>
+            </a:r>
+          </a:p>
+        </p:txBody>
+      </p:sp>
+      <p:sp>
+        <p:nvSpPr>
+          <p:cNvPr id="4" name="Bottom dot 1"/>
+          <p:cNvSpPr/>
+          <p:nvPr/>
+        </p:nvSpPr>
+        <p:spPr>
+          <a:xfrm>
+            <a:off x="8366760" y="6492240"/>
+            <a:ext cx="228600" cy="228600"/>
+          </a:xfrm>
+          <a:prstGeom prst="ellipse">
+            <a:avLst/>
+          </a:prstGeom>
+          <a:solidFill>
+            <a:srgbClr val="8BC20F"/>
+          </a:solidFill>
+          <a:ln>
+            <a:noFill/>
+          </a:ln>
+        </p:spPr>
+      </p:sp>
+      <p:sp>
+        <p:nvSpPr>
+          <p:cNvPr id="5" name="Bottom dot 2"/>
+          <p:cNvSpPr/>
+          <p:nvPr/>
+        </p:nvSpPr>
+        <p:spPr>
+          <a:xfrm>
+            <a:off x="8732520" y="6492240"/>
+            <a:ext cx="228600" cy="228600"/>
+          </a:xfrm>
+          <a:prstGeom prst="ellipse">
+            <a:avLst/>
+          </a:prstGeom>
+          <a:solidFill>
+            <a:srgbClr val="009CA6"/>
+          </a:solidFill>
+          <a:ln>
+            <a:noFill/>
+          </a:ln>
+        </p:spPr>
+      </p:sp>
+      <p:sp>
+        <p:nvSpPr>
+          <p:cNvPr id="6" name="Bottom pill"/>
+          <p:cNvSpPr/>
+          <p:nvPr/>
+        </p:nvSpPr>
+        <p:spPr>
+          <a:xfrm>
+            <a:off x="9098280" y="6492240"/>
+            <a:ext cx="685800" cy="228600"/>
+          </a:xfrm>
+          <a:prstGeom prst="roundRect">
+            <a:avLst/>
+          </a:prstGeom>
+          <a:solidFill>
+            <a:srgbClr val="8BC20F"/>
+          </a:solidFill>
+          <a:ln>
+            <a:noFill/>
+          </a:ln>
+        </p:spPr>
+      </p:sp>
+      <p:sp>
+        <p:nvSpPr>
+          <p:cNvPr id="7" name="Bottom dot 3"/>
+          <p:cNvSpPr/>
+          <p:nvPr/>
+        </p:nvSpPr>
+        <p:spPr>
+          <a:xfrm>
+            <a:off x="9921240" y="6492240"/>
+            <a:ext cx="228600" cy="228600"/>
+          </a:xfrm>
+          <a:prstGeom prst="ellipse">
+            <a:avLst/>
+          </a:prstGeom>
+          <a:solidFill>
+            <a:srgbClr val="009CA6"/>
+          </a:solidFill>
+          <a:ln>
+            <a:noFill/>
+          </a:ln>
+        </p:spPr>
+      </p:sp>
+      <p:sp>
+        <p:nvSpPr>
+          <p:cNvPr id="8" name="Bottom dot 4"/>
+          <p:cNvSpPr/>
+          <p:nvPr/>
+        </p:nvSpPr>
+        <p:spPr>
+          <a:xfrm>
+            <a:off x="10287000" y="6492240"/>
+            <a:ext cx="228600" cy="228600"/>
+          </a:xfrm>
+          <a:prstGeom prst="ellipse">
+            <a:avLst/>
+          </a:prstGeom>
+          <a:solidFill>
+            <a:srgbClr val="8BC20F"/>
+          </a:solidFill>
+          <a:ln>
+            <a:noFill/>
+          </a:ln>
+        </p:spPr>
+      </p:sp>
+      <p:sp>
+        <p:nvSpPr>
+          <p:cNvPr id="11" name="Main claim"/>
+          <p:cNvSpPr txBox="1"/>
+          <p:nvPr/>
+        </p:nvSpPr>
+        <p:spPr>
+          <a:xfrm>
+            <a:off x="594360" y="868680"/>
+            <a:ext cx="10927080" cy="658368"/>
+          </a:xfrm>
+          <a:prstGeom prst="roundRect">
+            <a:avLst/>
+          </a:prstGeom>
+          <a:solidFill>
+            <a:srgbClr val="009CA6"/>
+          </a:solidFill>
+          <a:ln>
+            <a:noFill/>
+          </a:ln>
+        </p:spPr>
+        <p:txBody>
+          <a:bodyPr wrap="square" lIns="27432" tIns="27432" rIns="27432" bIns="27432">
+            <a:spAutoFit/>
+          </a:bodyPr>
+          <a:lstStyle/>
+          <a:p>
+            <a:pPr algn="c"/>
+            <a:r>
+              <a:rPr lang="zh-CN" sz="2100" b="1">
+                <a:solidFill>
+                  <a:srgbClr val="FFFFFF"/>
+                </a:solidFill>
+                <a:latin typeface="Microsoft YaHei"/>
+                <a:ea typeface="Microsoft YaHei"/>
+              </a:rPr>
+              <a:t>核心价值：把“工程师写规则、调阈值”变成“车间人员添加 OK/NG 样本、点击学习”。</a:t>
+            </a:r>
+          </a:p>
+        </p:txBody>
+      </p:sp>
+      <p:sp>
+        <p:nvSpPr>
+          <p:cNvPr id="12" name="Traditional workflow"/>
+          <p:cNvSpPr txBox="1"/>
+          <p:nvPr/>
+        </p:nvSpPr>
+        <p:spPr>
+          <a:xfrm>
+            <a:off x="685800" y="1828800"/>
+            <a:ext cx="4892040" cy="2240280"/>
+          </a:xfrm>
+          <a:prstGeom prst="rect">
+            <a:avLst/>
+          </a:prstGeom>
+          <a:solidFill>
+            <a:srgbClr val="FFFFFF"/>
+          </a:solidFill>
+          <a:ln w="12700">
+            <a:solidFill>
+              <a:srgbClr val="FCA5A5"/>
+            </a:solidFill>
+          </a:ln>
+        </p:spPr>
+        <p:txBody>
+          <a:bodyPr wrap="square" lIns="64008" tIns="64008" rIns="64008" bIns="64008">
+            <a:spAutoFit/>
+          </a:bodyPr>
+          <a:lstStyle/>
+          <a:p>
+            <a:pPr algn="l"/>
+            <a:r>
+              <a:rPr lang="zh-CN" sz="2400" b="1">
+                <a:solidFill>
+                  <a:srgbClr val="DC2626"/>
+                </a:solidFill>
+                <a:latin typeface="Microsoft YaHei"/>
+                <a:ea typeface="Microsoft YaHei"/>
+              </a:rPr>
+              <a:t>传统代码检测</a:t>
+            </a:r>
+          </a:p>
+          <a:p>
+            <a:pPr marL="240000" indent="-140000">
+              <a:buFont typeface="Microsoft YaHei"/>
+              <a:buChar char="▪"/>
+            </a:pPr>
+            <a:r>
+              <a:rPr lang="zh-CN" sz="1700">
+                <a:solidFill>
+                  <a:srgbClr val="111827"/>
+                </a:solidFill>
+                <a:latin typeface="Microsoft YaHei"/>
+                <a:ea typeface="Microsoft YaHei"/>
+              </a:rPr>
+              <a:t>工程师判断该用灰度、颜色、边缘、模板还是轮廓。</a:t>
+            </a:r>
+          </a:p>
+          <a:p>
+            <a:pPr marL="240000" indent="-140000">
+              <a:buFont typeface="Microsoft YaHei"/>
+              <a:buChar char="▪"/>
+            </a:pPr>
+            <a:r>
+              <a:rPr lang="zh-CN" sz="1700">
+                <a:solidFill>
+                  <a:srgbClr val="111827"/>
+                </a:solidFill>
+                <a:latin typeface="Microsoft YaHei"/>
+                <a:ea typeface="Microsoft YaHei"/>
+              </a:rPr>
+              <a:t>写规则、调阈值、改代码、重新测试发布。</a:t>
+            </a:r>
+          </a:p>
+          <a:p>
+            <a:pPr marL="240000" indent="-140000">
+              <a:buFont typeface="Microsoft YaHei"/>
+              <a:buChar char="▪"/>
+            </a:pPr>
+            <a:r>
+              <a:rPr lang="zh-CN" sz="1700">
+                <a:solidFill>
+                  <a:srgbClr val="111827"/>
+                </a:solidFill>
+                <a:latin typeface="Microsoft YaHei"/>
+                <a:ea typeface="Microsoft YaHei"/>
+              </a:rPr>
+              <a:t>换产品、换批次、灯光变化后经常要再次调参。</a:t>
+            </a:r>
+          </a:p>
+          <a:p>
+            <a:pPr marL="240000" indent="-140000">
+              <a:buFont typeface="Microsoft YaHei"/>
+              <a:buChar char="▪"/>
+            </a:pPr>
+            <a:r>
+              <a:rPr lang="zh-CN" sz="1700">
+                <a:solidFill>
+                  <a:srgbClr val="111827"/>
+                </a:solidFill>
+                <a:latin typeface="Microsoft YaHei"/>
+                <a:ea typeface="Microsoft YaHei"/>
+              </a:rPr>
+              <a:t>车间人员难以独立维护。</a:t>
+            </a:r>
+          </a:p>
+        </p:txBody>
+      </p:sp>
+      <p:sp>
+        <p:nvSpPr>
+          <p:cNvPr id="13" name="Traditional label"/>
+          <p:cNvSpPr txBox="1"/>
+          <p:nvPr/>
+        </p:nvSpPr>
+        <p:spPr>
+          <a:xfrm>
+            <a:off x="914400" y="4206240"/>
+            <a:ext cx="4434840" cy="347472"/>
+          </a:xfrm>
+          <a:prstGeom prst="roundRect">
+            <a:avLst/>
+          </a:prstGeom>
+          <a:solidFill>
+            <a:srgbClr val="FEE2E2"/>
+          </a:solidFill>
+          <a:ln w="12700">
+            <a:solidFill>
+              <a:srgbClr val="FCA5A5"/>
+            </a:solidFill>
+          </a:ln>
+        </p:spPr>
+        <p:txBody>
+          <a:bodyPr wrap="square" lIns="18288" tIns="18288" rIns="18288" bIns="18288">
+            <a:spAutoFit/>
+          </a:bodyPr>
+          <a:lstStyle/>
+          <a:p>
+            <a:pPr algn="c"/>
+            <a:r>
+              <a:rPr lang="zh-CN" sz="1500" b="1">
+                <a:solidFill>
+                  <a:srgbClr val="DC2626"/>
+                </a:solidFill>
+                <a:latin typeface="Microsoft YaHei"/>
+                <a:ea typeface="Microsoft YaHei"/>
+              </a:rPr>
+              <a:t>适合简单稳定场景；不适合频繁换型和复杂错漏装</a:t>
+            </a:r>
+          </a:p>
+        </p:txBody>
+      </p:sp>
+      <p:sp>
+        <p:nvSpPr>
+          <p:cNvPr id="14" name="Register workflow"/>
+          <p:cNvSpPr txBox="1"/>
+          <p:nvPr/>
+        </p:nvSpPr>
+        <p:spPr>
+          <a:xfrm>
+            <a:off x="6400800" y="1828800"/>
+            <a:ext cx="4892040" cy="2240280"/>
+          </a:xfrm>
+          <a:prstGeom prst="rect">
+            <a:avLst/>
+          </a:prstGeom>
+          <a:solidFill>
+            <a:srgbClr val="FFFFFF"/>
+          </a:solidFill>
+          <a:ln w="12700">
+            <a:solidFill>
+              <a:srgbClr val="86EFAC"/>
+            </a:solidFill>
+          </a:ln>
+        </p:spPr>
+        <p:txBody>
+          <a:bodyPr wrap="square" lIns="64008" tIns="64008" rIns="64008" bIns="64008">
+            <a:spAutoFit/>
+          </a:bodyPr>
+          <a:lstStyle/>
+          <a:p>
+            <a:pPr algn="l"/>
+            <a:r>
+              <a:rPr lang="zh-CN" sz="2400" b="1">
+                <a:solidFill>
+                  <a:srgbClr val="8BC20F"/>
+                </a:solidFill>
+                <a:latin typeface="Microsoft YaHei"/>
+                <a:ea typeface="Microsoft YaHei"/>
+              </a:rPr>
+              <a:t>注册训练检测</a:t>
+            </a:r>
+          </a:p>
+          <a:p>
+            <a:pPr marL="240000" indent="-140000">
+              <a:buFont typeface="Microsoft YaHei"/>
+              <a:buChar char="▪"/>
+            </a:pPr>
+            <a:r>
+              <a:rPr lang="zh-CN" sz="1700">
+                <a:solidFill>
+                  <a:srgbClr val="111827"/>
+                </a:solidFill>
+                <a:latin typeface="Microsoft YaHei"/>
+                <a:ea typeface="Microsoft YaHei"/>
+              </a:rPr>
+              <a:t>车间人员添加合格 / 不合格样本。</a:t>
+            </a:r>
+          </a:p>
+          <a:p>
+            <a:pPr marL="240000" indent="-140000">
+              <a:buFont typeface="Microsoft YaHei"/>
+              <a:buChar char="▪"/>
+            </a:pPr>
+            <a:r>
+              <a:rPr lang="zh-CN" sz="1700">
+                <a:solidFill>
+                  <a:srgbClr val="111827"/>
+                </a:solidFill>
+                <a:latin typeface="Microsoft YaHei"/>
+                <a:ea typeface="Microsoft YaHei"/>
+              </a:rPr>
+              <a:t>框选 ROI，点击学习，生成 OK/NG 特征库。</a:t>
+            </a:r>
+          </a:p>
+          <a:p>
+            <a:pPr marL="240000" indent="-140000">
+              <a:buFont typeface="Microsoft YaHei"/>
+              <a:buChar char="▪"/>
+            </a:pPr>
+            <a:r>
+              <a:rPr lang="zh-CN" sz="1700">
+                <a:solidFill>
+                  <a:srgbClr val="111827"/>
+                </a:solidFill>
+                <a:latin typeface="Microsoft YaHei"/>
+                <a:ea typeface="Microsoft YaHei"/>
+              </a:rPr>
+              <a:t>错装、漏装、反装直接通过样本补充维护。</a:t>
+            </a:r>
+          </a:p>
+          <a:p>
+            <a:pPr marL="240000" indent="-140000">
+              <a:buFont typeface="Microsoft YaHei"/>
+              <a:buChar char="▪"/>
+            </a:pPr>
+            <a:r>
+              <a:rPr lang="zh-CN" sz="1700">
+                <a:solidFill>
+                  <a:srgbClr val="111827"/>
+                </a:solidFill>
+                <a:latin typeface="Microsoft YaHei"/>
+                <a:ea typeface="Microsoft YaHei"/>
+              </a:rPr>
+              <a:t>不需要理解底层代码，也不需要重新训练大模型。</a:t>
+            </a:r>
+          </a:p>
+        </p:txBody>
+      </p:sp>
+      <p:sp>
+        <p:nvSpPr>
+          <p:cNvPr id="15" name="Register label"/>
+          <p:cNvSpPr txBox="1"/>
+          <p:nvPr/>
+        </p:nvSpPr>
+        <p:spPr>
+          <a:xfrm>
+            <a:off x="6629400" y="4206240"/>
+            <a:ext cx="4434840" cy="347472"/>
+          </a:xfrm>
+          <a:prstGeom prst="roundRect">
+            <a:avLst/>
+          </a:prstGeom>
+          <a:solidFill>
+            <a:srgbClr val="ECFDF5"/>
+          </a:solidFill>
+          <a:ln w="12700">
+            <a:solidFill>
+              <a:srgbClr val="86EFAC"/>
+            </a:solidFill>
+          </a:ln>
+        </p:spPr>
+        <p:txBody>
+          <a:bodyPr wrap="square" lIns="18288" tIns="18288" rIns="18288" bIns="18288">
+            <a:spAutoFit/>
+          </a:bodyPr>
+          <a:lstStyle/>
+          <a:p>
+            <a:pPr algn="c"/>
+            <a:r>
+              <a:rPr lang="zh-CN" sz="1500" b="1">
+                <a:solidFill>
+                  <a:srgbClr val="0F766E"/>
+                </a:solidFill>
+                <a:latin typeface="Microsoft YaHei"/>
+                <a:ea typeface="Microsoft YaHei"/>
+              </a:rPr>
+              <a:t>适合多品种、小批量、车间自维护</a:t>
+            </a:r>
+          </a:p>
+        </p:txBody>
+      </p:sp>
+      <p:cxnSp>
+        <p:nvCxnSpPr>
+          <p:cNvPr id="16" name="Arrow 16"/>
+          <p:cNvCxnSpPr/>
+          <p:nvPr/>
+        </p:nvCxnSpPr>
+        <p:spPr>
+          <a:xfrm>
+            <a:off x="5715000" y="2944368"/>
+            <a:ext cx="548640" cy="9144"/>
+          </a:xfrm>
+          <a:prstGeom prst="line">
+            <a:avLst/>
+          </a:prstGeom>
+          <a:ln w="45720">
+            <a:solidFill>
+              <a:srgbClr val="8BC20F"/>
+            </a:solidFill>
+            <a:tailEnd type="triangle"/>
+          </a:ln>
+        </p:spPr>
+      </p:cxnSp>
+      <p:sp>
+        <p:nvSpPr>
+          <p:cNvPr id="17" name="Teach step 1"/>
+          <p:cNvSpPr txBox="1"/>
+          <p:nvPr/>
+        </p:nvSpPr>
+        <p:spPr>
+          <a:xfrm>
+            <a:off x="868680" y="4892040"/>
+            <a:ext cx="2103120" cy="713232"/>
+          </a:xfrm>
+          <a:prstGeom prst="roundRect">
+            <a:avLst/>
+          </a:prstGeom>
+          <a:solidFill>
+            <a:srgbClr val="009CA6"/>
+          </a:solidFill>
+          <a:ln>
+            <a:noFill/>
+          </a:ln>
+        </p:spPr>
+        <p:txBody>
+          <a:bodyPr wrap="square" lIns="22860" tIns="22860" rIns="22860" bIns="22860">
+            <a:spAutoFit/>
+          </a:bodyPr>
+          <a:lstStyle/>
+          <a:p>
+            <a:pPr algn="c"/>
+            <a:r>
+              <a:rPr lang="zh-CN" sz="1800" b="1">
+                <a:solidFill>
+                  <a:srgbClr val="FFFFFF"/>
+                </a:solidFill>
+                <a:latin typeface="Microsoft YaHei"/>
+                <a:ea typeface="Microsoft YaHei"/>
+              </a:rPr>
+              <a:t>1 添加样本</a:t>
+            </a:r>
+          </a:p>
+          <a:p>
+            <a:pPr algn="c"/>
+            <a:r>
+              <a:rPr lang="zh-CN" sz="1300">
+                <a:solidFill>
+                  <a:srgbClr val="FFFFFF"/>
+                </a:solidFill>
+                <a:latin typeface="Microsoft YaHei"/>
+                <a:ea typeface="Microsoft YaHei"/>
+              </a:rPr>
+              <a:t>OK / NG / 边界样本</a:t>
+            </a:r>
+          </a:p>
+        </p:txBody>
+      </p:sp>
+      <p:cxnSp>
+        <p:nvCxnSpPr>
+          <p:cNvPr id="18" name="Arrow 18"/>
+          <p:cNvCxnSpPr/>
+          <p:nvPr/>
+        </p:nvCxnSpPr>
+        <p:spPr>
+          <a:xfrm>
+            <a:off x="3044952" y="5248656"/>
+            <a:ext cx="493776" cy="9144"/>
+          </a:xfrm>
+          <a:prstGeom prst="line">
+            <a:avLst/>
+          </a:prstGeom>
+          <a:ln w="45720">
+            <a:solidFill>
+              <a:srgbClr val="009CA6"/>
+            </a:solidFill>
+            <a:tailEnd type="triangle"/>
+          </a:ln>
+        </p:spPr>
+      </p:cxnSp>
+      <p:sp>
+        <p:nvSpPr>
+          <p:cNvPr id="19" name="Teach step 2"/>
+          <p:cNvSpPr txBox="1"/>
+          <p:nvPr/>
+        </p:nvSpPr>
+        <p:spPr>
+          <a:xfrm>
+            <a:off x="3611880" y="4892040"/>
+            <a:ext cx="2103120" cy="713232"/>
+          </a:xfrm>
+          <a:prstGeom prst="roundRect">
+            <a:avLst/>
+          </a:prstGeom>
+          <a:solidFill>
+            <a:srgbClr val="2563EB"/>
+          </a:solidFill>
+          <a:ln>
+            <a:noFill/>
+          </a:ln>
+        </p:spPr>
+        <p:txBody>
+          <a:bodyPr wrap="square" lIns="22860" tIns="22860" rIns="22860" bIns="22860">
+            <a:spAutoFit/>
+          </a:bodyPr>
+          <a:lstStyle/>
+          <a:p>
+            <a:pPr algn="c"/>
+            <a:r>
+              <a:rPr lang="zh-CN" sz="1800" b="1">
+                <a:solidFill>
+                  <a:srgbClr val="FFFFFF"/>
+                </a:solidFill>
+                <a:latin typeface="Microsoft YaHei"/>
+                <a:ea typeface="Microsoft YaHei"/>
+              </a:rPr>
+              <a:t>2 选择 ROI</a:t>
+            </a:r>
+          </a:p>
+          <a:p>
+            <a:pPr algn="c"/>
+            <a:r>
+              <a:rPr lang="zh-CN" sz="1300">
+                <a:solidFill>
+                  <a:srgbClr val="FFFFFF"/>
+                </a:solidFill>
+                <a:latin typeface="Microsoft YaHei"/>
+                <a:ea typeface="Microsoft YaHei"/>
+              </a:rPr>
+              <a:t>错装、漏装关注区域</a:t>
+            </a:r>
+          </a:p>
+        </p:txBody>
+      </p:sp>
+      <p:cxnSp>
+        <p:nvCxnSpPr>
+          <p:cNvPr id="20" name="Arrow 20"/>
+          <p:cNvCxnSpPr/>
+          <p:nvPr/>
+        </p:nvCxnSpPr>
+        <p:spPr>
+          <a:xfrm>
+            <a:off x="5788152" y="5248656"/>
+            <a:ext cx="493776" cy="9144"/>
+          </a:xfrm>
+          <a:prstGeom prst="line">
+            <a:avLst/>
+          </a:prstGeom>
+          <a:ln w="45720">
+            <a:solidFill>
+              <a:srgbClr val="009CA6"/>
+            </a:solidFill>
+            <a:tailEnd type="triangle"/>
+          </a:ln>
+        </p:spPr>
+      </p:cxnSp>
+      <p:sp>
+        <p:nvSpPr>
+          <p:cNvPr id="21" name="Teach step 3"/>
+          <p:cNvSpPr txBox="1"/>
+          <p:nvPr/>
+        </p:nvSpPr>
+        <p:spPr>
+          <a:xfrm>
+            <a:off x="6355080" y="4892040"/>
+            <a:ext cx="2103120" cy="713232"/>
+          </a:xfrm>
+          <a:prstGeom prst="roundRect">
+            <a:avLst/>
+          </a:prstGeom>
+          <a:solidFill>
+            <a:srgbClr val="8BC20F"/>
+          </a:solidFill>
+          <a:ln>
+            <a:noFill/>
+          </a:ln>
+        </p:spPr>
+        <p:txBody>
+          <a:bodyPr wrap="square" lIns="22860" tIns="22860" rIns="22860" bIns="22860">
+            <a:spAutoFit/>
+          </a:bodyPr>
+          <a:lstStyle/>
+          <a:p>
+            <a:pPr algn="c"/>
+            <a:r>
+              <a:rPr lang="zh-CN" sz="1800" b="1">
+                <a:solidFill>
+                  <a:srgbClr val="FFFFFF"/>
+                </a:solidFill>
+                <a:latin typeface="Microsoft YaHei"/>
+                <a:ea typeface="Microsoft YaHei"/>
+              </a:rPr>
+              <a:t>3 点击学习</a:t>
+            </a:r>
+          </a:p>
+          <a:p>
+            <a:pPr algn="c"/>
+            <a:r>
+              <a:rPr lang="zh-CN" sz="1300">
+                <a:solidFill>
+                  <a:srgbClr val="FFFFFF"/>
+                </a:solidFill>
+                <a:latin typeface="Microsoft YaHei"/>
+                <a:ea typeface="Microsoft YaHei"/>
+              </a:rPr>
+              <a:t>生成特征库</a:t>
+            </a:r>
+          </a:p>
+        </p:txBody>
+      </p:sp>
+      <p:cxnSp>
+        <p:nvCxnSpPr>
+          <p:cNvPr id="22" name="Arrow 22"/>
+          <p:cNvCxnSpPr/>
+          <p:nvPr/>
+        </p:nvCxnSpPr>
+        <p:spPr>
+          <a:xfrm>
+            <a:off x="8531352" y="5248656"/>
+            <a:ext cx="493776" cy="9144"/>
+          </a:xfrm>
+          <a:prstGeom prst="line">
+            <a:avLst/>
+          </a:prstGeom>
+          <a:ln w="45720">
+            <a:solidFill>
+              <a:srgbClr val="009CA6"/>
+            </a:solidFill>
+            <a:tailEnd type="triangle"/>
+          </a:ln>
+        </p:spPr>
+      </p:cxnSp>
+      <p:sp>
+        <p:nvSpPr>
+          <p:cNvPr id="23" name="Teach step 4"/>
+          <p:cNvSpPr txBox="1"/>
+          <p:nvPr/>
+        </p:nvSpPr>
+        <p:spPr>
+          <a:xfrm>
+            <a:off x="9098280" y="4892040"/>
+            <a:ext cx="2103120" cy="713232"/>
+          </a:xfrm>
+          <a:prstGeom prst="roundRect">
+            <a:avLst/>
+          </a:prstGeom>
+          <a:solidFill>
+            <a:srgbClr val="F97316"/>
+          </a:solidFill>
+          <a:ln>
+            <a:noFill/>
+          </a:ln>
+        </p:spPr>
+        <p:txBody>
+          <a:bodyPr wrap="square" lIns="22860" tIns="22860" rIns="22860" bIns="22860">
+            <a:spAutoFit/>
+          </a:bodyPr>
+          <a:lstStyle/>
+          <a:p>
+            <a:pPr algn="c"/>
+            <a:r>
+              <a:rPr lang="zh-CN" sz="1800" b="1">
+                <a:solidFill>
+                  <a:srgbClr val="FFFFFF"/>
+                </a:solidFill>
+                <a:latin typeface="Microsoft YaHei"/>
+                <a:ea typeface="Microsoft YaHei"/>
+              </a:rPr>
+              <a:t>4 开始检测</a:t>
+            </a:r>
+          </a:p>
+          <a:p>
+            <a:pPr algn="c"/>
+            <a:r>
+              <a:rPr lang="zh-CN" sz="1300">
+                <a:solidFill>
+                  <a:srgbClr val="FFFFFF"/>
+                </a:solidFill>
+                <a:latin typeface="Microsoft YaHei"/>
+                <a:ea typeface="Microsoft YaHei"/>
+              </a:rPr>
+              <a:t>更像 OK 还是 NG</a:t>
+            </a:r>
+          </a:p>
+        </p:txBody>
+      </p:sp>
+      <p:sp>
+        <p:nvSpPr>
+          <p:cNvPr id="24" name="Bottom summary"/>
+          <p:cNvSpPr txBox="1"/>
+          <p:nvPr/>
+        </p:nvSpPr>
+        <p:spPr>
+          <a:xfrm>
+            <a:off x="868680" y="5897880"/>
+            <a:ext cx="10287000" cy="438912"/>
+          </a:xfrm>
+          <a:prstGeom prst="roundRect">
+            <a:avLst/>
+          </a:prstGeom>
+          <a:solidFill>
+            <a:srgbClr val="FEF3C7"/>
+          </a:solidFill>
+          <a:ln w="12700">
+            <a:solidFill>
+              <a:srgbClr val="FDE68A"/>
+            </a:solidFill>
+          </a:ln>
+        </p:spPr>
+        <p:txBody>
+          <a:bodyPr wrap="square" lIns="18288" tIns="18288" rIns="18288" bIns="18288">
+            <a:spAutoFit/>
+          </a:bodyPr>
+          <a:lstStyle/>
+          <a:p>
+            <a:pPr algn="c"/>
+            <a:r>
+              <a:rPr lang="zh-CN" sz="1700" b="1">
+                <a:solidFill>
+                  <a:srgbClr val="111827"/>
+                </a:solidFill>
+                <a:latin typeface="Microsoft YaHei"/>
+                <a:ea typeface="Microsoft YaHei"/>
+              </a:rPr>
+              <a:t>一句话：传统代码把经验写进规则里；注册训练把经验沉淀成样本库，维护责任可以从软件工程师转移到现场工艺/设备人员。</a:t>
+            </a:r>
+          </a:p>
+        </p:txBody>
+      </p:sp>
     </p:spTree>
   </p:cSld>
   <p:clrMapOvr>
@@ -5102,6 +5893,63 @@
             <a:noFill/>
           </a:ln>
         </p:spPr>
+        <p:txBody>
+          <a:bodyPr/>
+          <a:p>
+            <a:r>
+              <a:rPr lang="en-US" altLang="zh-CN">
+                <a:solidFill>
+                  <a:srgbClr val="111827"/>
+                </a:solidFill>
+                <a:latin typeface="微软雅黑" panose="020B0503020204020204" charset="-122"/>
+                <a:ea typeface="微软雅黑" panose="020B0503020204020204" charset="-122"/>
+                <a:sym typeface="+mn-ea"/>
+              </a:rPr>
+              <a:t>   </a:t>
+            </a:r>
+            <a:r>
+              <a:rPr lang="en-US" altLang="zh-CN" b="1">
+                <a:solidFill>
+                  <a:srgbClr val="111827"/>
+                </a:solidFill>
+                <a:latin typeface="微软雅黑" panose="020B0503020204020204" charset="-122"/>
+                <a:ea typeface="微软雅黑" panose="020B0503020204020204" charset="-122"/>
+                <a:sym typeface="+mn-ea"/>
+              </a:rPr>
+              <a:t> </a:t>
+            </a:r>
+            <a:r>
+              <a:rPr lang="en-US" altLang="zh-CN" b="1">
+                <a:solidFill>
+                  <a:srgbClr val="FF0000"/>
+                </a:solidFill>
+                <a:latin typeface="微软雅黑" panose="020B0503020204020204" charset="-122"/>
+                <a:ea typeface="微软雅黑" panose="020B0503020204020204" charset="-122"/>
+                <a:sym typeface="+mn-ea"/>
+              </a:rPr>
+              <a:t> </a:t>
+            </a:r>
+            <a:r>
+              <a:rPr lang="zh-CN" b="1">
+                <a:solidFill>
+                  <a:srgbClr val="FF0000"/>
+                </a:solidFill>
+                <a:latin typeface="微软雅黑" panose="020B0503020204020204" charset="-122"/>
+                <a:ea typeface="微软雅黑" panose="020B0503020204020204" charset="-122"/>
+                <a:sym typeface="+mn-ea"/>
+              </a:rPr>
+              <a:t>产线少样本快速学习</a:t>
+            </a:r>
+            <a:endParaRPr lang="zh-CN" altLang="en-US" b="1">
+              <a:solidFill>
+                <a:srgbClr val="FF0000"/>
+              </a:solidFill>
+              <a:latin typeface="微软雅黑" panose="020B0503020204020204" charset="-122"/>
+              <a:ea typeface="微软雅黑" panose="020B0503020204020204" charset="-122"/>
+              <a:sym typeface="+mn-ea"/>
+            </a:endParaRPr>
+          </a:p>
+        </p:txBody>
       </p:sp>
       <p:sp>
         <p:nvSpPr>
@@ -5133,7 +5981,7 @@
         </p:nvSpPr>
         <p:spPr>
           <a:xfrm>
-            <a:off x="411480" y="137160"/>
+            <a:off x="1463040" y="548640"/>
             <a:ext cx="7132320" cy="457200"/>
           </a:xfrm>
           <a:prstGeom prst="rect">
@@ -5719,8 +6567,8 @@
         </p:nvSpPr>
         <p:spPr>
           <a:xfrm>
-            <a:off x="777240" y="4343400"/>
-            <a:ext cx="10149840" cy="1234440"/>
+            <a:off x="695325" y="4509135"/>
+            <a:ext cx="10149840" cy="1833880"/>
           </a:xfrm>
           <a:prstGeom prst="rect">
             <a:avLst/>
@@ -5736,7 +6584,7 @@
         </p:spPr>
         <p:txBody>
           <a:bodyPr wrap="square" lIns="73152" tIns="73152" rIns="73152" bIns="73152">
-            <a:spAutoFit/>
+            <a:noAutofit/>
           </a:bodyPr>
           <a:lstStyle/>
           <a:p>
